--- a/8_Modeling & Simulation.pptx
+++ b/8_Modeling & Simulation.pptx
@@ -5,7 +5,7 @@
     <p:sldMasterId id="2147483648" r:id="rId1"/>
   </p:sldMasterIdLst>
   <p:notesMasterIdLst>
-    <p:notesMasterId r:id="rId33"/>
+    <p:notesMasterId r:id="rId34"/>
   </p:notesMasterIdLst>
   <p:sldIdLst>
     <p:sldId id="256" r:id="rId2"/>
@@ -30,15 +30,16 @@
     <p:sldId id="304" r:id="rId21"/>
     <p:sldId id="926" r:id="rId22"/>
     <p:sldId id="928" r:id="rId23"/>
-    <p:sldId id="929" r:id="rId24"/>
-    <p:sldId id="305" r:id="rId25"/>
-    <p:sldId id="306" r:id="rId26"/>
-    <p:sldId id="388" r:id="rId27"/>
-    <p:sldId id="308" r:id="rId28"/>
-    <p:sldId id="311" r:id="rId29"/>
-    <p:sldId id="309" r:id="rId30"/>
-    <p:sldId id="310" r:id="rId31"/>
-    <p:sldId id="930" r:id="rId32"/>
+    <p:sldId id="931" r:id="rId24"/>
+    <p:sldId id="929" r:id="rId25"/>
+    <p:sldId id="305" r:id="rId26"/>
+    <p:sldId id="306" r:id="rId27"/>
+    <p:sldId id="388" r:id="rId28"/>
+    <p:sldId id="308" r:id="rId29"/>
+    <p:sldId id="311" r:id="rId30"/>
+    <p:sldId id="309" r:id="rId31"/>
+    <p:sldId id="310" r:id="rId32"/>
+    <p:sldId id="930" r:id="rId33"/>
   </p:sldIdLst>
   <p:sldSz cx="12192000" cy="6858000"/>
   <p:notesSz cx="6858000" cy="9144000"/>
@@ -669,7 +670,7 @@
             <a:pPr rtl="0"/>
             <a:fld id="{5FB91549-43BF-425A-AF25-75262019208C}" type="slidenum">
               <a:rPr lang="en-US" altLang="ko-KR" smtClean="0"/>
-              <a:t>30</a:t>
+              <a:t>31</a:t>
             </a:fld>
             <a:endParaRPr lang="ko-KR" altLang="en-US" dirty="0"/>
           </a:p>
@@ -996,7 +997,7 @@
             <a:pPr rtl="0"/>
             <a:fld id="{5FB91549-43BF-425A-AF25-75262019208C}" type="slidenum">
               <a:rPr lang="en-US" altLang="ko-KR" smtClean="0"/>
-              <a:t>24</a:t>
+              <a:t>25</a:t>
             </a:fld>
             <a:endParaRPr lang="ko-KR" altLang="en-US" dirty="0"/>
           </a:p>
@@ -1105,7 +1106,7 @@
             <a:pPr rtl="0"/>
             <a:fld id="{5FB91549-43BF-425A-AF25-75262019208C}" type="slidenum">
               <a:rPr lang="en-US" altLang="ko-KR" smtClean="0"/>
-              <a:t>25</a:t>
+              <a:t>26</a:t>
             </a:fld>
             <a:endParaRPr lang="ko-KR" altLang="en-US" dirty="0"/>
           </a:p>
@@ -1214,7 +1215,7 @@
             <a:pPr rtl="0"/>
             <a:fld id="{5FB91549-43BF-425A-AF25-75262019208C}" type="slidenum">
               <a:rPr lang="en-US" altLang="ko-KR" smtClean="0"/>
-              <a:t>26</a:t>
+              <a:t>27</a:t>
             </a:fld>
             <a:endParaRPr lang="ko-KR" altLang="en-US" dirty="0"/>
           </a:p>
@@ -1323,7 +1324,7 @@
             <a:pPr rtl="0"/>
             <a:fld id="{5FB91549-43BF-425A-AF25-75262019208C}" type="slidenum">
               <a:rPr lang="en-US" altLang="ko-KR" smtClean="0"/>
-              <a:t>27</a:t>
+              <a:t>28</a:t>
             </a:fld>
             <a:endParaRPr lang="ko-KR" altLang="en-US" dirty="0"/>
           </a:p>
@@ -1432,7 +1433,7 @@
             <a:pPr rtl="0"/>
             <a:fld id="{5FB91549-43BF-425A-AF25-75262019208C}" type="slidenum">
               <a:rPr lang="en-US" altLang="ko-KR" smtClean="0"/>
-              <a:t>28</a:t>
+              <a:t>29</a:t>
             </a:fld>
             <a:endParaRPr lang="ko-KR" altLang="en-US" dirty="0"/>
           </a:p>
@@ -1541,7 +1542,7 @@
             <a:pPr rtl="0"/>
             <a:fld id="{5FB91549-43BF-425A-AF25-75262019208C}" type="slidenum">
               <a:rPr lang="en-US" altLang="ko-KR" smtClean="0"/>
-              <a:t>29</a:t>
+              <a:t>30</a:t>
             </a:fld>
             <a:endParaRPr lang="ko-KR" altLang="en-US" dirty="0"/>
           </a:p>
@@ -10902,8 +10903,8 @@
           </a:p>
         </p:txBody>
       </p:sp>
-      <mc:AlternateContent xmlns:mc="http://schemas.openxmlformats.org/markup-compatibility/2006">
-        <mc:Choice xmlns:a14="http://schemas.microsoft.com/office/drawing/2010/main" Requires="a14">
+      <mc:AlternateContent xmlns:mc="http://schemas.openxmlformats.org/markup-compatibility/2006" xmlns:a14="http://schemas.microsoft.com/office/drawing/2010/main">
+        <mc:Choice Requires="a14">
           <p:sp>
             <p:nvSpPr>
               <p:cNvPr id="7" name="TextBox 6">
@@ -10949,7 +10950,7 @@
                     <m:f>
                       <m:fPr>
                         <m:ctrlPr>
-                          <a:rPr lang="ko-KR" altLang="en-US" sz="1700" dirty="0" smtClean="0">
+                          <a:rPr lang="ko-KR" altLang="en-US" sz="1700" i="1" dirty="0" smtClean="0">
                             <a:latin typeface="Cambria Math" panose="02040503050406030204" pitchFamily="18" charset="0"/>
                           </a:rPr>
                         </m:ctrlPr>
@@ -11159,19 +11160,7 @@
                       <a:rPr lang="ko-KR" altLang="en-US" sz="1700" i="1" dirty="0">
                         <a:latin typeface="Cambria Math" panose="02040503050406030204" pitchFamily="18" charset="0"/>
                       </a:rPr>
-                      <m:t>𝑘</m:t>
-                    </m:r>
-                    <m:r>
-                      <a:rPr lang="ko-KR" altLang="en-US" sz="1700" i="1" dirty="0">
-                        <a:latin typeface="Cambria Math" panose="02040503050406030204" pitchFamily="18" charset="0"/>
-                      </a:rPr>
-                      <m:t>𝑋</m:t>
-                    </m:r>
-                    <m:r>
-                      <a:rPr lang="ko-KR" altLang="en-US" sz="1700" i="1" dirty="0" err="1">
-                        <a:latin typeface="Cambria Math" panose="02040503050406030204" pitchFamily="18" charset="0"/>
-                      </a:rPr>
-                      <m:t>𝑌</m:t>
+                      <m:t>𝑘𝑋𝑌</m:t>
                     </m:r>
                   </m:oMath>
                 </a14:m>
@@ -11241,7 +11230,7 @@
             </p:txBody>
           </p:sp>
         </mc:Choice>
-        <mc:Fallback>
+        <mc:Fallback xmlns="">
           <p:sp>
             <p:nvSpPr>
               <p:cNvPr id="7" name="TextBox 6">
@@ -11294,8 +11283,8 @@
           </p:sp>
         </mc:Fallback>
       </mc:AlternateContent>
-      <mc:AlternateContent xmlns:mc="http://schemas.openxmlformats.org/markup-compatibility/2006">
-        <mc:Choice xmlns:a14="http://schemas.microsoft.com/office/drawing/2010/main" Requires="a14">
+      <mc:AlternateContent xmlns:mc="http://schemas.openxmlformats.org/markup-compatibility/2006" xmlns:a14="http://schemas.microsoft.com/office/drawing/2010/main">
+        <mc:Choice Requires="a14">
           <p:sp>
             <p:nvSpPr>
               <p:cNvPr id="12" name="TextBox 11">
@@ -11341,7 +11330,7 @@
                     <m:f>
                       <m:fPr>
                         <m:ctrlPr>
-                          <a:rPr lang="ko-KR" altLang="en-US" sz="1700" smtClean="0">
+                          <a:rPr lang="ko-KR" altLang="en-US" sz="1700" i="1" smtClean="0">
                             <a:latin typeface="Cambria Math" panose="02040503050406030204" pitchFamily="18" charset="0"/>
                           </a:rPr>
                         </m:ctrlPr>
@@ -11385,13 +11374,7 @@
                       <a:rPr lang="ko-KR" altLang="en-US" sz="1700" i="1" dirty="0">
                         <a:latin typeface="Cambria Math" panose="02040503050406030204" pitchFamily="18" charset="0"/>
                       </a:rPr>
-                      <m:t>𝑘</m:t>
-                    </m:r>
-                    <m:r>
-                      <a:rPr lang="ko-KR" altLang="en-US" sz="1700" i="1" dirty="0">
-                        <a:latin typeface="Cambria Math" panose="02040503050406030204" pitchFamily="18" charset="0"/>
-                      </a:rPr>
-                      <m:t>𝑋</m:t>
+                      <m:t>𝑘𝑋</m:t>
                     </m:r>
                     <m:r>
                       <a:rPr lang="ko-KR" altLang="en-US" sz="1700" i="1" dirty="0" err="1">
@@ -11587,7 +11570,7 @@
             </p:txBody>
           </p:sp>
         </mc:Choice>
-        <mc:Fallback>
+        <mc:Fallback xmlns="">
           <p:sp>
             <p:nvSpPr>
               <p:cNvPr id="12" name="TextBox 11">
@@ -11724,8 +11707,8 @@
           </a:prstGeom>
         </p:spPr>
       </p:pic>
-      <mc:AlternateContent xmlns:mc="http://schemas.openxmlformats.org/markup-compatibility/2006">
-        <mc:Choice xmlns:a14="http://schemas.microsoft.com/office/drawing/2010/main" Requires="a14">
+      <mc:AlternateContent xmlns:mc="http://schemas.openxmlformats.org/markup-compatibility/2006" xmlns:a14="http://schemas.microsoft.com/office/drawing/2010/main">
+        <mc:Choice Requires="a14">
           <p:sp>
             <p:nvSpPr>
               <p:cNvPr id="18" name="TextBox 17">
@@ -11775,7 +11758,7 @@
             </p:txBody>
           </p:sp>
         </mc:Choice>
-        <mc:Fallback>
+        <mc:Fallback xmlns="">
           <p:sp>
             <p:nvSpPr>
               <p:cNvPr id="18" name="TextBox 17">
@@ -11820,8 +11803,8 @@
           </p:sp>
         </mc:Fallback>
       </mc:AlternateContent>
-      <mc:AlternateContent xmlns:mc="http://schemas.openxmlformats.org/markup-compatibility/2006">
-        <mc:Choice xmlns:a14="http://schemas.microsoft.com/office/drawing/2010/main" Requires="a14">
+      <mc:AlternateContent xmlns:mc="http://schemas.openxmlformats.org/markup-compatibility/2006" xmlns:a14="http://schemas.microsoft.com/office/drawing/2010/main">
+        <mc:Choice Requires="a14">
           <p:sp>
             <p:nvSpPr>
               <p:cNvPr id="19" name="TextBox 18">
@@ -11850,7 +11833,6 @@
               </a:bodyPr>
               <a:lstStyle/>
               <a:p>
-                <a:pPr/>
                 <a14:m>
                   <m:oMath xmlns:m="http://schemas.openxmlformats.org/officeDocument/2006/math">
                     <m:r>
@@ -11892,7 +11874,7 @@
             </p:txBody>
           </p:sp>
         </mc:Choice>
-        <mc:Fallback>
+        <mc:Fallback xmlns="">
           <p:sp>
             <p:nvSpPr>
               <p:cNvPr id="19" name="TextBox 18">
@@ -11937,8 +11919,8 @@
           </p:sp>
         </mc:Fallback>
       </mc:AlternateContent>
-      <mc:AlternateContent xmlns:mc="http://schemas.openxmlformats.org/markup-compatibility/2006">
-        <mc:Choice xmlns:a14="http://schemas.microsoft.com/office/drawing/2010/main" Requires="a14">
+      <mc:AlternateContent xmlns:mc="http://schemas.openxmlformats.org/markup-compatibility/2006" xmlns:a14="http://schemas.microsoft.com/office/drawing/2010/main">
+        <mc:Choice Requires="a14">
           <p:sp>
             <p:nvSpPr>
               <p:cNvPr id="20" name="TextBox 19">
@@ -11967,7 +11949,6 @@
               </a:bodyPr>
               <a:lstStyle/>
               <a:p>
-                <a:pPr/>
                 <a14:m>
                   <m:oMath xmlns:m="http://schemas.openxmlformats.org/officeDocument/2006/math">
                     <m:r>
@@ -12009,7 +11990,7 @@
             </p:txBody>
           </p:sp>
         </mc:Choice>
-        <mc:Fallback>
+        <mc:Fallback xmlns="">
           <p:sp>
             <p:nvSpPr>
               <p:cNvPr id="20" name="TextBox 19">
@@ -12054,8 +12035,8 @@
           </p:sp>
         </mc:Fallback>
       </mc:AlternateContent>
-      <mc:AlternateContent xmlns:mc="http://schemas.openxmlformats.org/markup-compatibility/2006">
-        <mc:Choice xmlns:a14="http://schemas.microsoft.com/office/drawing/2010/main" Requires="a14">
+      <mc:AlternateContent xmlns:mc="http://schemas.openxmlformats.org/markup-compatibility/2006" xmlns:a14="http://schemas.microsoft.com/office/drawing/2010/main">
+        <mc:Choice Requires="a14">
           <p:sp>
             <p:nvSpPr>
               <p:cNvPr id="21" name="TextBox 20">
@@ -12084,7 +12065,6 @@
               </a:bodyPr>
               <a:lstStyle/>
               <a:p>
-                <a:pPr/>
                 <a14:m>
                   <m:oMath xmlns:m="http://schemas.openxmlformats.org/officeDocument/2006/math">
                     <m:r>
@@ -12126,7 +12106,7 @@
             </p:txBody>
           </p:sp>
         </mc:Choice>
-        <mc:Fallback>
+        <mc:Fallback xmlns="">
           <p:sp>
             <p:nvSpPr>
               <p:cNvPr id="21" name="TextBox 20">
@@ -13588,8 +13568,8 @@
           </a:p>
         </p:txBody>
       </p:sp>
-      <mc:AlternateContent xmlns:mc="http://schemas.openxmlformats.org/markup-compatibility/2006">
-        <mc:Choice xmlns:a14="http://schemas.microsoft.com/office/drawing/2010/main" Requires="a14">
+      <mc:AlternateContent xmlns:mc="http://schemas.openxmlformats.org/markup-compatibility/2006" xmlns:a14="http://schemas.microsoft.com/office/drawing/2010/main">
+        <mc:Choice Requires="a14">
           <p:sp>
             <p:nvSpPr>
               <p:cNvPr id="10" name="내용 개체 틀 2">
@@ -13889,7 +13869,7 @@
             </p:txBody>
           </p:sp>
         </mc:Choice>
-        <mc:Fallback>
+        <mc:Fallback xmlns="">
           <p:sp>
             <p:nvSpPr>
               <p:cNvPr id="10" name="내용 개체 틀 2">
@@ -16899,6 +16879,548 @@
         <p:cNvPr id="1" name="">
           <a:extLst>
             <a:ext uri="{FF2B5EF4-FFF2-40B4-BE49-F238E27FC236}">
+              <a16:creationId xmlns:a16="http://schemas.microsoft.com/office/drawing/2014/main" id="{118EF672-8248-82C7-642A-A1D72654E44B}"/>
+            </a:ext>
+          </a:extLst>
+        </p:cNvPr>
+        <p:cNvGrpSpPr/>
+        <p:nvPr/>
+      </p:nvGrpSpPr>
+      <p:grpSpPr>
+        <a:xfrm>
+          <a:off x="0" y="0"/>
+          <a:ext cx="0" cy="0"/>
+          <a:chOff x="0" y="0"/>
+          <a:chExt cx="0" cy="0"/>
+        </a:xfrm>
+      </p:grpSpPr>
+      <p:sp>
+        <p:nvSpPr>
+          <p:cNvPr id="9" name="제목 1">
+            <a:extLst>
+              <a:ext uri="{FF2B5EF4-FFF2-40B4-BE49-F238E27FC236}">
+                <a16:creationId xmlns:a16="http://schemas.microsoft.com/office/drawing/2014/main" id="{44E6679B-C856-67CB-A498-66743A507019}"/>
+              </a:ext>
+            </a:extLst>
+          </p:cNvPr>
+          <p:cNvSpPr>
+            <a:spLocks noGrp="1"/>
+          </p:cNvSpPr>
+          <p:nvPr>
+            <p:ph type="title"/>
+          </p:nvPr>
+        </p:nvSpPr>
+        <p:spPr>
+          <a:xfrm>
+            <a:off x="915383" y="139084"/>
+            <a:ext cx="10353762" cy="766439"/>
+          </a:xfrm>
+        </p:spPr>
+        <p:txBody>
+          <a:bodyPr/>
+          <a:lstStyle/>
+          <a:p>
+            <a:pPr algn="l"/>
+            <a:r>
+              <a:rPr lang="en-US" altLang="ko-KR" cap="none" dirty="0">
+                <a:latin typeface="ADLaM Display" panose="02010000000000000000" pitchFamily="2" charset="0"/>
+                <a:ea typeface="ADLaM Display" panose="02010000000000000000" pitchFamily="2" charset="0"/>
+                <a:cs typeface="ADLaM Display" panose="02010000000000000000" pitchFamily="2" charset="0"/>
+              </a:rPr>
+              <a:t>Hands-on </a:t>
+            </a:r>
+            <a:r>
+              <a:rPr lang="en-US" altLang="ko-KR" cap="none" dirty="0" err="1">
+                <a:latin typeface="ADLaM Display" panose="02010000000000000000" pitchFamily="2" charset="0"/>
+                <a:ea typeface="ADLaM Display" panose="02010000000000000000" pitchFamily="2" charset="0"/>
+                <a:cs typeface="ADLaM Display" panose="02010000000000000000" pitchFamily="2" charset="0"/>
+                <a:hlinkClick r:id="rId2">
+                  <a:extLst>
+                    <a:ext uri="{A12FA001-AC4F-418D-AE19-62706E023703}">
+                      <ahyp:hlinkClr xmlns:ahyp="http://schemas.microsoft.com/office/drawing/2018/hyperlinkcolor" val="tx"/>
+                    </a:ext>
+                  </a:extLst>
+                </a:hlinkClick>
+              </a:rPr>
+              <a:t>Random_Walk_Simulation</a:t>
+            </a:r>
+            <a:endParaRPr lang="ko-KR" altLang="en-US" cap="none" dirty="0">
+              <a:latin typeface="ADLaM Display" panose="02010000000000000000" pitchFamily="2" charset="0"/>
+              <a:cs typeface="ADLaM Display" panose="02010000000000000000" pitchFamily="2" charset="0"/>
+            </a:endParaRPr>
+          </a:p>
+        </p:txBody>
+      </p:sp>
+      <p:sp>
+        <p:nvSpPr>
+          <p:cNvPr id="10" name="내용 개체 틀 2">
+            <a:extLst>
+              <a:ext uri="{FF2B5EF4-FFF2-40B4-BE49-F238E27FC236}">
+                <a16:creationId xmlns:a16="http://schemas.microsoft.com/office/drawing/2014/main" id="{82EFBD4D-9D50-6C9B-D999-13A9C55F0C6F}"/>
+              </a:ext>
+            </a:extLst>
+          </p:cNvPr>
+          <p:cNvSpPr>
+            <a:spLocks noGrp="1"/>
+          </p:cNvSpPr>
+          <p:nvPr>
+            <p:ph idx="1"/>
+          </p:nvPr>
+        </p:nvSpPr>
+        <p:spPr>
+          <a:xfrm>
+            <a:off x="915383" y="1150965"/>
+            <a:ext cx="10758457" cy="1127163"/>
+          </a:xfrm>
+        </p:spPr>
+        <p:txBody>
+          <a:bodyPr>
+            <a:normAutofit/>
+          </a:bodyPr>
+          <a:lstStyle/>
+          <a:p>
+            <a:pPr>
+              <a:lnSpc>
+                <a:spcPct val="150000"/>
+              </a:lnSpc>
+              <a:buFont typeface="Wingdings" panose="05000000000000000000" pitchFamily="2" charset="2"/>
+              <a:buChar char="§"/>
+            </a:pPr>
+            <a:r>
+              <a:rPr lang="ko-KR" altLang="en-US" sz="2100" cap="none" dirty="0">
+                <a:latin typeface="맑은 고딕 Semilight" panose="020B0502040204020203" pitchFamily="50" charset="-127"/>
+                <a:ea typeface="맑은 고딕 Semilight" panose="020B0502040204020203" pitchFamily="50" charset="-127"/>
+                <a:cs typeface="맑은 고딕 Semilight" panose="020B0502040204020203" pitchFamily="50" charset="-127"/>
+              </a:rPr>
+              <a:t>아래</a:t>
+            </a:r>
+            <a:r>
+              <a:rPr lang="en-US" altLang="ko-KR" sz="2100" cap="none" dirty="0">
+                <a:latin typeface="맑은 고딕 Semilight" panose="020B0502040204020203" pitchFamily="50" charset="-127"/>
+                <a:ea typeface="맑은 고딕 Semilight" panose="020B0502040204020203" pitchFamily="50" charset="-127"/>
+                <a:cs typeface="맑은 고딕 Semilight" panose="020B0502040204020203" pitchFamily="50" charset="-127"/>
+              </a:rPr>
+              <a:t> </a:t>
+            </a:r>
+            <a:r>
+              <a:rPr lang="ko-KR" altLang="en-US" sz="2100" cap="none" dirty="0">
+                <a:latin typeface="맑은 고딕 Semilight" panose="020B0502040204020203" pitchFamily="50" charset="-127"/>
+                <a:ea typeface="맑은 고딕 Semilight" panose="020B0502040204020203" pitchFamily="50" charset="-127"/>
+                <a:cs typeface="맑은 고딕 Semilight" panose="020B0502040204020203" pitchFamily="50" charset="-127"/>
+              </a:rPr>
+              <a:t>모의실험을 베르누이</a:t>
+            </a:r>
+            <a:r>
+              <a:rPr lang="en-US" altLang="ko-KR" sz="2100" cap="none" dirty="0">
+                <a:latin typeface="맑은 고딕 Semilight" panose="020B0502040204020203" pitchFamily="50" charset="-127"/>
+                <a:ea typeface="맑은 고딕 Semilight" panose="020B0502040204020203" pitchFamily="50" charset="-127"/>
+                <a:cs typeface="맑은 고딕 Semilight" panose="020B0502040204020203" pitchFamily="50" charset="-127"/>
+              </a:rPr>
+              <a:t>, </a:t>
+            </a:r>
+            <a:r>
+              <a:rPr lang="ko-KR" altLang="en-US" sz="2100" cap="none" dirty="0">
+                <a:latin typeface="맑은 고딕 Semilight" panose="020B0502040204020203" pitchFamily="50" charset="-127"/>
+                <a:ea typeface="맑은 고딕 Semilight" panose="020B0502040204020203" pitchFamily="50" charset="-127"/>
+                <a:cs typeface="맑은 고딕 Semilight" panose="020B0502040204020203" pitchFamily="50" charset="-127"/>
+              </a:rPr>
+              <a:t>이항분포</a:t>
+            </a:r>
+            <a:r>
+              <a:rPr lang="en-US" altLang="ko-KR" sz="2100" cap="none" dirty="0">
+                <a:latin typeface="맑은 고딕 Semilight" panose="020B0502040204020203" pitchFamily="50" charset="-127"/>
+                <a:ea typeface="맑은 고딕 Semilight" panose="020B0502040204020203" pitchFamily="50" charset="-127"/>
+                <a:cs typeface="맑은 고딕 Semilight" panose="020B0502040204020203" pitchFamily="50" charset="-127"/>
+              </a:rPr>
+              <a:t>, Galton</a:t>
+            </a:r>
+            <a:r>
+              <a:rPr lang="ko-KR" altLang="en-US" sz="2100" cap="none" dirty="0">
+                <a:latin typeface="맑은 고딕 Semilight" panose="020B0502040204020203" pitchFamily="50" charset="-127"/>
+                <a:ea typeface="맑은 고딕 Semilight" panose="020B0502040204020203" pitchFamily="50" charset="-127"/>
+                <a:cs typeface="맑은 고딕 Semilight" panose="020B0502040204020203" pitchFamily="50" charset="-127"/>
+              </a:rPr>
+              <a:t> </a:t>
+            </a:r>
+            <a:r>
+              <a:rPr lang="en-US" altLang="ko-KR" sz="2100" cap="none" dirty="0">
+                <a:latin typeface="맑은 고딕 Semilight" panose="020B0502040204020203" pitchFamily="50" charset="-127"/>
+                <a:ea typeface="맑은 고딕 Semilight" panose="020B0502040204020203" pitchFamily="50" charset="-127"/>
+                <a:cs typeface="맑은 고딕 Semilight" panose="020B0502040204020203" pitchFamily="50" charset="-127"/>
+              </a:rPr>
+              <a:t>Board</a:t>
+            </a:r>
+            <a:r>
+              <a:rPr lang="ko-KR" altLang="en-US" sz="2100" cap="none" dirty="0">
+                <a:latin typeface="맑은 고딕 Semilight" panose="020B0502040204020203" pitchFamily="50" charset="-127"/>
+                <a:ea typeface="맑은 고딕 Semilight" panose="020B0502040204020203" pitchFamily="50" charset="-127"/>
+                <a:cs typeface="맑은 고딕 Semilight" panose="020B0502040204020203" pitchFamily="50" charset="-127"/>
+              </a:rPr>
+              <a:t>와 비교하여 이해하자</a:t>
+            </a:r>
+            <a:endParaRPr lang="en-US" altLang="ko-KR" sz="2100" cap="none" dirty="0">
+              <a:latin typeface="맑은 고딕 Semilight" panose="020B0502040204020203" pitchFamily="50" charset="-127"/>
+              <a:ea typeface="맑은 고딕 Semilight" panose="020B0502040204020203" pitchFamily="50" charset="-127"/>
+              <a:cs typeface="맑은 고딕 Semilight" panose="020B0502040204020203" pitchFamily="50" charset="-127"/>
+            </a:endParaRPr>
+          </a:p>
+          <a:p>
+            <a:pPr lvl="1">
+              <a:lnSpc>
+                <a:spcPct val="150000"/>
+              </a:lnSpc>
+              <a:buFont typeface="Wingdings" panose="05000000000000000000" pitchFamily="2" charset="2"/>
+              <a:buChar char="§"/>
+            </a:pPr>
+            <a:r>
+              <a:rPr lang="en-US" altLang="ko-KR" cap="none" dirty="0">
+                <a:latin typeface="맑은 고딕 Semilight" panose="020B0502040204020203" pitchFamily="50" charset="-127"/>
+                <a:ea typeface="맑은 고딕 Semilight" panose="020B0502040204020203" pitchFamily="50" charset="-127"/>
+                <a:cs typeface="맑은 고딕 Semilight" panose="020B0502040204020203" pitchFamily="50" charset="-127"/>
+              </a:rPr>
+              <a:t> </a:t>
+            </a:r>
+            <a:r>
+              <a:rPr lang="ko-KR" altLang="en-US" cap="none" dirty="0">
+                <a:latin typeface="맑은 고딕 Semilight" panose="020B0502040204020203" pitchFamily="50" charset="-127"/>
+                <a:ea typeface="맑은 고딕 Semilight" panose="020B0502040204020203" pitchFamily="50" charset="-127"/>
+                <a:cs typeface="맑은 고딕 Semilight" panose="020B0502040204020203" pitchFamily="50" charset="-127"/>
+              </a:rPr>
+              <a:t>구슬 </a:t>
+            </a:r>
+            <a:r>
+              <a:rPr lang="en-US" altLang="ko-KR" cap="none" dirty="0">
+                <a:latin typeface="맑은 고딕 Semilight" panose="020B0502040204020203" pitchFamily="50" charset="-127"/>
+                <a:ea typeface="맑은 고딕 Semilight" panose="020B0502040204020203" pitchFamily="50" charset="-127"/>
+                <a:cs typeface="맑은 고딕 Semilight" panose="020B0502040204020203" pitchFamily="50" charset="-127"/>
+              </a:rPr>
+              <a:t>?, single</a:t>
+            </a:r>
+            <a:r>
+              <a:rPr lang="ko-KR" altLang="en-US" cap="none" dirty="0">
+                <a:latin typeface="맑은 고딕 Semilight" panose="020B0502040204020203" pitchFamily="50" charset="-127"/>
+                <a:ea typeface="맑은 고딕 Semilight" panose="020B0502040204020203" pitchFamily="50" charset="-127"/>
+                <a:cs typeface="맑은 고딕 Semilight" panose="020B0502040204020203" pitchFamily="50" charset="-127"/>
+              </a:rPr>
+              <a:t> </a:t>
+            </a:r>
+            <a:r>
+              <a:rPr lang="en-US" altLang="ko-KR" cap="none" dirty="0">
+                <a:latin typeface="맑은 고딕 Semilight" panose="020B0502040204020203" pitchFamily="50" charset="-127"/>
+                <a:ea typeface="맑은 고딕 Semilight" panose="020B0502040204020203" pitchFamily="50" charset="-127"/>
+                <a:cs typeface="맑은 고딕 Semilight" panose="020B0502040204020203" pitchFamily="50" charset="-127"/>
+              </a:rPr>
+              <a:t>random walk ?, </a:t>
+            </a:r>
+            <a:r>
+              <a:rPr lang="ko-KR" altLang="en-US" cap="none" dirty="0">
+                <a:latin typeface="맑은 고딕 Semilight" panose="020B0502040204020203" pitchFamily="50" charset="-127"/>
+                <a:ea typeface="맑은 고딕 Semilight" panose="020B0502040204020203" pitchFamily="50" charset="-127"/>
+                <a:cs typeface="맑은 고딕 Semilight" panose="020B0502040204020203" pitchFamily="50" charset="-127"/>
+              </a:rPr>
+              <a:t>여러 명이 술이 취해 걸으면 최종 어디에 많이 모일까</a:t>
+            </a:r>
+            <a:r>
+              <a:rPr lang="en-US" altLang="ko-KR" cap="none" dirty="0">
+                <a:latin typeface="맑은 고딕 Semilight" panose="020B0502040204020203" pitchFamily="50" charset="-127"/>
+                <a:ea typeface="맑은 고딕 Semilight" panose="020B0502040204020203" pitchFamily="50" charset="-127"/>
+                <a:cs typeface="맑은 고딕 Semilight" panose="020B0502040204020203" pitchFamily="50" charset="-127"/>
+              </a:rPr>
+              <a:t>?</a:t>
+            </a:r>
+          </a:p>
+          <a:p>
+            <a:pPr>
+              <a:lnSpc>
+                <a:spcPct val="150000"/>
+              </a:lnSpc>
+              <a:buFont typeface="Wingdings" panose="05000000000000000000" pitchFamily="2" charset="2"/>
+              <a:buChar char="§"/>
+            </a:pPr>
+            <a:endParaRPr lang="ko-KR" altLang="en-US" cap="none" dirty="0">
+              <a:latin typeface="맑은 고딕 Semilight" panose="020B0502040204020203" pitchFamily="50" charset="-127"/>
+              <a:ea typeface="맑은 고딕 Semilight" panose="020B0502040204020203" pitchFamily="50" charset="-127"/>
+              <a:cs typeface="맑은 고딕 Semilight" panose="020B0502040204020203" pitchFamily="50" charset="-127"/>
+            </a:endParaRPr>
+          </a:p>
+        </p:txBody>
+      </p:sp>
+      <p:sp>
+        <p:nvSpPr>
+          <p:cNvPr id="2" name="슬라이드 번호 개체 틀 3">
+            <a:extLst>
+              <a:ext uri="{FF2B5EF4-FFF2-40B4-BE49-F238E27FC236}">
+                <a16:creationId xmlns:a16="http://schemas.microsoft.com/office/drawing/2014/main" id="{740FA9E5-9DC7-F236-DD83-8D1361045A43}"/>
+              </a:ext>
+            </a:extLst>
+          </p:cNvPr>
+          <p:cNvSpPr>
+            <a:spLocks noGrp="1"/>
+          </p:cNvSpPr>
+          <p:nvPr>
+            <p:ph type="sldNum" sz="quarter" idx="12"/>
+          </p:nvPr>
+        </p:nvSpPr>
+        <p:spPr>
+          <a:xfrm>
+            <a:off x="10512862" y="6035582"/>
+            <a:ext cx="753349" cy="365030"/>
+          </a:xfrm>
+        </p:spPr>
+        <p:txBody>
+          <a:bodyPr/>
+          <a:lstStyle/>
+          <a:p>
+            <a:fld id="{D57F1E4F-1CFF-5643-939E-217C01CDF565}" type="slidenum">
+              <a:rPr lang="en-US" smtClean="0"/>
+              <a:pPr/>
+              <a:t>23</a:t>
+            </a:fld>
+            <a:endParaRPr lang="en-US" dirty="0"/>
+          </a:p>
+        </p:txBody>
+      </p:sp>
+      <p:pic>
+        <p:nvPicPr>
+          <p:cNvPr id="9220" name="Picture 4">
+            <a:extLst>
+              <a:ext uri="{FF2B5EF4-FFF2-40B4-BE49-F238E27FC236}">
+                <a16:creationId xmlns:a16="http://schemas.microsoft.com/office/drawing/2014/main" id="{5503C7CB-F857-9A19-23EF-90925D633EC2}"/>
+              </a:ext>
+            </a:extLst>
+          </p:cNvPr>
+          <p:cNvPicPr>
+            <a:picLocks noChangeAspect="1" noChangeArrowheads="1"/>
+          </p:cNvPicPr>
+          <p:nvPr/>
+        </p:nvPicPr>
+        <p:blipFill>
+          <a:blip r:embed="rId3">
+            <a:extLst>
+              <a:ext uri="{28A0092B-C50C-407E-A947-70E740481C1C}">
+                <a14:useLocalDpi xmlns:a14="http://schemas.microsoft.com/office/drawing/2010/main" val="0"/>
+              </a:ext>
+            </a:extLst>
+          </a:blip>
+          <a:srcRect/>
+          <a:stretch>
+            <a:fillRect/>
+          </a:stretch>
+        </p:blipFill>
+        <p:spPr bwMode="auto">
+          <a:xfrm rot="5400000">
+            <a:off x="2057744" y="2688750"/>
+            <a:ext cx="3591005" cy="3260646"/>
+          </a:xfrm>
+          <a:prstGeom prst="rect">
+            <a:avLst/>
+          </a:prstGeom>
+          <a:noFill/>
+          <a:extLst>
+            <a:ext uri="{909E8E84-426E-40DD-AFC4-6F175D3DCCD1}">
+              <a14:hiddenFill xmlns:a14="http://schemas.microsoft.com/office/drawing/2010/main">
+                <a:solidFill>
+                  <a:srgbClr val="FFFFFF"/>
+                </a:solidFill>
+              </a14:hiddenFill>
+            </a:ext>
+          </a:extLst>
+        </p:spPr>
+      </p:pic>
+      <p:pic>
+        <p:nvPicPr>
+          <p:cNvPr id="3" name="Picture 2" descr="한 여자가 노트북 컴퓨터에 타이핑을 하고 있다">
+            <a:extLst>
+              <a:ext uri="{FF2B5EF4-FFF2-40B4-BE49-F238E27FC236}">
+                <a16:creationId xmlns:a16="http://schemas.microsoft.com/office/drawing/2014/main" id="{EE0FF5CD-1F36-1F02-9B8C-3FF66776338B}"/>
+              </a:ext>
+            </a:extLst>
+          </p:cNvPr>
+          <p:cNvPicPr>
+            <a:picLocks noChangeAspect="1" noChangeArrowheads="1"/>
+          </p:cNvPicPr>
+          <p:nvPr/>
+        </p:nvPicPr>
+        <p:blipFill>
+          <a:blip r:embed="rId4" cstate="print">
+            <a:extLst>
+              <a:ext uri="{28A0092B-C50C-407E-A947-70E740481C1C}">
+                <a14:useLocalDpi xmlns:a14="http://schemas.microsoft.com/office/drawing/2010/main" val="0"/>
+              </a:ext>
+            </a:extLst>
+          </a:blip>
+          <a:srcRect/>
+          <a:stretch>
+            <a:fillRect/>
+          </a:stretch>
+        </p:blipFill>
+        <p:spPr bwMode="auto">
+          <a:xfrm>
+            <a:off x="9869489" y="66676"/>
+            <a:ext cx="2152650" cy="1424329"/>
+          </a:xfrm>
+          <a:prstGeom prst="rect">
+            <a:avLst/>
+          </a:prstGeom>
+          <a:noFill/>
+          <a:extLst>
+            <a:ext uri="{909E8E84-426E-40DD-AFC4-6F175D3DCCD1}">
+              <a14:hiddenFill xmlns:a14="http://schemas.microsoft.com/office/drawing/2010/main">
+                <a:solidFill>
+                  <a:srgbClr val="FFFFFF"/>
+                </a:solidFill>
+              </a14:hiddenFill>
+            </a:ext>
+          </a:extLst>
+        </p:spPr>
+      </p:pic>
+      <p:pic>
+        <p:nvPicPr>
+          <p:cNvPr id="6" name="그림 5">
+            <a:extLst>
+              <a:ext uri="{FF2B5EF4-FFF2-40B4-BE49-F238E27FC236}">
+                <a16:creationId xmlns:a16="http://schemas.microsoft.com/office/drawing/2014/main" id="{D2404FA2-1A94-2E89-9A50-3FF05B24E7C8}"/>
+              </a:ext>
+            </a:extLst>
+          </p:cNvPr>
+          <p:cNvPicPr>
+            <a:picLocks noChangeAspect="1"/>
+          </p:cNvPicPr>
+          <p:nvPr/>
+        </p:nvPicPr>
+        <p:blipFill>
+          <a:blip r:embed="rId5"/>
+          <a:stretch>
+            <a:fillRect/>
+          </a:stretch>
+        </p:blipFill>
+        <p:spPr>
+          <a:xfrm>
+            <a:off x="6894051" y="2523570"/>
+            <a:ext cx="2671321" cy="3537335"/>
+          </a:xfrm>
+          <a:prstGeom prst="rect">
+            <a:avLst/>
+          </a:prstGeom>
+        </p:spPr>
+      </p:pic>
+      <mc:AlternateContent xmlns:mc="http://schemas.openxmlformats.org/markup-compatibility/2006">
+        <mc:Choice xmlns:a14="http://schemas.microsoft.com/office/drawing/2010/main" Requires="a14">
+          <p:sp>
+            <p:nvSpPr>
+              <p:cNvPr id="7" name="TextBox 6">
+                <a:extLst>
+                  <a:ext uri="{FF2B5EF4-FFF2-40B4-BE49-F238E27FC236}">
+                    <a16:creationId xmlns:a16="http://schemas.microsoft.com/office/drawing/2014/main" id="{074672EE-47B9-9ED0-D846-5A191A83C7B6}"/>
+                  </a:ext>
+                </a:extLst>
+              </p:cNvPr>
+              <p:cNvSpPr txBox="1"/>
+              <p:nvPr/>
+            </p:nvSpPr>
+            <p:spPr>
+              <a:xfrm>
+                <a:off x="5765892" y="3754120"/>
+                <a:ext cx="652743" cy="646331"/>
+              </a:xfrm>
+              <a:prstGeom prst="rect">
+                <a:avLst/>
+              </a:prstGeom>
+              <a:noFill/>
+            </p:spPr>
+            <p:txBody>
+              <a:bodyPr wrap="none" rtlCol="0">
+                <a:spAutoFit/>
+              </a:bodyPr>
+              <a:lstStyle/>
+              <a:p>
+                <a14:m>
+                  <m:oMathPara xmlns:m="http://schemas.openxmlformats.org/officeDocument/2006/math">
+                    <m:oMathParaPr>
+                      <m:jc m:val="centerGroup"/>
+                    </m:oMathParaPr>
+                    <m:oMath xmlns:m="http://schemas.openxmlformats.org/officeDocument/2006/math">
+                      <m:r>
+                        <a:rPr lang="en-US" altLang="ko-KR" sz="3600" b="1" i="1" smtClean="0">
+                          <a:latin typeface="Cambria Math" panose="02040503050406030204" pitchFamily="18" charset="0"/>
+                          <a:ea typeface="Cambria Math" panose="02040503050406030204" pitchFamily="18" charset="0"/>
+                        </a:rPr>
+                        <m:t>=</m:t>
+                      </m:r>
+                    </m:oMath>
+                  </m:oMathPara>
+                </a14:m>
+                <a:endParaRPr lang="ko-KR" altLang="en-US" sz="3600" b="1" dirty="0"/>
+              </a:p>
+            </p:txBody>
+          </p:sp>
+        </mc:Choice>
+        <mc:Fallback>
+          <p:sp>
+            <p:nvSpPr>
+              <p:cNvPr id="7" name="TextBox 6">
+                <a:extLst>
+                  <a:ext uri="{FF2B5EF4-FFF2-40B4-BE49-F238E27FC236}">
+                    <a16:creationId xmlns:a16="http://schemas.microsoft.com/office/drawing/2014/main" id="{074672EE-47B9-9ED0-D846-5A191A83C7B6}"/>
+                  </a:ext>
+                </a:extLst>
+              </p:cNvPr>
+              <p:cNvSpPr txBox="1">
+                <a:spLocks noRot="1" noChangeAspect="1" noMove="1" noResize="1" noEditPoints="1" noAdjustHandles="1" noChangeArrowheads="1" noChangeShapeType="1" noTextEdit="1"/>
+              </p:cNvSpPr>
+              <p:nvPr/>
+            </p:nvSpPr>
+            <p:spPr>
+              <a:xfrm>
+                <a:off x="5765892" y="3754120"/>
+                <a:ext cx="652743" cy="646331"/>
+              </a:xfrm>
+              <a:prstGeom prst="rect">
+                <a:avLst/>
+              </a:prstGeom>
+              <a:blipFill>
+                <a:blip r:embed="rId6"/>
+                <a:stretch>
+                  <a:fillRect/>
+                </a:stretch>
+              </a:blipFill>
+            </p:spPr>
+            <p:txBody>
+              <a:bodyPr/>
+              <a:lstStyle/>
+              <a:p>
+                <a:r>
+                  <a:rPr lang="ko-KR" altLang="en-US">
+                    <a:noFill/>
+                  </a:rPr>
+                  <a:t> </a:t>
+                </a:r>
+              </a:p>
+            </p:txBody>
+          </p:sp>
+        </mc:Fallback>
+      </mc:AlternateContent>
+    </p:spTree>
+    <p:extLst>
+      <p:ext uri="{BB962C8B-B14F-4D97-AF65-F5344CB8AC3E}">
+        <p14:creationId xmlns:p14="http://schemas.microsoft.com/office/powerpoint/2010/main" val="1710521469"/>
+      </p:ext>
+    </p:extLst>
+  </p:cSld>
+  <p:clrMapOvr>
+    <a:masterClrMapping/>
+  </p:clrMapOvr>
+</p:sld>
+</file>
+
+<file path=ppt/slides/slide24.xml><?xml version="1.0" encoding="utf-8"?>
+<p:sld xmlns:a="http://schemas.openxmlformats.org/drawingml/2006/main" xmlns:r="http://schemas.openxmlformats.org/officeDocument/2006/relationships" xmlns:p="http://schemas.openxmlformats.org/presentationml/2006/main">
+  <p:cSld>
+    <p:spTree>
+      <p:nvGrpSpPr>
+        <p:cNvPr id="1" name="">
+          <a:extLst>
+            <a:ext uri="{FF2B5EF4-FFF2-40B4-BE49-F238E27FC236}">
               <a16:creationId xmlns:a16="http://schemas.microsoft.com/office/drawing/2014/main" id="{4EBCC241-55B4-65D1-A85B-3FADCF3E9723}"/>
             </a:ext>
           </a:extLst>
@@ -17316,7 +17838,7 @@
             <a:fld id="{D57F1E4F-1CFF-5643-939E-217C01CDF565}" type="slidenum">
               <a:rPr lang="en-US" smtClean="0"/>
               <a:pPr/>
-              <a:t>23</a:t>
+              <a:t>24</a:t>
             </a:fld>
             <a:endParaRPr lang="en-US" dirty="0"/>
           </a:p>
@@ -17563,7 +18085,7 @@
 </p:sld>
 </file>
 
-<file path=ppt/slides/slide24.xml><?xml version="1.0" encoding="utf-8"?>
+<file path=ppt/slides/slide25.xml><?xml version="1.0" encoding="utf-8"?>
 <p:sld xmlns:a="http://schemas.openxmlformats.org/drawingml/2006/main" xmlns:r="http://schemas.openxmlformats.org/officeDocument/2006/relationships" xmlns:p="http://schemas.openxmlformats.org/presentationml/2006/main">
   <p:cSld>
     <p:spTree>
@@ -17819,7 +18341,7 @@
             <a:fld id="{D57F1E4F-1CFF-5643-939E-217C01CDF565}" type="slidenum">
               <a:rPr lang="en-US" smtClean="0"/>
               <a:pPr/>
-              <a:t>24</a:t>
+              <a:t>25</a:t>
             </a:fld>
             <a:endParaRPr lang="en-US" dirty="0"/>
           </a:p>
@@ -17876,966 +18398,6 @@
     <p:extLst>
       <p:ext uri="{BB962C8B-B14F-4D97-AF65-F5344CB8AC3E}">
         <p14:creationId xmlns:p14="http://schemas.microsoft.com/office/powerpoint/2010/main" val="3184162328"/>
-      </p:ext>
-    </p:extLst>
-  </p:cSld>
-  <p:clrMapOvr>
-    <a:masterClrMapping/>
-  </p:clrMapOvr>
-  <mc:AlternateContent xmlns:mc="http://schemas.openxmlformats.org/markup-compatibility/2006" xmlns:p14="http://schemas.microsoft.com/office/powerpoint/2010/main">
-    <mc:Choice Requires="p14">
-      <p:transition spd="med" p14:dur="700">
-        <p:fade/>
-      </p:transition>
-    </mc:Choice>
-    <mc:Fallback xmlns="">
-      <p:transition spd="med">
-        <p:fade/>
-      </p:transition>
-    </mc:Fallback>
-  </mc:AlternateContent>
-</p:sld>
-</file>
-
-<file path=ppt/slides/slide25.xml><?xml version="1.0" encoding="utf-8"?>
-<p:sld xmlns:a="http://schemas.openxmlformats.org/drawingml/2006/main" xmlns:r="http://schemas.openxmlformats.org/officeDocument/2006/relationships" xmlns:p="http://schemas.openxmlformats.org/presentationml/2006/main">
-  <p:cSld>
-    <p:spTree>
-      <p:nvGrpSpPr>
-        <p:cNvPr id="1" name="">
-          <a:extLst>
-            <a:ext uri="{FF2B5EF4-FFF2-40B4-BE49-F238E27FC236}">
-              <a16:creationId xmlns:a16="http://schemas.microsoft.com/office/drawing/2014/main" id="{4F32D5AF-0F51-91DE-64BD-5E17CEF9AA79}"/>
-            </a:ext>
-          </a:extLst>
-        </p:cNvPr>
-        <p:cNvGrpSpPr/>
-        <p:nvPr/>
-      </p:nvGrpSpPr>
-      <p:grpSpPr>
-        <a:xfrm>
-          <a:off x="0" y="0"/>
-          <a:ext cx="0" cy="0"/>
-          <a:chOff x="0" y="0"/>
-          <a:chExt cx="0" cy="0"/>
-        </a:xfrm>
-      </p:grpSpPr>
-      <p:sp>
-        <p:nvSpPr>
-          <p:cNvPr id="2" name="슬라이드 번호 개체 틀 1">
-            <a:extLst>
-              <a:ext uri="{FF2B5EF4-FFF2-40B4-BE49-F238E27FC236}">
-                <a16:creationId xmlns:a16="http://schemas.microsoft.com/office/drawing/2014/main" id="{D1B51CDD-C849-F07D-D7BE-8E0C6C436C59}"/>
-              </a:ext>
-            </a:extLst>
-          </p:cNvPr>
-          <p:cNvSpPr>
-            <a:spLocks noGrp="1"/>
-          </p:cNvSpPr>
-          <p:nvPr>
-            <p:ph type="sldNum" sz="quarter" idx="12"/>
-          </p:nvPr>
-        </p:nvSpPr>
-        <p:spPr/>
-        <p:txBody>
-          <a:bodyPr/>
-          <a:lstStyle/>
-          <a:p>
-            <a:pPr rtl="0"/>
-            <a:fld id="{A3F31473-23EB-4724-8B59-FE6D21D89FA4}" type="slidenum">
-              <a:rPr lang="en-US" altLang="ko-KR" noProof="0" smtClean="0"/>
-              <a:t>25</a:t>
-            </a:fld>
-            <a:endParaRPr lang="en-US" altLang="ko-KR" noProof="0" dirty="0"/>
-          </a:p>
-        </p:txBody>
-      </p:sp>
-      <p:sp>
-        <p:nvSpPr>
-          <p:cNvPr id="4" name="TextBox 3">
-            <a:extLst>
-              <a:ext uri="{FF2B5EF4-FFF2-40B4-BE49-F238E27FC236}">
-                <a16:creationId xmlns:a16="http://schemas.microsoft.com/office/drawing/2014/main" id="{E724D8FB-4BA4-B532-2690-FF91AAEE20BE}"/>
-              </a:ext>
-            </a:extLst>
-          </p:cNvPr>
-          <p:cNvSpPr txBox="1"/>
-          <p:nvPr/>
-        </p:nvSpPr>
-        <p:spPr>
-          <a:xfrm>
-            <a:off x="798974" y="1692410"/>
-            <a:ext cx="2930832" cy="509178"/>
-          </a:xfrm>
-          <a:prstGeom prst="rect">
-            <a:avLst/>
-          </a:prstGeom>
-          <a:solidFill>
-            <a:schemeClr val="bg1">
-              <a:lumMod val="95000"/>
-            </a:schemeClr>
-          </a:solidFill>
-        </p:spPr>
-        <p:txBody>
-          <a:bodyPr wrap="square" rtlCol="0">
-            <a:spAutoFit/>
-          </a:bodyPr>
-          <a:lstStyle/>
-          <a:p>
-            <a:pPr marL="285750" indent="-285750">
-              <a:lnSpc>
-                <a:spcPct val="150000"/>
-              </a:lnSpc>
-              <a:buFont typeface="Wingdings" panose="05000000000000000000" pitchFamily="2" charset="2"/>
-              <a:buChar char="v"/>
-            </a:pPr>
-            <a:r>
-              <a:rPr lang="en-US" altLang="ko-KR" sz="2000" dirty="0">
-                <a:latin typeface="맑은 고딕 Semilight" panose="020B0502040204020203" pitchFamily="50" charset="-127"/>
-                <a:ea typeface="맑은 고딕 Semilight" panose="020B0502040204020203" pitchFamily="50" charset="-127"/>
-                <a:cs typeface="맑은 고딕 Semilight" panose="020B0502040204020203" pitchFamily="50" charset="-127"/>
-                <a:hlinkClick r:id="rId3">
-                  <a:extLst>
-                    <a:ext uri="{A12FA001-AC4F-418D-AE19-62706E023703}">
-                      <ahyp:hlinkClr xmlns:ahyp="http://schemas.microsoft.com/office/drawing/2018/hyperlinkcolor" val="tx"/>
-                    </a:ext>
-                  </a:extLst>
-                </a:hlinkClick>
-              </a:rPr>
-              <a:t>Monty Hall Problem</a:t>
-            </a:r>
-            <a:r>
-              <a:rPr lang="en-US" altLang="ko-KR" sz="2000" dirty="0">
-                <a:latin typeface="맑은 고딕 Semilight" panose="020B0502040204020203" pitchFamily="50" charset="-127"/>
-                <a:ea typeface="맑은 고딕 Semilight" panose="020B0502040204020203" pitchFamily="50" charset="-127"/>
-                <a:cs typeface="맑은 고딕 Semilight" panose="020B0502040204020203" pitchFamily="50" charset="-127"/>
-              </a:rPr>
-              <a:t> </a:t>
-            </a:r>
-          </a:p>
-        </p:txBody>
-      </p:sp>
-      <p:sp>
-        <p:nvSpPr>
-          <p:cNvPr id="9" name="TextBox 8">
-            <a:extLst>
-              <a:ext uri="{FF2B5EF4-FFF2-40B4-BE49-F238E27FC236}">
-                <a16:creationId xmlns:a16="http://schemas.microsoft.com/office/drawing/2014/main" id="{92CE8694-F9D5-0985-6634-DA4CC7CB87C6}"/>
-              </a:ext>
-            </a:extLst>
-          </p:cNvPr>
-          <p:cNvSpPr txBox="1"/>
-          <p:nvPr/>
-        </p:nvSpPr>
-        <p:spPr>
-          <a:xfrm>
-            <a:off x="119336" y="260649"/>
-            <a:ext cx="2592288" cy="584775"/>
-          </a:xfrm>
-          <a:prstGeom prst="rect">
-            <a:avLst/>
-          </a:prstGeom>
-          <a:noFill/>
-        </p:spPr>
-        <p:txBody>
-          <a:bodyPr wrap="square" rtlCol="0">
-            <a:spAutoFit/>
-          </a:bodyPr>
-          <a:lstStyle/>
-          <a:p>
-            <a:r>
-              <a:rPr lang="ko-KR" altLang="en-US" sz="3200" b="1" dirty="0">
-                <a:latin typeface="맑은 고딕 Semilight" panose="020B0502040204020203" pitchFamily="50" charset="-127"/>
-                <a:ea typeface="맑은 고딕 Semilight" panose="020B0502040204020203" pitchFamily="50" charset="-127"/>
-                <a:cs typeface="맑은 고딕 Semilight" panose="020B0502040204020203" pitchFamily="50" charset="-127"/>
-              </a:rPr>
-              <a:t>문제 풀이</a:t>
-            </a:r>
-          </a:p>
-        </p:txBody>
-      </p:sp>
-      <p:pic>
-        <p:nvPicPr>
-          <p:cNvPr id="2050" name="Picture 2">
-            <a:extLst>
-              <a:ext uri="{FF2B5EF4-FFF2-40B4-BE49-F238E27FC236}">
-                <a16:creationId xmlns:a16="http://schemas.microsoft.com/office/drawing/2014/main" id="{3AFCC670-9D52-97E0-301E-31793E380890}"/>
-              </a:ext>
-            </a:extLst>
-          </p:cNvPr>
-          <p:cNvPicPr>
-            <a:picLocks noChangeAspect="1" noChangeArrowheads="1"/>
-          </p:cNvPicPr>
-          <p:nvPr/>
-        </p:nvPicPr>
-        <p:blipFill>
-          <a:blip r:embed="rId4">
-            <a:extLst>
-              <a:ext uri="{28A0092B-C50C-407E-A947-70E740481C1C}">
-                <a14:useLocalDpi xmlns:a14="http://schemas.microsoft.com/office/drawing/2010/main" val="0"/>
-              </a:ext>
-            </a:extLst>
-          </a:blip>
-          <a:srcRect/>
-          <a:stretch>
-            <a:fillRect/>
-          </a:stretch>
-        </p:blipFill>
-        <p:spPr bwMode="auto">
-          <a:xfrm>
-            <a:off x="1093614" y="2724107"/>
-            <a:ext cx="3466677" cy="1927473"/>
-          </a:xfrm>
-          <a:prstGeom prst="rect">
-            <a:avLst/>
-          </a:prstGeom>
-          <a:noFill/>
-          <a:extLst>
-            <a:ext uri="{909E8E84-426E-40DD-AFC4-6F175D3DCCD1}">
-              <a14:hiddenFill xmlns:a14="http://schemas.microsoft.com/office/drawing/2010/main">
-                <a:solidFill>
-                  <a:srgbClr val="FFFFFF"/>
-                </a:solidFill>
-              </a14:hiddenFill>
-            </a:ext>
-          </a:extLst>
-        </p:spPr>
-      </p:pic>
-      <p:pic>
-        <p:nvPicPr>
-          <p:cNvPr id="3" name="Picture 2">
-            <a:extLst>
-              <a:ext uri="{FF2B5EF4-FFF2-40B4-BE49-F238E27FC236}">
-                <a16:creationId xmlns:a16="http://schemas.microsoft.com/office/drawing/2014/main" id="{43315C22-DE09-0D77-BE86-D502CE453505}"/>
-              </a:ext>
-            </a:extLst>
-          </p:cNvPr>
-          <p:cNvPicPr>
-            <a:picLocks noChangeAspect="1" noChangeArrowheads="1"/>
-          </p:cNvPicPr>
-          <p:nvPr/>
-        </p:nvPicPr>
-        <p:blipFill>
-          <a:blip r:embed="rId4">
-            <a:extLst>
-              <a:ext uri="{28A0092B-C50C-407E-A947-70E740481C1C}">
-                <a14:useLocalDpi xmlns:a14="http://schemas.microsoft.com/office/drawing/2010/main" val="0"/>
-              </a:ext>
-            </a:extLst>
-          </a:blip>
-          <a:srcRect/>
-          <a:stretch>
-            <a:fillRect/>
-          </a:stretch>
-        </p:blipFill>
-        <p:spPr bwMode="auto">
-          <a:xfrm>
-            <a:off x="6132182" y="2764673"/>
-            <a:ext cx="1619245" cy="900301"/>
-          </a:xfrm>
-          <a:prstGeom prst="rect">
-            <a:avLst/>
-          </a:prstGeom>
-          <a:noFill/>
-          <a:extLst>
-            <a:ext uri="{909E8E84-426E-40DD-AFC4-6F175D3DCCD1}">
-              <a14:hiddenFill xmlns:a14="http://schemas.microsoft.com/office/drawing/2010/main">
-                <a:solidFill>
-                  <a:srgbClr val="FFFFFF"/>
-                </a:solidFill>
-              </a14:hiddenFill>
-            </a:ext>
-          </a:extLst>
-        </p:spPr>
-      </p:pic>
-      <p:pic>
-        <p:nvPicPr>
-          <p:cNvPr id="6" name="그림 5">
-            <a:extLst>
-              <a:ext uri="{FF2B5EF4-FFF2-40B4-BE49-F238E27FC236}">
-                <a16:creationId xmlns:a16="http://schemas.microsoft.com/office/drawing/2014/main" id="{FF37A84F-98D5-AD78-2108-B8AEF24ABB09}"/>
-              </a:ext>
-            </a:extLst>
-          </p:cNvPr>
-          <p:cNvPicPr>
-            <a:picLocks noChangeAspect="1"/>
-          </p:cNvPicPr>
-          <p:nvPr/>
-        </p:nvPicPr>
-        <p:blipFill>
-          <a:blip r:embed="rId5"/>
-          <a:stretch>
-            <a:fillRect/>
-          </a:stretch>
-        </p:blipFill>
-        <p:spPr>
-          <a:xfrm>
-            <a:off x="6051006" y="3900957"/>
-            <a:ext cx="815411" cy="975445"/>
-          </a:xfrm>
-          <a:prstGeom prst="rect">
-            <a:avLst/>
-          </a:prstGeom>
-        </p:spPr>
-      </p:pic>
-      <p:pic>
-        <p:nvPicPr>
-          <p:cNvPr id="8" name="그림 7">
-            <a:extLst>
-              <a:ext uri="{FF2B5EF4-FFF2-40B4-BE49-F238E27FC236}">
-                <a16:creationId xmlns:a16="http://schemas.microsoft.com/office/drawing/2014/main" id="{89B1586C-C92C-EECE-337A-38419DE5AFFA}"/>
-              </a:ext>
-            </a:extLst>
-          </p:cNvPr>
-          <p:cNvPicPr>
-            <a:picLocks noChangeAspect="1"/>
-          </p:cNvPicPr>
-          <p:nvPr/>
-        </p:nvPicPr>
-        <p:blipFill>
-          <a:blip r:embed="rId5"/>
-          <a:stretch>
-            <a:fillRect/>
-          </a:stretch>
-        </p:blipFill>
-        <p:spPr>
-          <a:xfrm>
-            <a:off x="6722623" y="3900957"/>
-            <a:ext cx="815411" cy="975445"/>
-          </a:xfrm>
-          <a:prstGeom prst="rect">
-            <a:avLst/>
-          </a:prstGeom>
-        </p:spPr>
-      </p:pic>
-      <p:pic>
-        <p:nvPicPr>
-          <p:cNvPr id="10" name="그림 9">
-            <a:extLst>
-              <a:ext uri="{FF2B5EF4-FFF2-40B4-BE49-F238E27FC236}">
-                <a16:creationId xmlns:a16="http://schemas.microsoft.com/office/drawing/2014/main" id="{E1E66379-8AED-85AD-941D-2FC2A6DCBFBD}"/>
-              </a:ext>
-            </a:extLst>
-          </p:cNvPr>
-          <p:cNvPicPr>
-            <a:picLocks noChangeAspect="1"/>
-          </p:cNvPicPr>
-          <p:nvPr/>
-        </p:nvPicPr>
-        <p:blipFill>
-          <a:blip r:embed="rId5"/>
-          <a:stretch>
-            <a:fillRect/>
-          </a:stretch>
-        </p:blipFill>
-        <p:spPr>
-          <a:xfrm>
-            <a:off x="7394240" y="3900957"/>
-            <a:ext cx="815411" cy="975445"/>
-          </a:xfrm>
-          <a:prstGeom prst="rect">
-            <a:avLst/>
-          </a:prstGeom>
-        </p:spPr>
-      </p:pic>
-      <p:pic>
-        <p:nvPicPr>
-          <p:cNvPr id="11" name="그림 10">
-            <a:extLst>
-              <a:ext uri="{FF2B5EF4-FFF2-40B4-BE49-F238E27FC236}">
-                <a16:creationId xmlns:a16="http://schemas.microsoft.com/office/drawing/2014/main" id="{9159CE25-5732-0E61-FC70-6FC5DEEA8045}"/>
-              </a:ext>
-            </a:extLst>
-          </p:cNvPr>
-          <p:cNvPicPr>
-            <a:picLocks noChangeAspect="1"/>
-          </p:cNvPicPr>
-          <p:nvPr/>
-        </p:nvPicPr>
-        <p:blipFill>
-          <a:blip r:embed="rId5"/>
-          <a:stretch>
-            <a:fillRect/>
-          </a:stretch>
-        </p:blipFill>
-        <p:spPr>
-          <a:xfrm>
-            <a:off x="8065857" y="3900957"/>
-            <a:ext cx="815411" cy="975445"/>
-          </a:xfrm>
-          <a:prstGeom prst="rect">
-            <a:avLst/>
-          </a:prstGeom>
-        </p:spPr>
-      </p:pic>
-      <p:pic>
-        <p:nvPicPr>
-          <p:cNvPr id="12" name="그림 11">
-            <a:extLst>
-              <a:ext uri="{FF2B5EF4-FFF2-40B4-BE49-F238E27FC236}">
-                <a16:creationId xmlns:a16="http://schemas.microsoft.com/office/drawing/2014/main" id="{84069638-5D65-FDE0-686D-96001F8881ED}"/>
-              </a:ext>
-            </a:extLst>
-          </p:cNvPr>
-          <p:cNvPicPr>
-            <a:picLocks noChangeAspect="1"/>
-          </p:cNvPicPr>
-          <p:nvPr/>
-        </p:nvPicPr>
-        <p:blipFill>
-          <a:blip r:embed="rId5"/>
-          <a:stretch>
-            <a:fillRect/>
-          </a:stretch>
-        </p:blipFill>
-        <p:spPr>
-          <a:xfrm>
-            <a:off x="8737474" y="3900957"/>
-            <a:ext cx="815411" cy="975445"/>
-          </a:xfrm>
-          <a:prstGeom prst="rect">
-            <a:avLst/>
-          </a:prstGeom>
-        </p:spPr>
-      </p:pic>
-      <p:pic>
-        <p:nvPicPr>
-          <p:cNvPr id="13" name="그림 12">
-            <a:extLst>
-              <a:ext uri="{FF2B5EF4-FFF2-40B4-BE49-F238E27FC236}">
-                <a16:creationId xmlns:a16="http://schemas.microsoft.com/office/drawing/2014/main" id="{E575F2FA-ACB7-78F7-B1A7-3E84ABC3B544}"/>
-              </a:ext>
-            </a:extLst>
-          </p:cNvPr>
-          <p:cNvPicPr>
-            <a:picLocks noChangeAspect="1"/>
-          </p:cNvPicPr>
-          <p:nvPr/>
-        </p:nvPicPr>
-        <p:blipFill>
-          <a:blip r:embed="rId5"/>
-          <a:stretch>
-            <a:fillRect/>
-          </a:stretch>
-        </p:blipFill>
-        <p:spPr>
-          <a:xfrm>
-            <a:off x="9409091" y="3900957"/>
-            <a:ext cx="815411" cy="975445"/>
-          </a:xfrm>
-          <a:prstGeom prst="rect">
-            <a:avLst/>
-          </a:prstGeom>
-        </p:spPr>
-      </p:pic>
-      <p:pic>
-        <p:nvPicPr>
-          <p:cNvPr id="14" name="그림 13">
-            <a:extLst>
-              <a:ext uri="{FF2B5EF4-FFF2-40B4-BE49-F238E27FC236}">
-                <a16:creationId xmlns:a16="http://schemas.microsoft.com/office/drawing/2014/main" id="{0FEE5B40-1E21-B3D8-55B6-432E2E592F1A}"/>
-              </a:ext>
-            </a:extLst>
-          </p:cNvPr>
-          <p:cNvPicPr>
-            <a:picLocks noChangeAspect="1"/>
-          </p:cNvPicPr>
-          <p:nvPr/>
-        </p:nvPicPr>
-        <p:blipFill>
-          <a:blip r:embed="rId5"/>
-          <a:stretch>
-            <a:fillRect/>
-          </a:stretch>
-        </p:blipFill>
-        <p:spPr>
-          <a:xfrm>
-            <a:off x="10080707" y="3900957"/>
-            <a:ext cx="815411" cy="975445"/>
-          </a:xfrm>
-          <a:prstGeom prst="rect">
-            <a:avLst/>
-          </a:prstGeom>
-        </p:spPr>
-      </p:pic>
-      <p:pic>
-        <p:nvPicPr>
-          <p:cNvPr id="18" name="그림 17">
-            <a:extLst>
-              <a:ext uri="{FF2B5EF4-FFF2-40B4-BE49-F238E27FC236}">
-                <a16:creationId xmlns:a16="http://schemas.microsoft.com/office/drawing/2014/main" id="{4EAA928D-47DE-DBD9-B4C4-37E1631C5A7C}"/>
-              </a:ext>
-            </a:extLst>
-          </p:cNvPr>
-          <p:cNvPicPr>
-            <a:picLocks noChangeAspect="1"/>
-          </p:cNvPicPr>
-          <p:nvPr/>
-        </p:nvPicPr>
-        <p:blipFill>
-          <a:blip r:embed="rId5"/>
-          <a:stretch>
-            <a:fillRect/>
-          </a:stretch>
-        </p:blipFill>
-        <p:spPr>
-          <a:xfrm>
-            <a:off x="6051006" y="5158257"/>
-            <a:ext cx="815411" cy="975445"/>
-          </a:xfrm>
-          <a:prstGeom prst="rect">
-            <a:avLst/>
-          </a:prstGeom>
-        </p:spPr>
-      </p:pic>
-      <p:pic>
-        <p:nvPicPr>
-          <p:cNvPr id="19" name="그림 18">
-            <a:extLst>
-              <a:ext uri="{FF2B5EF4-FFF2-40B4-BE49-F238E27FC236}">
-                <a16:creationId xmlns:a16="http://schemas.microsoft.com/office/drawing/2014/main" id="{E4AE634F-D801-E332-4B85-5D322DF3AFB3}"/>
-              </a:ext>
-            </a:extLst>
-          </p:cNvPr>
-          <p:cNvPicPr>
-            <a:picLocks noChangeAspect="1"/>
-          </p:cNvPicPr>
-          <p:nvPr/>
-        </p:nvPicPr>
-        <p:blipFill>
-          <a:blip r:embed="rId5"/>
-          <a:stretch>
-            <a:fillRect/>
-          </a:stretch>
-        </p:blipFill>
-        <p:spPr>
-          <a:xfrm>
-            <a:off x="6722623" y="5158257"/>
-            <a:ext cx="815411" cy="975445"/>
-          </a:xfrm>
-          <a:prstGeom prst="rect">
-            <a:avLst/>
-          </a:prstGeom>
-        </p:spPr>
-      </p:pic>
-      <p:pic>
-        <p:nvPicPr>
-          <p:cNvPr id="20" name="그림 19">
-            <a:extLst>
-              <a:ext uri="{FF2B5EF4-FFF2-40B4-BE49-F238E27FC236}">
-                <a16:creationId xmlns:a16="http://schemas.microsoft.com/office/drawing/2014/main" id="{CB32881A-FD31-9325-C6E7-5248E3C6D1F4}"/>
-              </a:ext>
-            </a:extLst>
-          </p:cNvPr>
-          <p:cNvPicPr>
-            <a:picLocks noChangeAspect="1"/>
-          </p:cNvPicPr>
-          <p:nvPr/>
-        </p:nvPicPr>
-        <p:blipFill>
-          <a:blip r:embed="rId5"/>
-          <a:stretch>
-            <a:fillRect/>
-          </a:stretch>
-        </p:blipFill>
-        <p:spPr>
-          <a:xfrm>
-            <a:off x="7394240" y="5158257"/>
-            <a:ext cx="815411" cy="975445"/>
-          </a:xfrm>
-          <a:prstGeom prst="rect">
-            <a:avLst/>
-          </a:prstGeom>
-        </p:spPr>
-      </p:pic>
-      <p:pic>
-        <p:nvPicPr>
-          <p:cNvPr id="21" name="그림 20">
-            <a:extLst>
-              <a:ext uri="{FF2B5EF4-FFF2-40B4-BE49-F238E27FC236}">
-                <a16:creationId xmlns:a16="http://schemas.microsoft.com/office/drawing/2014/main" id="{560C4216-BC6D-8454-4D96-0F01187DCCE7}"/>
-              </a:ext>
-            </a:extLst>
-          </p:cNvPr>
-          <p:cNvPicPr>
-            <a:picLocks noChangeAspect="1"/>
-          </p:cNvPicPr>
-          <p:nvPr/>
-        </p:nvPicPr>
-        <p:blipFill>
-          <a:blip r:embed="rId5"/>
-          <a:stretch>
-            <a:fillRect/>
-          </a:stretch>
-        </p:blipFill>
-        <p:spPr>
-          <a:xfrm>
-            <a:off x="8065857" y="5158257"/>
-            <a:ext cx="815411" cy="975445"/>
-          </a:xfrm>
-          <a:prstGeom prst="rect">
-            <a:avLst/>
-          </a:prstGeom>
-        </p:spPr>
-      </p:pic>
-      <p:pic>
-        <p:nvPicPr>
-          <p:cNvPr id="22" name="그림 21">
-            <a:extLst>
-              <a:ext uri="{FF2B5EF4-FFF2-40B4-BE49-F238E27FC236}">
-                <a16:creationId xmlns:a16="http://schemas.microsoft.com/office/drawing/2014/main" id="{13A4BD92-5A06-85BE-A3AA-232982853B41}"/>
-              </a:ext>
-            </a:extLst>
-          </p:cNvPr>
-          <p:cNvPicPr>
-            <a:picLocks noChangeAspect="1"/>
-          </p:cNvPicPr>
-          <p:nvPr/>
-        </p:nvPicPr>
-        <p:blipFill>
-          <a:blip r:embed="rId5"/>
-          <a:stretch>
-            <a:fillRect/>
-          </a:stretch>
-        </p:blipFill>
-        <p:spPr>
-          <a:xfrm>
-            <a:off x="8737474" y="5158257"/>
-            <a:ext cx="815411" cy="975445"/>
-          </a:xfrm>
-          <a:prstGeom prst="rect">
-            <a:avLst/>
-          </a:prstGeom>
-        </p:spPr>
-      </p:pic>
-      <p:pic>
-        <p:nvPicPr>
-          <p:cNvPr id="23" name="그림 22">
-            <a:extLst>
-              <a:ext uri="{FF2B5EF4-FFF2-40B4-BE49-F238E27FC236}">
-                <a16:creationId xmlns:a16="http://schemas.microsoft.com/office/drawing/2014/main" id="{206C91E5-88B9-0740-BBF7-F4144DD4A4AB}"/>
-              </a:ext>
-            </a:extLst>
-          </p:cNvPr>
-          <p:cNvPicPr>
-            <a:picLocks noChangeAspect="1"/>
-          </p:cNvPicPr>
-          <p:nvPr/>
-        </p:nvPicPr>
-        <p:blipFill>
-          <a:blip r:embed="rId5"/>
-          <a:stretch>
-            <a:fillRect/>
-          </a:stretch>
-        </p:blipFill>
-        <p:spPr>
-          <a:xfrm>
-            <a:off x="9409091" y="5158257"/>
-            <a:ext cx="815411" cy="975445"/>
-          </a:xfrm>
-          <a:prstGeom prst="rect">
-            <a:avLst/>
-          </a:prstGeom>
-        </p:spPr>
-      </p:pic>
-      <p:pic>
-        <p:nvPicPr>
-          <p:cNvPr id="24" name="그림 23">
-            <a:extLst>
-              <a:ext uri="{FF2B5EF4-FFF2-40B4-BE49-F238E27FC236}">
-                <a16:creationId xmlns:a16="http://schemas.microsoft.com/office/drawing/2014/main" id="{6104512E-4C9A-FCD8-2992-BCB7286B8520}"/>
-              </a:ext>
-            </a:extLst>
-          </p:cNvPr>
-          <p:cNvPicPr>
-            <a:picLocks noChangeAspect="1"/>
-          </p:cNvPicPr>
-          <p:nvPr/>
-        </p:nvPicPr>
-        <p:blipFill>
-          <a:blip r:embed="rId5"/>
-          <a:stretch>
-            <a:fillRect/>
-          </a:stretch>
-        </p:blipFill>
-        <p:spPr>
-          <a:xfrm>
-            <a:off x="10080707" y="5158257"/>
-            <a:ext cx="815411" cy="975445"/>
-          </a:xfrm>
-          <a:prstGeom prst="rect">
-            <a:avLst/>
-          </a:prstGeom>
-        </p:spPr>
-      </p:pic>
-      <p:pic>
-        <p:nvPicPr>
-          <p:cNvPr id="25" name="그림 24">
-            <a:extLst>
-              <a:ext uri="{FF2B5EF4-FFF2-40B4-BE49-F238E27FC236}">
-                <a16:creationId xmlns:a16="http://schemas.microsoft.com/office/drawing/2014/main" id="{AE3A43EF-64D5-A843-B2DD-72091B480A5D}"/>
-              </a:ext>
-            </a:extLst>
-          </p:cNvPr>
-          <p:cNvPicPr>
-            <a:picLocks noChangeAspect="1"/>
-          </p:cNvPicPr>
-          <p:nvPr/>
-        </p:nvPicPr>
-        <p:blipFill>
-          <a:blip r:embed="rId5"/>
-          <a:stretch>
-            <a:fillRect/>
-          </a:stretch>
-        </p:blipFill>
-        <p:spPr>
-          <a:xfrm>
-            <a:off x="8065857" y="2724107"/>
-            <a:ext cx="815411" cy="975445"/>
-          </a:xfrm>
-          <a:prstGeom prst="rect">
-            <a:avLst/>
-          </a:prstGeom>
-        </p:spPr>
-      </p:pic>
-      <p:pic>
-        <p:nvPicPr>
-          <p:cNvPr id="26" name="그림 25">
-            <a:extLst>
-              <a:ext uri="{FF2B5EF4-FFF2-40B4-BE49-F238E27FC236}">
-                <a16:creationId xmlns:a16="http://schemas.microsoft.com/office/drawing/2014/main" id="{1B1524A1-71FF-4AA4-1D38-3A81C21A7489}"/>
-              </a:ext>
-            </a:extLst>
-          </p:cNvPr>
-          <p:cNvPicPr>
-            <a:picLocks noChangeAspect="1"/>
-          </p:cNvPicPr>
-          <p:nvPr/>
-        </p:nvPicPr>
-        <p:blipFill>
-          <a:blip r:embed="rId5"/>
-          <a:stretch>
-            <a:fillRect/>
-          </a:stretch>
-        </p:blipFill>
-        <p:spPr>
-          <a:xfrm>
-            <a:off x="8737474" y="2724107"/>
-            <a:ext cx="815411" cy="975445"/>
-          </a:xfrm>
-          <a:prstGeom prst="rect">
-            <a:avLst/>
-          </a:prstGeom>
-        </p:spPr>
-      </p:pic>
-      <p:pic>
-        <p:nvPicPr>
-          <p:cNvPr id="27" name="그림 26">
-            <a:extLst>
-              <a:ext uri="{FF2B5EF4-FFF2-40B4-BE49-F238E27FC236}">
-                <a16:creationId xmlns:a16="http://schemas.microsoft.com/office/drawing/2014/main" id="{7A236CA2-8829-F5DE-B2CE-DCF16BEABA71}"/>
-              </a:ext>
-            </a:extLst>
-          </p:cNvPr>
-          <p:cNvPicPr>
-            <a:picLocks noChangeAspect="1"/>
-          </p:cNvPicPr>
-          <p:nvPr/>
-        </p:nvPicPr>
-        <p:blipFill>
-          <a:blip r:embed="rId5"/>
-          <a:stretch>
-            <a:fillRect/>
-          </a:stretch>
-        </p:blipFill>
-        <p:spPr>
-          <a:xfrm>
-            <a:off x="9409091" y="2724107"/>
-            <a:ext cx="815411" cy="975445"/>
-          </a:xfrm>
-          <a:prstGeom prst="rect">
-            <a:avLst/>
-          </a:prstGeom>
-        </p:spPr>
-      </p:pic>
-      <p:pic>
-        <p:nvPicPr>
-          <p:cNvPr id="28" name="그림 27">
-            <a:extLst>
-              <a:ext uri="{FF2B5EF4-FFF2-40B4-BE49-F238E27FC236}">
-                <a16:creationId xmlns:a16="http://schemas.microsoft.com/office/drawing/2014/main" id="{4F1B1D3F-5406-E68D-69A4-9B8AD695700A}"/>
-              </a:ext>
-            </a:extLst>
-          </p:cNvPr>
-          <p:cNvPicPr>
-            <a:picLocks noChangeAspect="1"/>
-          </p:cNvPicPr>
-          <p:nvPr/>
-        </p:nvPicPr>
-        <p:blipFill>
-          <a:blip r:embed="rId5"/>
-          <a:stretch>
-            <a:fillRect/>
-          </a:stretch>
-        </p:blipFill>
-        <p:spPr>
-          <a:xfrm>
-            <a:off x="10080707" y="2724107"/>
-            <a:ext cx="815411" cy="975445"/>
-          </a:xfrm>
-          <a:prstGeom prst="rect">
-            <a:avLst/>
-          </a:prstGeom>
-        </p:spPr>
-      </p:pic>
-      <p:pic>
-        <p:nvPicPr>
-          <p:cNvPr id="5" name="Picture 2" descr="한 여자가 노트북 컴퓨터에 타이핑을 하고 있다">
-            <a:extLst>
-              <a:ext uri="{FF2B5EF4-FFF2-40B4-BE49-F238E27FC236}">
-                <a16:creationId xmlns:a16="http://schemas.microsoft.com/office/drawing/2014/main" id="{CDB299DD-9795-FDF8-7F4C-6EA8A4B5B234}"/>
-              </a:ext>
-            </a:extLst>
-          </p:cNvPr>
-          <p:cNvPicPr>
-            <a:picLocks noChangeAspect="1" noChangeArrowheads="1"/>
-          </p:cNvPicPr>
-          <p:nvPr/>
-        </p:nvPicPr>
-        <p:blipFill>
-          <a:blip r:embed="rId6" cstate="print">
-            <a:extLst>
-              <a:ext uri="{28A0092B-C50C-407E-A947-70E740481C1C}">
-                <a14:useLocalDpi xmlns:a14="http://schemas.microsoft.com/office/drawing/2010/main" val="0"/>
-              </a:ext>
-            </a:extLst>
-          </a:blip>
-          <a:srcRect/>
-          <a:stretch>
-            <a:fillRect/>
-          </a:stretch>
-        </p:blipFill>
-        <p:spPr bwMode="auto">
-          <a:xfrm>
-            <a:off x="9869489" y="66676"/>
-            <a:ext cx="2152650" cy="1424329"/>
-          </a:xfrm>
-          <a:prstGeom prst="rect">
-            <a:avLst/>
-          </a:prstGeom>
-          <a:noFill/>
-          <a:extLst>
-            <a:ext uri="{909E8E84-426E-40DD-AFC4-6F175D3DCCD1}">
-              <a14:hiddenFill xmlns:a14="http://schemas.microsoft.com/office/drawing/2010/main">
-                <a:solidFill>
-                  <a:srgbClr val="FFFFFF"/>
-                </a:solidFill>
-              </a14:hiddenFill>
-            </a:ext>
-          </a:extLst>
-        </p:spPr>
-      </p:pic>
-      <p:sp>
-        <p:nvSpPr>
-          <p:cNvPr id="7" name="TextBox 6">
-            <a:extLst>
-              <a:ext uri="{FF2B5EF4-FFF2-40B4-BE49-F238E27FC236}">
-                <a16:creationId xmlns:a16="http://schemas.microsoft.com/office/drawing/2014/main" id="{EE3E5455-A30D-EF00-88BD-2B3F157983C4}"/>
-              </a:ext>
-            </a:extLst>
-          </p:cNvPr>
-          <p:cNvSpPr txBox="1"/>
-          <p:nvPr/>
-        </p:nvSpPr>
-        <p:spPr>
-          <a:xfrm>
-            <a:off x="6051006" y="1692410"/>
-            <a:ext cx="5342020" cy="509178"/>
-          </a:xfrm>
-          <a:prstGeom prst="rect">
-            <a:avLst/>
-          </a:prstGeom>
-          <a:solidFill>
-            <a:schemeClr val="bg1">
-              <a:lumMod val="95000"/>
-            </a:schemeClr>
-          </a:solidFill>
-        </p:spPr>
-        <p:txBody>
-          <a:bodyPr wrap="square" rtlCol="0">
-            <a:spAutoFit/>
-          </a:bodyPr>
-          <a:lstStyle/>
-          <a:p>
-            <a:pPr marL="285750" indent="-285750">
-              <a:lnSpc>
-                <a:spcPct val="150000"/>
-              </a:lnSpc>
-              <a:buFont typeface="Wingdings" panose="05000000000000000000" pitchFamily="2" charset="2"/>
-              <a:buChar char="v"/>
-            </a:pPr>
-            <a:r>
-              <a:rPr lang="en-US" altLang="ko-KR" sz="2000" dirty="0">
-                <a:latin typeface="맑은 고딕 Semilight" panose="020B0502040204020203" pitchFamily="50" charset="-127"/>
-                <a:ea typeface="맑은 고딕 Semilight" panose="020B0502040204020203" pitchFamily="50" charset="-127"/>
-                <a:cs typeface="맑은 고딕 Semilight" panose="020B0502040204020203" pitchFamily="50" charset="-127"/>
-                <a:hlinkClick r:id="rId3">
-                  <a:extLst>
-                    <a:ext uri="{A12FA001-AC4F-418D-AE19-62706E023703}">
-                      <ahyp:hlinkClr xmlns:ahyp="http://schemas.microsoft.com/office/drawing/2018/hyperlinkcolor" val="tx"/>
-                    </a:ext>
-                  </a:extLst>
-                </a:hlinkClick>
-              </a:rPr>
-              <a:t>Monty Hall Problem</a:t>
-            </a:r>
-            <a:r>
-              <a:rPr lang="en-US" altLang="ko-KR" sz="2000" dirty="0">
-                <a:latin typeface="맑은 고딕 Semilight" panose="020B0502040204020203" pitchFamily="50" charset="-127"/>
-                <a:ea typeface="맑은 고딕 Semilight" panose="020B0502040204020203" pitchFamily="50" charset="-127"/>
-                <a:cs typeface="맑은 고딕 Semilight" panose="020B0502040204020203" pitchFamily="50" charset="-127"/>
-              </a:rPr>
-              <a:t>, </a:t>
-            </a:r>
-            <a:r>
-              <a:rPr lang="ko-KR" altLang="en-US" sz="2000" dirty="0">
-                <a:latin typeface="맑은 고딕 Semilight" panose="020B0502040204020203" pitchFamily="50" charset="-127"/>
-                <a:ea typeface="맑은 고딕 Semilight" panose="020B0502040204020203" pitchFamily="50" charset="-127"/>
-                <a:cs typeface="맑은 고딕 Semilight" panose="020B0502040204020203" pitchFamily="50" charset="-127"/>
-              </a:rPr>
-              <a:t>문이 </a:t>
-            </a:r>
-            <a:r>
-              <a:rPr lang="en-US" altLang="ko-KR" sz="2000" dirty="0">
-                <a:latin typeface="맑은 고딕 Semilight" panose="020B0502040204020203" pitchFamily="50" charset="-127"/>
-                <a:ea typeface="맑은 고딕 Semilight" panose="020B0502040204020203" pitchFamily="50" charset="-127"/>
-                <a:cs typeface="맑은 고딕 Semilight" panose="020B0502040204020203" pitchFamily="50" charset="-127"/>
-              </a:rPr>
-              <a:t>10,000</a:t>
-            </a:r>
-            <a:r>
-              <a:rPr lang="ko-KR" altLang="en-US" sz="2000" dirty="0">
-                <a:latin typeface="맑은 고딕 Semilight" panose="020B0502040204020203" pitchFamily="50" charset="-127"/>
-                <a:ea typeface="맑은 고딕 Semilight" panose="020B0502040204020203" pitchFamily="50" charset="-127"/>
-                <a:cs typeface="맑은 고딕 Semilight" panose="020B0502040204020203" pitchFamily="50" charset="-127"/>
-              </a:rPr>
-              <a:t>개 라면</a:t>
-            </a:r>
-            <a:r>
-              <a:rPr lang="en-US" altLang="ko-KR" sz="2000" dirty="0">
-                <a:latin typeface="맑은 고딕 Semilight" panose="020B0502040204020203" pitchFamily="50" charset="-127"/>
-                <a:ea typeface="맑은 고딕 Semilight" panose="020B0502040204020203" pitchFamily="50" charset="-127"/>
-                <a:cs typeface="맑은 고딕 Semilight" panose="020B0502040204020203" pitchFamily="50" charset="-127"/>
-              </a:rPr>
-              <a:t>?</a:t>
-            </a:r>
-          </a:p>
-        </p:txBody>
-      </p:sp>
-    </p:spTree>
-    <p:extLst>
-      <p:ext uri="{BB962C8B-B14F-4D97-AF65-F5344CB8AC3E}">
-        <p14:creationId xmlns:p14="http://schemas.microsoft.com/office/powerpoint/2010/main" val="1646032272"/>
       </p:ext>
     </p:extLst>
   </p:cSld>
@@ -18865,7 +18427,7 @@
         <p:cNvPr id="1" name="">
           <a:extLst>
             <a:ext uri="{FF2B5EF4-FFF2-40B4-BE49-F238E27FC236}">
-              <a16:creationId xmlns:a16="http://schemas.microsoft.com/office/drawing/2014/main" id="{11EF696F-724F-26BD-9C71-E5EC7071092F}"/>
+              <a16:creationId xmlns:a16="http://schemas.microsoft.com/office/drawing/2014/main" id="{4F32D5AF-0F51-91DE-64BD-5E17CEF9AA79}"/>
             </a:ext>
           </a:extLst>
         </p:cNvPr>
@@ -18885,7 +18447,7 @@
           <p:cNvPr id="2" name="슬라이드 번호 개체 틀 1">
             <a:extLst>
               <a:ext uri="{FF2B5EF4-FFF2-40B4-BE49-F238E27FC236}">
-                <a16:creationId xmlns:a16="http://schemas.microsoft.com/office/drawing/2014/main" id="{B6626646-BEA0-FB3A-7822-5F9972BD64EE}"/>
+                <a16:creationId xmlns:a16="http://schemas.microsoft.com/office/drawing/2014/main" id="{D1B51CDD-C849-F07D-D7BE-8E0C6C436C59}"/>
               </a:ext>
             </a:extLst>
           </p:cNvPr>
@@ -18915,7 +18477,7 @@
           <p:cNvPr id="4" name="TextBox 3">
             <a:extLst>
               <a:ext uri="{FF2B5EF4-FFF2-40B4-BE49-F238E27FC236}">
-                <a16:creationId xmlns:a16="http://schemas.microsoft.com/office/drawing/2014/main" id="{B4456C07-5D3C-22AC-8A59-702C8C03FA3F}"/>
+                <a16:creationId xmlns:a16="http://schemas.microsoft.com/office/drawing/2014/main" id="{E724D8FB-4BA4-B532-2690-FF91AAEE20BE}"/>
               </a:ext>
             </a:extLst>
           </p:cNvPr>
@@ -18924,8 +18486,8 @@
         </p:nvSpPr>
         <p:spPr>
           <a:xfrm>
-            <a:off x="767408" y="1196753"/>
-            <a:ext cx="9102081" cy="2531783"/>
+            <a:off x="798974" y="1692410"/>
+            <a:ext cx="2930832" cy="509178"/>
           </a:xfrm>
           <a:prstGeom prst="rect">
             <a:avLst/>
@@ -18950,232 +18512,7 @@
               <a:buChar char="v"/>
             </a:pPr>
             <a:r>
-              <a:rPr lang="ko-KR" altLang="en-US" dirty="0">
-                <a:latin typeface="맑은 고딕 Semilight" panose="020B0502040204020203" pitchFamily="50" charset="-127"/>
-                <a:ea typeface="맑은 고딕 Semilight" panose="020B0502040204020203" pitchFamily="50" charset="-127"/>
-                <a:cs typeface="맑은 고딕 Semilight" panose="020B0502040204020203" pitchFamily="50" charset="-127"/>
-              </a:rPr>
-              <a:t>당신은 앞으로 인생에서 총 </a:t>
-            </a:r>
-            <a:r>
-              <a:rPr lang="en-US" altLang="ko-KR" dirty="0">
-                <a:latin typeface="맑은 고딕 Semilight" panose="020B0502040204020203" pitchFamily="50" charset="-127"/>
-                <a:ea typeface="맑은 고딕 Semilight" panose="020B0502040204020203" pitchFamily="50" charset="-127"/>
-                <a:cs typeface="맑은 고딕 Semilight" panose="020B0502040204020203" pitchFamily="50" charset="-127"/>
-              </a:rPr>
-              <a:t>N</a:t>
-            </a:r>
-            <a:r>
-              <a:rPr lang="ko-KR" altLang="en-US" dirty="0">
-                <a:latin typeface="맑은 고딕 Semilight" panose="020B0502040204020203" pitchFamily="50" charset="-127"/>
-                <a:ea typeface="맑은 고딕 Semilight" panose="020B0502040204020203" pitchFamily="50" charset="-127"/>
-                <a:cs typeface="맑은 고딕 Semilight" panose="020B0502040204020203" pitchFamily="50" charset="-127"/>
-              </a:rPr>
-              <a:t>명의 잠재적 파트너를 만날 수 있다고 가정</a:t>
-            </a:r>
-            <a:endParaRPr lang="en-US" altLang="ko-KR" dirty="0">
-              <a:latin typeface="맑은 고딕 Semilight" panose="020B0502040204020203" pitchFamily="50" charset="-127"/>
-              <a:ea typeface="맑은 고딕 Semilight" panose="020B0502040204020203" pitchFamily="50" charset="-127"/>
-              <a:cs typeface="맑은 고딕 Semilight" panose="020B0502040204020203" pitchFamily="50" charset="-127"/>
-            </a:endParaRPr>
-          </a:p>
-          <a:p>
-            <a:pPr marL="285750" indent="-285750">
-              <a:lnSpc>
-                <a:spcPct val="150000"/>
-              </a:lnSpc>
-              <a:buFont typeface="Wingdings" panose="05000000000000000000" pitchFamily="2" charset="2"/>
-              <a:buChar char="v"/>
-            </a:pPr>
-            <a:r>
-              <a:rPr lang="ko-KR" altLang="en-US" dirty="0">
-                <a:latin typeface="맑은 고딕 Semilight" panose="020B0502040204020203" pitchFamily="50" charset="-127"/>
-                <a:ea typeface="맑은 고딕 Semilight" panose="020B0502040204020203" pitchFamily="50" charset="-127"/>
-                <a:cs typeface="맑은 고딕 Semilight" panose="020B0502040204020203" pitchFamily="50" charset="-127"/>
-              </a:rPr>
-              <a:t>당신의 목표는 그중 가장 뛰어난 사람</a:t>
-            </a:r>
-            <a:r>
-              <a:rPr lang="en-US" altLang="ko-KR" dirty="0">
-                <a:latin typeface="맑은 고딕 Semilight" panose="020B0502040204020203" pitchFamily="50" charset="-127"/>
-                <a:ea typeface="맑은 고딕 Semilight" panose="020B0502040204020203" pitchFamily="50" charset="-127"/>
-                <a:cs typeface="맑은 고딕 Semilight" panose="020B0502040204020203" pitchFamily="50" charset="-127"/>
-              </a:rPr>
-              <a:t>(X)</a:t>
-            </a:r>
-            <a:r>
-              <a:rPr lang="ko-KR" altLang="en-US" dirty="0">
-                <a:latin typeface="맑은 고딕 Semilight" panose="020B0502040204020203" pitchFamily="50" charset="-127"/>
-                <a:ea typeface="맑은 고딕 Semilight" panose="020B0502040204020203" pitchFamily="50" charset="-127"/>
-                <a:cs typeface="맑은 고딕 Semilight" panose="020B0502040204020203" pitchFamily="50" charset="-127"/>
-              </a:rPr>
-              <a:t>과 매칭되는 것이며</a:t>
-            </a:r>
-            <a:r>
-              <a:rPr lang="en-US" altLang="ko-KR" dirty="0">
-                <a:latin typeface="맑은 고딕 Semilight" panose="020B0502040204020203" pitchFamily="50" charset="-127"/>
-                <a:ea typeface="맑은 고딕 Semilight" panose="020B0502040204020203" pitchFamily="50" charset="-127"/>
-                <a:cs typeface="맑은 고딕 Semilight" panose="020B0502040204020203" pitchFamily="50" charset="-127"/>
-              </a:rPr>
-              <a:t> </a:t>
-            </a:r>
-            <a:r>
-              <a:rPr lang="ko-KR" altLang="en-US" dirty="0">
-                <a:latin typeface="맑은 고딕 Semilight" panose="020B0502040204020203" pitchFamily="50" charset="-127"/>
-                <a:ea typeface="맑은 고딕 Semilight" panose="020B0502040204020203" pitchFamily="50" charset="-127"/>
-                <a:cs typeface="맑은 고딕 Semilight" panose="020B0502040204020203" pitchFamily="50" charset="-127"/>
-              </a:rPr>
-              <a:t>단</a:t>
-            </a:r>
-            <a:r>
-              <a:rPr lang="en-US" altLang="ko-KR" dirty="0">
-                <a:latin typeface="맑은 고딕 Semilight" panose="020B0502040204020203" pitchFamily="50" charset="-127"/>
-                <a:ea typeface="맑은 고딕 Semilight" panose="020B0502040204020203" pitchFamily="50" charset="-127"/>
-                <a:cs typeface="맑은 고딕 Semilight" panose="020B0502040204020203" pitchFamily="50" charset="-127"/>
-              </a:rPr>
-              <a:t>, </a:t>
-            </a:r>
-            <a:r>
-              <a:rPr lang="ko-KR" altLang="en-US" dirty="0">
-                <a:latin typeface="맑은 고딕 Semilight" panose="020B0502040204020203" pitchFamily="50" charset="-127"/>
-                <a:ea typeface="맑은 고딕 Semilight" panose="020B0502040204020203" pitchFamily="50" charset="-127"/>
-                <a:cs typeface="맑은 고딕 Semilight" panose="020B0502040204020203" pitchFamily="50" charset="-127"/>
-              </a:rPr>
-              <a:t>아래의 조건</a:t>
-            </a:r>
-            <a:endParaRPr lang="en-US" altLang="ko-KR" dirty="0">
-              <a:latin typeface="맑은 고딕 Semilight" panose="020B0502040204020203" pitchFamily="50" charset="-127"/>
-              <a:ea typeface="맑은 고딕 Semilight" panose="020B0502040204020203" pitchFamily="50" charset="-127"/>
-              <a:cs typeface="맑은 고딕 Semilight" panose="020B0502040204020203" pitchFamily="50" charset="-127"/>
-            </a:endParaRPr>
-          </a:p>
-          <a:p>
-            <a:pPr marL="742950" lvl="1" indent="-285750">
-              <a:lnSpc>
-                <a:spcPct val="150000"/>
-              </a:lnSpc>
-              <a:buFont typeface="Wingdings" panose="05000000000000000000" pitchFamily="2" charset="2"/>
-              <a:buChar char="v"/>
-            </a:pPr>
-            <a:r>
-              <a:rPr lang="ko-KR" altLang="en-US" dirty="0">
-                <a:latin typeface="맑은 고딕 Semilight" panose="020B0502040204020203" pitchFamily="50" charset="-127"/>
-                <a:ea typeface="맑은 고딕 Semilight" panose="020B0502040204020203" pitchFamily="50" charset="-127"/>
-                <a:cs typeface="맑은 고딕 Semilight" panose="020B0502040204020203" pitchFamily="50" charset="-127"/>
-              </a:rPr>
-              <a:t>한 번 거절한 사람에게는 다시 돌아갈 수 없음</a:t>
-            </a:r>
-            <a:endParaRPr lang="en-US" altLang="ko-KR" dirty="0">
-              <a:latin typeface="맑은 고딕 Semilight" panose="020B0502040204020203" pitchFamily="50" charset="-127"/>
-              <a:ea typeface="맑은 고딕 Semilight" panose="020B0502040204020203" pitchFamily="50" charset="-127"/>
-              <a:cs typeface="맑은 고딕 Semilight" panose="020B0502040204020203" pitchFamily="50" charset="-127"/>
-            </a:endParaRPr>
-          </a:p>
-          <a:p>
-            <a:pPr marL="742950" lvl="1" indent="-285750">
-              <a:lnSpc>
-                <a:spcPct val="150000"/>
-              </a:lnSpc>
-              <a:buFont typeface="Wingdings" panose="05000000000000000000" pitchFamily="2" charset="2"/>
-              <a:buChar char="v"/>
-            </a:pPr>
-            <a:r>
-              <a:rPr lang="ko-KR" altLang="en-US" dirty="0">
-                <a:latin typeface="맑은 고딕 Semilight" panose="020B0502040204020203" pitchFamily="50" charset="-127"/>
-                <a:ea typeface="맑은 고딕 Semilight" panose="020B0502040204020203" pitchFamily="50" charset="-127"/>
-                <a:cs typeface="맑은 고딕 Semilight" panose="020B0502040204020203" pitchFamily="50" charset="-127"/>
-              </a:rPr>
-              <a:t>만나는 순서는 무작위이며</a:t>
-            </a:r>
-            <a:r>
-              <a:rPr lang="en-US" altLang="ko-KR" dirty="0">
-                <a:latin typeface="맑은 고딕 Semilight" panose="020B0502040204020203" pitchFamily="50" charset="-127"/>
-                <a:ea typeface="맑은 고딕 Semilight" panose="020B0502040204020203" pitchFamily="50" charset="-127"/>
-                <a:cs typeface="맑은 고딕 Semilight" panose="020B0502040204020203" pitchFamily="50" charset="-127"/>
-              </a:rPr>
-              <a:t>, </a:t>
-            </a:r>
-            <a:r>
-              <a:rPr lang="ko-KR" altLang="en-US" dirty="0">
-                <a:latin typeface="맑은 고딕 Semilight" panose="020B0502040204020203" pitchFamily="50" charset="-127"/>
-                <a:ea typeface="맑은 고딕 Semilight" panose="020B0502040204020203" pitchFamily="50" charset="-127"/>
-                <a:cs typeface="맑은 고딕 Semilight" panose="020B0502040204020203" pitchFamily="50" charset="-127"/>
-              </a:rPr>
-              <a:t>당신은 상대를 만날 때마다 점수를 매길 수 있음</a:t>
-            </a:r>
-            <a:endParaRPr lang="en-US" altLang="ko-KR" dirty="0">
-              <a:latin typeface="맑은 고딕 Semilight" panose="020B0502040204020203" pitchFamily="50" charset="-127"/>
-              <a:ea typeface="맑은 고딕 Semilight" panose="020B0502040204020203" pitchFamily="50" charset="-127"/>
-              <a:cs typeface="맑은 고딕 Semilight" panose="020B0502040204020203" pitchFamily="50" charset="-127"/>
-            </a:endParaRPr>
-          </a:p>
-          <a:p>
-            <a:pPr marL="285750" indent="-285750">
-              <a:lnSpc>
-                <a:spcPct val="150000"/>
-              </a:lnSpc>
-              <a:buFont typeface="Wingdings" panose="05000000000000000000" pitchFamily="2" charset="2"/>
-              <a:buChar char="v"/>
-            </a:pPr>
-            <a:r>
-              <a:rPr lang="ko-KR" altLang="en-US" dirty="0">
-                <a:latin typeface="맑은 고딕 Semilight" panose="020B0502040204020203" pitchFamily="50" charset="-127"/>
-                <a:ea typeface="맑은 고딕 Semilight" panose="020B0502040204020203" pitchFamily="50" charset="-127"/>
-                <a:cs typeface="맑은 고딕 Semilight" panose="020B0502040204020203" pitchFamily="50" charset="-127"/>
-              </a:rPr>
-              <a:t>가장 좋은 사람</a:t>
-            </a:r>
-            <a:r>
-              <a:rPr lang="en-US" altLang="ko-KR" dirty="0">
-                <a:latin typeface="맑은 고딕 Semilight" panose="020B0502040204020203" pitchFamily="50" charset="-127"/>
-                <a:ea typeface="맑은 고딕 Semilight" panose="020B0502040204020203" pitchFamily="50" charset="-127"/>
-                <a:cs typeface="맑은 고딕 Semilight" panose="020B0502040204020203" pitchFamily="50" charset="-127"/>
-              </a:rPr>
-              <a:t>(X)</a:t>
-            </a:r>
-            <a:r>
-              <a:rPr lang="ko-KR" altLang="en-US" dirty="0">
-                <a:latin typeface="맑은 고딕 Semilight" panose="020B0502040204020203" pitchFamily="50" charset="-127"/>
-                <a:ea typeface="맑은 고딕 Semilight" panose="020B0502040204020203" pitchFamily="50" charset="-127"/>
-                <a:cs typeface="맑은 고딕 Semilight" panose="020B0502040204020203" pitchFamily="50" charset="-127"/>
-              </a:rPr>
-              <a:t>을 선택할 확률을 최대화하려면</a:t>
-            </a:r>
-            <a:r>
-              <a:rPr lang="en-US" altLang="ko-KR" dirty="0">
-                <a:latin typeface="맑은 고딕 Semilight" panose="020B0502040204020203" pitchFamily="50" charset="-127"/>
-                <a:ea typeface="맑은 고딕 Semilight" panose="020B0502040204020203" pitchFamily="50" charset="-127"/>
-                <a:cs typeface="맑은 고딕 Semilight" panose="020B0502040204020203" pitchFamily="50" charset="-127"/>
-              </a:rPr>
-              <a:t>, </a:t>
-            </a:r>
-            <a:r>
-              <a:rPr lang="ko-KR" altLang="en-US" dirty="0">
-                <a:latin typeface="맑은 고딕 Semilight" panose="020B0502040204020203" pitchFamily="50" charset="-127"/>
-                <a:ea typeface="맑은 고딕 Semilight" panose="020B0502040204020203" pitchFamily="50" charset="-127"/>
-                <a:cs typeface="맑은 고딕 Semilight" panose="020B0502040204020203" pitchFamily="50" charset="-127"/>
-              </a:rPr>
-              <a:t>몇 번째 사람을 선책해야 하나요</a:t>
-            </a:r>
-            <a:r>
-              <a:rPr lang="en-US" altLang="ko-KR" dirty="0">
-                <a:latin typeface="맑은 고딕 Semilight" panose="020B0502040204020203" pitchFamily="50" charset="-127"/>
-                <a:ea typeface="맑은 고딕 Semilight" panose="020B0502040204020203" pitchFamily="50" charset="-127"/>
-                <a:cs typeface="맑은 고딕 Semilight" panose="020B0502040204020203" pitchFamily="50" charset="-127"/>
-              </a:rPr>
-              <a:t>?</a:t>
-            </a:r>
-          </a:p>
-          <a:p>
-            <a:pPr marL="742950" lvl="1" indent="-285750">
-              <a:lnSpc>
-                <a:spcPct val="150000"/>
-              </a:lnSpc>
-              <a:buFont typeface="Wingdings" panose="05000000000000000000" pitchFamily="2" charset="2"/>
-              <a:buChar char="v"/>
-            </a:pPr>
-            <a:r>
-              <a:rPr lang="en-US" altLang="ko-KR" dirty="0">
+              <a:rPr lang="en-US" altLang="ko-KR" sz="2000" dirty="0">
                 <a:latin typeface="맑은 고딕 Semilight" panose="020B0502040204020203" pitchFamily="50" charset="-127"/>
                 <a:ea typeface="맑은 고딕 Semilight" panose="020B0502040204020203" pitchFamily="50" charset="-127"/>
                 <a:cs typeface="맑은 고딕 Semilight" panose="020B0502040204020203" pitchFamily="50" charset="-127"/>
@@ -19187,13 +18524,16 @@
                   </a:extLst>
                 </a:hlinkClick>
               </a:rPr>
-              <a:t>mathematical-dating</a:t>
-            </a:r>
-            <a:endParaRPr lang="en-US" altLang="ko-KR" dirty="0">
-              <a:latin typeface="맑은 고딕 Semilight" panose="020B0502040204020203" pitchFamily="50" charset="-127"/>
-              <a:ea typeface="맑은 고딕 Semilight" panose="020B0502040204020203" pitchFamily="50" charset="-127"/>
-              <a:cs typeface="맑은 고딕 Semilight" panose="020B0502040204020203" pitchFamily="50" charset="-127"/>
-            </a:endParaRPr>
+              <a:t>Monty Hall Problem</a:t>
+            </a:r>
+            <a:r>
+              <a:rPr lang="en-US" altLang="ko-KR" sz="2000" dirty="0">
+                <a:latin typeface="맑은 고딕 Semilight" panose="020B0502040204020203" pitchFamily="50" charset="-127"/>
+                <a:ea typeface="맑은 고딕 Semilight" panose="020B0502040204020203" pitchFamily="50" charset="-127"/>
+                <a:cs typeface="맑은 고딕 Semilight" panose="020B0502040204020203" pitchFamily="50" charset="-127"/>
+              </a:rPr>
+              <a:t> </a:t>
+            </a:r>
           </a:p>
         </p:txBody>
       </p:sp>
@@ -19202,7 +18542,7 @@
           <p:cNvPr id="9" name="TextBox 8">
             <a:extLst>
               <a:ext uri="{FF2B5EF4-FFF2-40B4-BE49-F238E27FC236}">
-                <a16:creationId xmlns:a16="http://schemas.microsoft.com/office/drawing/2014/main" id="{185BE9C9-E7C6-D55A-BC46-CD975C33457A}"/>
+                <a16:creationId xmlns:a16="http://schemas.microsoft.com/office/drawing/2014/main" id="{92CE8694-F9D5-0985-6634-DA4CC7CB87C6}"/>
               </a:ext>
             </a:extLst>
           </p:cNvPr>
@@ -19238,40 +18578,10 @@
       </p:sp>
       <p:pic>
         <p:nvPicPr>
-          <p:cNvPr id="6" name="그림 5">
+          <p:cNvPr id="2050" name="Picture 2">
             <a:extLst>
               <a:ext uri="{FF2B5EF4-FFF2-40B4-BE49-F238E27FC236}">
-                <a16:creationId xmlns:a16="http://schemas.microsoft.com/office/drawing/2014/main" id="{BE0093E0-2B37-39B8-6DB9-925B18522DF0}"/>
-              </a:ext>
-            </a:extLst>
-          </p:cNvPr>
-          <p:cNvPicPr>
-            <a:picLocks noChangeAspect="1"/>
-          </p:cNvPicPr>
-          <p:nvPr/>
-        </p:nvPicPr>
-        <p:blipFill>
-          <a:blip r:embed="rId4"/>
-          <a:stretch>
-            <a:fillRect/>
-          </a:stretch>
-        </p:blipFill>
-        <p:spPr>
-          <a:xfrm>
-            <a:off x="4033275" y="3861558"/>
-            <a:ext cx="3334215" cy="1994109"/>
-          </a:xfrm>
-          <a:prstGeom prst="rect">
-            <a:avLst/>
-          </a:prstGeom>
-        </p:spPr>
-      </p:pic>
-      <p:pic>
-        <p:nvPicPr>
-          <p:cNvPr id="3" name="Picture 2" descr="한 여자가 노트북 컴퓨터에 타이핑을 하고 있다">
-            <a:extLst>
-              <a:ext uri="{FF2B5EF4-FFF2-40B4-BE49-F238E27FC236}">
-                <a16:creationId xmlns:a16="http://schemas.microsoft.com/office/drawing/2014/main" id="{9D41C8BB-9143-9759-5675-5DDCD0405FE7}"/>
+                <a16:creationId xmlns:a16="http://schemas.microsoft.com/office/drawing/2014/main" id="{3AFCC670-9D52-97E0-301E-31793E380890}"/>
               </a:ext>
             </a:extLst>
           </p:cNvPr>
@@ -19281,7 +18591,7 @@
           <p:nvPr/>
         </p:nvPicPr>
         <p:blipFill>
-          <a:blip r:embed="rId5" cstate="print">
+          <a:blip r:embed="rId4">
             <a:extLst>
               <a:ext uri="{28A0092B-C50C-407E-A947-70E740481C1C}">
                 <a14:useLocalDpi xmlns:a14="http://schemas.microsoft.com/office/drawing/2010/main" val="0"/>
@@ -19295,8 +18605,8 @@
         </p:blipFill>
         <p:spPr bwMode="auto">
           <a:xfrm>
-            <a:off x="9869489" y="66676"/>
-            <a:ext cx="2152650" cy="1424329"/>
+            <a:off x="1093614" y="2724107"/>
+            <a:ext cx="3466677" cy="1927473"/>
           </a:xfrm>
           <a:prstGeom prst="rect">
             <a:avLst/>
@@ -19313,10 +18623,741 @@
           </a:extLst>
         </p:spPr>
       </p:pic>
+      <p:pic>
+        <p:nvPicPr>
+          <p:cNvPr id="3" name="Picture 2">
+            <a:extLst>
+              <a:ext uri="{FF2B5EF4-FFF2-40B4-BE49-F238E27FC236}">
+                <a16:creationId xmlns:a16="http://schemas.microsoft.com/office/drawing/2014/main" id="{43315C22-DE09-0D77-BE86-D502CE453505}"/>
+              </a:ext>
+            </a:extLst>
+          </p:cNvPr>
+          <p:cNvPicPr>
+            <a:picLocks noChangeAspect="1" noChangeArrowheads="1"/>
+          </p:cNvPicPr>
+          <p:nvPr/>
+        </p:nvPicPr>
+        <p:blipFill>
+          <a:blip r:embed="rId4">
+            <a:extLst>
+              <a:ext uri="{28A0092B-C50C-407E-A947-70E740481C1C}">
+                <a14:useLocalDpi xmlns:a14="http://schemas.microsoft.com/office/drawing/2010/main" val="0"/>
+              </a:ext>
+            </a:extLst>
+          </a:blip>
+          <a:srcRect/>
+          <a:stretch>
+            <a:fillRect/>
+          </a:stretch>
+        </p:blipFill>
+        <p:spPr bwMode="auto">
+          <a:xfrm>
+            <a:off x="6132182" y="2764673"/>
+            <a:ext cx="1619245" cy="900301"/>
+          </a:xfrm>
+          <a:prstGeom prst="rect">
+            <a:avLst/>
+          </a:prstGeom>
+          <a:noFill/>
+          <a:extLst>
+            <a:ext uri="{909E8E84-426E-40DD-AFC4-6F175D3DCCD1}">
+              <a14:hiddenFill xmlns:a14="http://schemas.microsoft.com/office/drawing/2010/main">
+                <a:solidFill>
+                  <a:srgbClr val="FFFFFF"/>
+                </a:solidFill>
+              </a14:hiddenFill>
+            </a:ext>
+          </a:extLst>
+        </p:spPr>
+      </p:pic>
+      <p:pic>
+        <p:nvPicPr>
+          <p:cNvPr id="6" name="그림 5">
+            <a:extLst>
+              <a:ext uri="{FF2B5EF4-FFF2-40B4-BE49-F238E27FC236}">
+                <a16:creationId xmlns:a16="http://schemas.microsoft.com/office/drawing/2014/main" id="{FF37A84F-98D5-AD78-2108-B8AEF24ABB09}"/>
+              </a:ext>
+            </a:extLst>
+          </p:cNvPr>
+          <p:cNvPicPr>
+            <a:picLocks noChangeAspect="1"/>
+          </p:cNvPicPr>
+          <p:nvPr/>
+        </p:nvPicPr>
+        <p:blipFill>
+          <a:blip r:embed="rId5"/>
+          <a:stretch>
+            <a:fillRect/>
+          </a:stretch>
+        </p:blipFill>
+        <p:spPr>
+          <a:xfrm>
+            <a:off x="6051006" y="3900957"/>
+            <a:ext cx="815411" cy="975445"/>
+          </a:xfrm>
+          <a:prstGeom prst="rect">
+            <a:avLst/>
+          </a:prstGeom>
+        </p:spPr>
+      </p:pic>
+      <p:pic>
+        <p:nvPicPr>
+          <p:cNvPr id="8" name="그림 7">
+            <a:extLst>
+              <a:ext uri="{FF2B5EF4-FFF2-40B4-BE49-F238E27FC236}">
+                <a16:creationId xmlns:a16="http://schemas.microsoft.com/office/drawing/2014/main" id="{89B1586C-C92C-EECE-337A-38419DE5AFFA}"/>
+              </a:ext>
+            </a:extLst>
+          </p:cNvPr>
+          <p:cNvPicPr>
+            <a:picLocks noChangeAspect="1"/>
+          </p:cNvPicPr>
+          <p:nvPr/>
+        </p:nvPicPr>
+        <p:blipFill>
+          <a:blip r:embed="rId5"/>
+          <a:stretch>
+            <a:fillRect/>
+          </a:stretch>
+        </p:blipFill>
+        <p:spPr>
+          <a:xfrm>
+            <a:off x="6722623" y="3900957"/>
+            <a:ext cx="815411" cy="975445"/>
+          </a:xfrm>
+          <a:prstGeom prst="rect">
+            <a:avLst/>
+          </a:prstGeom>
+        </p:spPr>
+      </p:pic>
+      <p:pic>
+        <p:nvPicPr>
+          <p:cNvPr id="10" name="그림 9">
+            <a:extLst>
+              <a:ext uri="{FF2B5EF4-FFF2-40B4-BE49-F238E27FC236}">
+                <a16:creationId xmlns:a16="http://schemas.microsoft.com/office/drawing/2014/main" id="{E1E66379-8AED-85AD-941D-2FC2A6DCBFBD}"/>
+              </a:ext>
+            </a:extLst>
+          </p:cNvPr>
+          <p:cNvPicPr>
+            <a:picLocks noChangeAspect="1"/>
+          </p:cNvPicPr>
+          <p:nvPr/>
+        </p:nvPicPr>
+        <p:blipFill>
+          <a:blip r:embed="rId5"/>
+          <a:stretch>
+            <a:fillRect/>
+          </a:stretch>
+        </p:blipFill>
+        <p:spPr>
+          <a:xfrm>
+            <a:off x="7394240" y="3900957"/>
+            <a:ext cx="815411" cy="975445"/>
+          </a:xfrm>
+          <a:prstGeom prst="rect">
+            <a:avLst/>
+          </a:prstGeom>
+        </p:spPr>
+      </p:pic>
+      <p:pic>
+        <p:nvPicPr>
+          <p:cNvPr id="11" name="그림 10">
+            <a:extLst>
+              <a:ext uri="{FF2B5EF4-FFF2-40B4-BE49-F238E27FC236}">
+                <a16:creationId xmlns:a16="http://schemas.microsoft.com/office/drawing/2014/main" id="{9159CE25-5732-0E61-FC70-6FC5DEEA8045}"/>
+              </a:ext>
+            </a:extLst>
+          </p:cNvPr>
+          <p:cNvPicPr>
+            <a:picLocks noChangeAspect="1"/>
+          </p:cNvPicPr>
+          <p:nvPr/>
+        </p:nvPicPr>
+        <p:blipFill>
+          <a:blip r:embed="rId5"/>
+          <a:stretch>
+            <a:fillRect/>
+          </a:stretch>
+        </p:blipFill>
+        <p:spPr>
+          <a:xfrm>
+            <a:off x="8065857" y="3900957"/>
+            <a:ext cx="815411" cy="975445"/>
+          </a:xfrm>
+          <a:prstGeom prst="rect">
+            <a:avLst/>
+          </a:prstGeom>
+        </p:spPr>
+      </p:pic>
+      <p:pic>
+        <p:nvPicPr>
+          <p:cNvPr id="12" name="그림 11">
+            <a:extLst>
+              <a:ext uri="{FF2B5EF4-FFF2-40B4-BE49-F238E27FC236}">
+                <a16:creationId xmlns:a16="http://schemas.microsoft.com/office/drawing/2014/main" id="{84069638-5D65-FDE0-686D-96001F8881ED}"/>
+              </a:ext>
+            </a:extLst>
+          </p:cNvPr>
+          <p:cNvPicPr>
+            <a:picLocks noChangeAspect="1"/>
+          </p:cNvPicPr>
+          <p:nvPr/>
+        </p:nvPicPr>
+        <p:blipFill>
+          <a:blip r:embed="rId5"/>
+          <a:stretch>
+            <a:fillRect/>
+          </a:stretch>
+        </p:blipFill>
+        <p:spPr>
+          <a:xfrm>
+            <a:off x="8737474" y="3900957"/>
+            <a:ext cx="815411" cy="975445"/>
+          </a:xfrm>
+          <a:prstGeom prst="rect">
+            <a:avLst/>
+          </a:prstGeom>
+        </p:spPr>
+      </p:pic>
+      <p:pic>
+        <p:nvPicPr>
+          <p:cNvPr id="13" name="그림 12">
+            <a:extLst>
+              <a:ext uri="{FF2B5EF4-FFF2-40B4-BE49-F238E27FC236}">
+                <a16:creationId xmlns:a16="http://schemas.microsoft.com/office/drawing/2014/main" id="{E575F2FA-ACB7-78F7-B1A7-3E84ABC3B544}"/>
+              </a:ext>
+            </a:extLst>
+          </p:cNvPr>
+          <p:cNvPicPr>
+            <a:picLocks noChangeAspect="1"/>
+          </p:cNvPicPr>
+          <p:nvPr/>
+        </p:nvPicPr>
+        <p:blipFill>
+          <a:blip r:embed="rId5"/>
+          <a:stretch>
+            <a:fillRect/>
+          </a:stretch>
+        </p:blipFill>
+        <p:spPr>
+          <a:xfrm>
+            <a:off x="9409091" y="3900957"/>
+            <a:ext cx="815411" cy="975445"/>
+          </a:xfrm>
+          <a:prstGeom prst="rect">
+            <a:avLst/>
+          </a:prstGeom>
+        </p:spPr>
+      </p:pic>
+      <p:pic>
+        <p:nvPicPr>
+          <p:cNvPr id="14" name="그림 13">
+            <a:extLst>
+              <a:ext uri="{FF2B5EF4-FFF2-40B4-BE49-F238E27FC236}">
+                <a16:creationId xmlns:a16="http://schemas.microsoft.com/office/drawing/2014/main" id="{0FEE5B40-1E21-B3D8-55B6-432E2E592F1A}"/>
+              </a:ext>
+            </a:extLst>
+          </p:cNvPr>
+          <p:cNvPicPr>
+            <a:picLocks noChangeAspect="1"/>
+          </p:cNvPicPr>
+          <p:nvPr/>
+        </p:nvPicPr>
+        <p:blipFill>
+          <a:blip r:embed="rId5"/>
+          <a:stretch>
+            <a:fillRect/>
+          </a:stretch>
+        </p:blipFill>
+        <p:spPr>
+          <a:xfrm>
+            <a:off x="10080707" y="3900957"/>
+            <a:ext cx="815411" cy="975445"/>
+          </a:xfrm>
+          <a:prstGeom prst="rect">
+            <a:avLst/>
+          </a:prstGeom>
+        </p:spPr>
+      </p:pic>
+      <p:pic>
+        <p:nvPicPr>
+          <p:cNvPr id="18" name="그림 17">
+            <a:extLst>
+              <a:ext uri="{FF2B5EF4-FFF2-40B4-BE49-F238E27FC236}">
+                <a16:creationId xmlns:a16="http://schemas.microsoft.com/office/drawing/2014/main" id="{4EAA928D-47DE-DBD9-B4C4-37E1631C5A7C}"/>
+              </a:ext>
+            </a:extLst>
+          </p:cNvPr>
+          <p:cNvPicPr>
+            <a:picLocks noChangeAspect="1"/>
+          </p:cNvPicPr>
+          <p:nvPr/>
+        </p:nvPicPr>
+        <p:blipFill>
+          <a:blip r:embed="rId5"/>
+          <a:stretch>
+            <a:fillRect/>
+          </a:stretch>
+        </p:blipFill>
+        <p:spPr>
+          <a:xfrm>
+            <a:off x="6051006" y="5158257"/>
+            <a:ext cx="815411" cy="975445"/>
+          </a:xfrm>
+          <a:prstGeom prst="rect">
+            <a:avLst/>
+          </a:prstGeom>
+        </p:spPr>
+      </p:pic>
+      <p:pic>
+        <p:nvPicPr>
+          <p:cNvPr id="19" name="그림 18">
+            <a:extLst>
+              <a:ext uri="{FF2B5EF4-FFF2-40B4-BE49-F238E27FC236}">
+                <a16:creationId xmlns:a16="http://schemas.microsoft.com/office/drawing/2014/main" id="{E4AE634F-D801-E332-4B85-5D322DF3AFB3}"/>
+              </a:ext>
+            </a:extLst>
+          </p:cNvPr>
+          <p:cNvPicPr>
+            <a:picLocks noChangeAspect="1"/>
+          </p:cNvPicPr>
+          <p:nvPr/>
+        </p:nvPicPr>
+        <p:blipFill>
+          <a:blip r:embed="rId5"/>
+          <a:stretch>
+            <a:fillRect/>
+          </a:stretch>
+        </p:blipFill>
+        <p:spPr>
+          <a:xfrm>
+            <a:off x="6722623" y="5158257"/>
+            <a:ext cx="815411" cy="975445"/>
+          </a:xfrm>
+          <a:prstGeom prst="rect">
+            <a:avLst/>
+          </a:prstGeom>
+        </p:spPr>
+      </p:pic>
+      <p:pic>
+        <p:nvPicPr>
+          <p:cNvPr id="20" name="그림 19">
+            <a:extLst>
+              <a:ext uri="{FF2B5EF4-FFF2-40B4-BE49-F238E27FC236}">
+                <a16:creationId xmlns:a16="http://schemas.microsoft.com/office/drawing/2014/main" id="{CB32881A-FD31-9325-C6E7-5248E3C6D1F4}"/>
+              </a:ext>
+            </a:extLst>
+          </p:cNvPr>
+          <p:cNvPicPr>
+            <a:picLocks noChangeAspect="1"/>
+          </p:cNvPicPr>
+          <p:nvPr/>
+        </p:nvPicPr>
+        <p:blipFill>
+          <a:blip r:embed="rId5"/>
+          <a:stretch>
+            <a:fillRect/>
+          </a:stretch>
+        </p:blipFill>
+        <p:spPr>
+          <a:xfrm>
+            <a:off x="7394240" y="5158257"/>
+            <a:ext cx="815411" cy="975445"/>
+          </a:xfrm>
+          <a:prstGeom prst="rect">
+            <a:avLst/>
+          </a:prstGeom>
+        </p:spPr>
+      </p:pic>
+      <p:pic>
+        <p:nvPicPr>
+          <p:cNvPr id="21" name="그림 20">
+            <a:extLst>
+              <a:ext uri="{FF2B5EF4-FFF2-40B4-BE49-F238E27FC236}">
+                <a16:creationId xmlns:a16="http://schemas.microsoft.com/office/drawing/2014/main" id="{560C4216-BC6D-8454-4D96-0F01187DCCE7}"/>
+              </a:ext>
+            </a:extLst>
+          </p:cNvPr>
+          <p:cNvPicPr>
+            <a:picLocks noChangeAspect="1"/>
+          </p:cNvPicPr>
+          <p:nvPr/>
+        </p:nvPicPr>
+        <p:blipFill>
+          <a:blip r:embed="rId5"/>
+          <a:stretch>
+            <a:fillRect/>
+          </a:stretch>
+        </p:blipFill>
+        <p:spPr>
+          <a:xfrm>
+            <a:off x="8065857" y="5158257"/>
+            <a:ext cx="815411" cy="975445"/>
+          </a:xfrm>
+          <a:prstGeom prst="rect">
+            <a:avLst/>
+          </a:prstGeom>
+        </p:spPr>
+      </p:pic>
+      <p:pic>
+        <p:nvPicPr>
+          <p:cNvPr id="22" name="그림 21">
+            <a:extLst>
+              <a:ext uri="{FF2B5EF4-FFF2-40B4-BE49-F238E27FC236}">
+                <a16:creationId xmlns:a16="http://schemas.microsoft.com/office/drawing/2014/main" id="{13A4BD92-5A06-85BE-A3AA-232982853B41}"/>
+              </a:ext>
+            </a:extLst>
+          </p:cNvPr>
+          <p:cNvPicPr>
+            <a:picLocks noChangeAspect="1"/>
+          </p:cNvPicPr>
+          <p:nvPr/>
+        </p:nvPicPr>
+        <p:blipFill>
+          <a:blip r:embed="rId5"/>
+          <a:stretch>
+            <a:fillRect/>
+          </a:stretch>
+        </p:blipFill>
+        <p:spPr>
+          <a:xfrm>
+            <a:off x="8737474" y="5158257"/>
+            <a:ext cx="815411" cy="975445"/>
+          </a:xfrm>
+          <a:prstGeom prst="rect">
+            <a:avLst/>
+          </a:prstGeom>
+        </p:spPr>
+      </p:pic>
+      <p:pic>
+        <p:nvPicPr>
+          <p:cNvPr id="23" name="그림 22">
+            <a:extLst>
+              <a:ext uri="{FF2B5EF4-FFF2-40B4-BE49-F238E27FC236}">
+                <a16:creationId xmlns:a16="http://schemas.microsoft.com/office/drawing/2014/main" id="{206C91E5-88B9-0740-BBF7-F4144DD4A4AB}"/>
+              </a:ext>
+            </a:extLst>
+          </p:cNvPr>
+          <p:cNvPicPr>
+            <a:picLocks noChangeAspect="1"/>
+          </p:cNvPicPr>
+          <p:nvPr/>
+        </p:nvPicPr>
+        <p:blipFill>
+          <a:blip r:embed="rId5"/>
+          <a:stretch>
+            <a:fillRect/>
+          </a:stretch>
+        </p:blipFill>
+        <p:spPr>
+          <a:xfrm>
+            <a:off x="9409091" y="5158257"/>
+            <a:ext cx="815411" cy="975445"/>
+          </a:xfrm>
+          <a:prstGeom prst="rect">
+            <a:avLst/>
+          </a:prstGeom>
+        </p:spPr>
+      </p:pic>
+      <p:pic>
+        <p:nvPicPr>
+          <p:cNvPr id="24" name="그림 23">
+            <a:extLst>
+              <a:ext uri="{FF2B5EF4-FFF2-40B4-BE49-F238E27FC236}">
+                <a16:creationId xmlns:a16="http://schemas.microsoft.com/office/drawing/2014/main" id="{6104512E-4C9A-FCD8-2992-BCB7286B8520}"/>
+              </a:ext>
+            </a:extLst>
+          </p:cNvPr>
+          <p:cNvPicPr>
+            <a:picLocks noChangeAspect="1"/>
+          </p:cNvPicPr>
+          <p:nvPr/>
+        </p:nvPicPr>
+        <p:blipFill>
+          <a:blip r:embed="rId5"/>
+          <a:stretch>
+            <a:fillRect/>
+          </a:stretch>
+        </p:blipFill>
+        <p:spPr>
+          <a:xfrm>
+            <a:off x="10080707" y="5158257"/>
+            <a:ext cx="815411" cy="975445"/>
+          </a:xfrm>
+          <a:prstGeom prst="rect">
+            <a:avLst/>
+          </a:prstGeom>
+        </p:spPr>
+      </p:pic>
+      <p:pic>
+        <p:nvPicPr>
+          <p:cNvPr id="25" name="그림 24">
+            <a:extLst>
+              <a:ext uri="{FF2B5EF4-FFF2-40B4-BE49-F238E27FC236}">
+                <a16:creationId xmlns:a16="http://schemas.microsoft.com/office/drawing/2014/main" id="{AE3A43EF-64D5-A843-B2DD-72091B480A5D}"/>
+              </a:ext>
+            </a:extLst>
+          </p:cNvPr>
+          <p:cNvPicPr>
+            <a:picLocks noChangeAspect="1"/>
+          </p:cNvPicPr>
+          <p:nvPr/>
+        </p:nvPicPr>
+        <p:blipFill>
+          <a:blip r:embed="rId5"/>
+          <a:stretch>
+            <a:fillRect/>
+          </a:stretch>
+        </p:blipFill>
+        <p:spPr>
+          <a:xfrm>
+            <a:off x="8065857" y="2724107"/>
+            <a:ext cx="815411" cy="975445"/>
+          </a:xfrm>
+          <a:prstGeom prst="rect">
+            <a:avLst/>
+          </a:prstGeom>
+        </p:spPr>
+      </p:pic>
+      <p:pic>
+        <p:nvPicPr>
+          <p:cNvPr id="26" name="그림 25">
+            <a:extLst>
+              <a:ext uri="{FF2B5EF4-FFF2-40B4-BE49-F238E27FC236}">
+                <a16:creationId xmlns:a16="http://schemas.microsoft.com/office/drawing/2014/main" id="{1B1524A1-71FF-4AA4-1D38-3A81C21A7489}"/>
+              </a:ext>
+            </a:extLst>
+          </p:cNvPr>
+          <p:cNvPicPr>
+            <a:picLocks noChangeAspect="1"/>
+          </p:cNvPicPr>
+          <p:nvPr/>
+        </p:nvPicPr>
+        <p:blipFill>
+          <a:blip r:embed="rId5"/>
+          <a:stretch>
+            <a:fillRect/>
+          </a:stretch>
+        </p:blipFill>
+        <p:spPr>
+          <a:xfrm>
+            <a:off x="8737474" y="2724107"/>
+            <a:ext cx="815411" cy="975445"/>
+          </a:xfrm>
+          <a:prstGeom prst="rect">
+            <a:avLst/>
+          </a:prstGeom>
+        </p:spPr>
+      </p:pic>
+      <p:pic>
+        <p:nvPicPr>
+          <p:cNvPr id="27" name="그림 26">
+            <a:extLst>
+              <a:ext uri="{FF2B5EF4-FFF2-40B4-BE49-F238E27FC236}">
+                <a16:creationId xmlns:a16="http://schemas.microsoft.com/office/drawing/2014/main" id="{7A236CA2-8829-F5DE-B2CE-DCF16BEABA71}"/>
+              </a:ext>
+            </a:extLst>
+          </p:cNvPr>
+          <p:cNvPicPr>
+            <a:picLocks noChangeAspect="1"/>
+          </p:cNvPicPr>
+          <p:nvPr/>
+        </p:nvPicPr>
+        <p:blipFill>
+          <a:blip r:embed="rId5"/>
+          <a:stretch>
+            <a:fillRect/>
+          </a:stretch>
+        </p:blipFill>
+        <p:spPr>
+          <a:xfrm>
+            <a:off x="9409091" y="2724107"/>
+            <a:ext cx="815411" cy="975445"/>
+          </a:xfrm>
+          <a:prstGeom prst="rect">
+            <a:avLst/>
+          </a:prstGeom>
+        </p:spPr>
+      </p:pic>
+      <p:pic>
+        <p:nvPicPr>
+          <p:cNvPr id="28" name="그림 27">
+            <a:extLst>
+              <a:ext uri="{FF2B5EF4-FFF2-40B4-BE49-F238E27FC236}">
+                <a16:creationId xmlns:a16="http://schemas.microsoft.com/office/drawing/2014/main" id="{4F1B1D3F-5406-E68D-69A4-9B8AD695700A}"/>
+              </a:ext>
+            </a:extLst>
+          </p:cNvPr>
+          <p:cNvPicPr>
+            <a:picLocks noChangeAspect="1"/>
+          </p:cNvPicPr>
+          <p:nvPr/>
+        </p:nvPicPr>
+        <p:blipFill>
+          <a:blip r:embed="rId5"/>
+          <a:stretch>
+            <a:fillRect/>
+          </a:stretch>
+        </p:blipFill>
+        <p:spPr>
+          <a:xfrm>
+            <a:off x="10080707" y="2724107"/>
+            <a:ext cx="815411" cy="975445"/>
+          </a:xfrm>
+          <a:prstGeom prst="rect">
+            <a:avLst/>
+          </a:prstGeom>
+        </p:spPr>
+      </p:pic>
+      <p:pic>
+        <p:nvPicPr>
+          <p:cNvPr id="5" name="Picture 2" descr="한 여자가 노트북 컴퓨터에 타이핑을 하고 있다">
+            <a:extLst>
+              <a:ext uri="{FF2B5EF4-FFF2-40B4-BE49-F238E27FC236}">
+                <a16:creationId xmlns:a16="http://schemas.microsoft.com/office/drawing/2014/main" id="{CDB299DD-9795-FDF8-7F4C-6EA8A4B5B234}"/>
+              </a:ext>
+            </a:extLst>
+          </p:cNvPr>
+          <p:cNvPicPr>
+            <a:picLocks noChangeAspect="1" noChangeArrowheads="1"/>
+          </p:cNvPicPr>
+          <p:nvPr/>
+        </p:nvPicPr>
+        <p:blipFill>
+          <a:blip r:embed="rId6" cstate="print">
+            <a:extLst>
+              <a:ext uri="{28A0092B-C50C-407E-A947-70E740481C1C}">
+                <a14:useLocalDpi xmlns:a14="http://schemas.microsoft.com/office/drawing/2010/main" val="0"/>
+              </a:ext>
+            </a:extLst>
+          </a:blip>
+          <a:srcRect/>
+          <a:stretch>
+            <a:fillRect/>
+          </a:stretch>
+        </p:blipFill>
+        <p:spPr bwMode="auto">
+          <a:xfrm>
+            <a:off x="9869489" y="66676"/>
+            <a:ext cx="2152650" cy="1424329"/>
+          </a:xfrm>
+          <a:prstGeom prst="rect">
+            <a:avLst/>
+          </a:prstGeom>
+          <a:noFill/>
+          <a:extLst>
+            <a:ext uri="{909E8E84-426E-40DD-AFC4-6F175D3DCCD1}">
+              <a14:hiddenFill xmlns:a14="http://schemas.microsoft.com/office/drawing/2010/main">
+                <a:solidFill>
+                  <a:srgbClr val="FFFFFF"/>
+                </a:solidFill>
+              </a14:hiddenFill>
+            </a:ext>
+          </a:extLst>
+        </p:spPr>
+      </p:pic>
+      <p:sp>
+        <p:nvSpPr>
+          <p:cNvPr id="7" name="TextBox 6">
+            <a:extLst>
+              <a:ext uri="{FF2B5EF4-FFF2-40B4-BE49-F238E27FC236}">
+                <a16:creationId xmlns:a16="http://schemas.microsoft.com/office/drawing/2014/main" id="{EE3E5455-A30D-EF00-88BD-2B3F157983C4}"/>
+              </a:ext>
+            </a:extLst>
+          </p:cNvPr>
+          <p:cNvSpPr txBox="1"/>
+          <p:nvPr/>
+        </p:nvSpPr>
+        <p:spPr>
+          <a:xfrm>
+            <a:off x="6051006" y="1692410"/>
+            <a:ext cx="5342020" cy="509178"/>
+          </a:xfrm>
+          <a:prstGeom prst="rect">
+            <a:avLst/>
+          </a:prstGeom>
+          <a:solidFill>
+            <a:schemeClr val="bg1">
+              <a:lumMod val="95000"/>
+            </a:schemeClr>
+          </a:solidFill>
+        </p:spPr>
+        <p:txBody>
+          <a:bodyPr wrap="square" rtlCol="0">
+            <a:spAutoFit/>
+          </a:bodyPr>
+          <a:lstStyle/>
+          <a:p>
+            <a:pPr marL="285750" indent="-285750">
+              <a:lnSpc>
+                <a:spcPct val="150000"/>
+              </a:lnSpc>
+              <a:buFont typeface="Wingdings" panose="05000000000000000000" pitchFamily="2" charset="2"/>
+              <a:buChar char="v"/>
+            </a:pPr>
+            <a:r>
+              <a:rPr lang="en-US" altLang="ko-KR" sz="2000" dirty="0">
+                <a:latin typeface="맑은 고딕 Semilight" panose="020B0502040204020203" pitchFamily="50" charset="-127"/>
+                <a:ea typeface="맑은 고딕 Semilight" panose="020B0502040204020203" pitchFamily="50" charset="-127"/>
+                <a:cs typeface="맑은 고딕 Semilight" panose="020B0502040204020203" pitchFamily="50" charset="-127"/>
+                <a:hlinkClick r:id="rId3">
+                  <a:extLst>
+                    <a:ext uri="{A12FA001-AC4F-418D-AE19-62706E023703}">
+                      <ahyp:hlinkClr xmlns:ahyp="http://schemas.microsoft.com/office/drawing/2018/hyperlinkcolor" val="tx"/>
+                    </a:ext>
+                  </a:extLst>
+                </a:hlinkClick>
+              </a:rPr>
+              <a:t>Monty Hall Problem</a:t>
+            </a:r>
+            <a:r>
+              <a:rPr lang="en-US" altLang="ko-KR" sz="2000" dirty="0">
+                <a:latin typeface="맑은 고딕 Semilight" panose="020B0502040204020203" pitchFamily="50" charset="-127"/>
+                <a:ea typeface="맑은 고딕 Semilight" panose="020B0502040204020203" pitchFamily="50" charset="-127"/>
+                <a:cs typeface="맑은 고딕 Semilight" panose="020B0502040204020203" pitchFamily="50" charset="-127"/>
+              </a:rPr>
+              <a:t>, </a:t>
+            </a:r>
+            <a:r>
+              <a:rPr lang="ko-KR" altLang="en-US" sz="2000" dirty="0">
+                <a:latin typeface="맑은 고딕 Semilight" panose="020B0502040204020203" pitchFamily="50" charset="-127"/>
+                <a:ea typeface="맑은 고딕 Semilight" panose="020B0502040204020203" pitchFamily="50" charset="-127"/>
+                <a:cs typeface="맑은 고딕 Semilight" panose="020B0502040204020203" pitchFamily="50" charset="-127"/>
+              </a:rPr>
+              <a:t>문이 </a:t>
+            </a:r>
+            <a:r>
+              <a:rPr lang="en-US" altLang="ko-KR" sz="2000" dirty="0">
+                <a:latin typeface="맑은 고딕 Semilight" panose="020B0502040204020203" pitchFamily="50" charset="-127"/>
+                <a:ea typeface="맑은 고딕 Semilight" panose="020B0502040204020203" pitchFamily="50" charset="-127"/>
+                <a:cs typeface="맑은 고딕 Semilight" panose="020B0502040204020203" pitchFamily="50" charset="-127"/>
+              </a:rPr>
+              <a:t>10,000</a:t>
+            </a:r>
+            <a:r>
+              <a:rPr lang="ko-KR" altLang="en-US" sz="2000" dirty="0">
+                <a:latin typeface="맑은 고딕 Semilight" panose="020B0502040204020203" pitchFamily="50" charset="-127"/>
+                <a:ea typeface="맑은 고딕 Semilight" panose="020B0502040204020203" pitchFamily="50" charset="-127"/>
+                <a:cs typeface="맑은 고딕 Semilight" panose="020B0502040204020203" pitchFamily="50" charset="-127"/>
+              </a:rPr>
+              <a:t>개 라면</a:t>
+            </a:r>
+            <a:r>
+              <a:rPr lang="en-US" altLang="ko-KR" sz="2000" dirty="0">
+                <a:latin typeface="맑은 고딕 Semilight" panose="020B0502040204020203" pitchFamily="50" charset="-127"/>
+                <a:ea typeface="맑은 고딕 Semilight" panose="020B0502040204020203" pitchFamily="50" charset="-127"/>
+                <a:cs typeface="맑은 고딕 Semilight" panose="020B0502040204020203" pitchFamily="50" charset="-127"/>
+              </a:rPr>
+              <a:t>?</a:t>
+            </a:r>
+          </a:p>
+        </p:txBody>
+      </p:sp>
     </p:spTree>
     <p:extLst>
       <p:ext uri="{BB962C8B-B14F-4D97-AF65-F5344CB8AC3E}">
-        <p14:creationId xmlns:p14="http://schemas.microsoft.com/office/powerpoint/2010/main" val="2538778517"/>
+        <p14:creationId xmlns:p14="http://schemas.microsoft.com/office/powerpoint/2010/main" val="1646032272"/>
       </p:ext>
     </p:extLst>
   </p:cSld>
@@ -19346,7 +19387,7 @@
         <p:cNvPr id="1" name="">
           <a:extLst>
             <a:ext uri="{FF2B5EF4-FFF2-40B4-BE49-F238E27FC236}">
-              <a16:creationId xmlns:a16="http://schemas.microsoft.com/office/drawing/2014/main" id="{DA1C777C-D922-8895-688C-C5D8CB36E7A9}"/>
+              <a16:creationId xmlns:a16="http://schemas.microsoft.com/office/drawing/2014/main" id="{11EF696F-724F-26BD-9C71-E5EC7071092F}"/>
             </a:ext>
           </a:extLst>
         </p:cNvPr>
@@ -19366,7 +19407,7 @@
           <p:cNvPr id="2" name="슬라이드 번호 개체 틀 1">
             <a:extLst>
               <a:ext uri="{FF2B5EF4-FFF2-40B4-BE49-F238E27FC236}">
-                <a16:creationId xmlns:a16="http://schemas.microsoft.com/office/drawing/2014/main" id="{AEB2C61B-EEC0-7491-DD5B-4008A55D9FCA}"/>
+                <a16:creationId xmlns:a16="http://schemas.microsoft.com/office/drawing/2014/main" id="{B6626646-BEA0-FB3A-7822-5F9972BD64EE}"/>
               </a:ext>
             </a:extLst>
           </p:cNvPr>
@@ -19396,7 +19437,7 @@
           <p:cNvPr id="4" name="TextBox 3">
             <a:extLst>
               <a:ext uri="{FF2B5EF4-FFF2-40B4-BE49-F238E27FC236}">
-                <a16:creationId xmlns:a16="http://schemas.microsoft.com/office/drawing/2014/main" id="{B46F664B-D509-3189-2815-157CC6374EF1}"/>
+                <a16:creationId xmlns:a16="http://schemas.microsoft.com/office/drawing/2014/main" id="{B4456C07-5D3C-22AC-8A59-702C8C03FA3F}"/>
               </a:ext>
             </a:extLst>
           </p:cNvPr>
@@ -19405,8 +19446,8 @@
         </p:nvSpPr>
         <p:spPr>
           <a:xfrm>
-            <a:off x="767408" y="1196752"/>
-            <a:ext cx="8813472" cy="3072123"/>
+            <a:off x="767408" y="1196753"/>
+            <a:ext cx="9102081" cy="2531783"/>
           </a:xfrm>
           <a:prstGeom prst="rect">
             <a:avLst/>
@@ -19425,45 +19466,21 @@
           <a:p>
             <a:pPr marL="285750" indent="-285750">
               <a:lnSpc>
-                <a:spcPct val="200000"/>
+                <a:spcPct val="150000"/>
               </a:lnSpc>
               <a:buFont typeface="Wingdings" panose="05000000000000000000" pitchFamily="2" charset="2"/>
               <a:buChar char="v"/>
             </a:pPr>
             <a:r>
-              <a:rPr lang="ko-KR" altLang="en-US" sz="2000" dirty="0">
-                <a:latin typeface="맑은 고딕 Semilight" panose="020B0502040204020203" pitchFamily="50" charset="-127"/>
-                <a:ea typeface="맑은 고딕 Semilight" panose="020B0502040204020203" pitchFamily="50" charset="-127"/>
-                <a:cs typeface="맑은 고딕 Semilight" panose="020B0502040204020203" pitchFamily="50" charset="-127"/>
-              </a:rPr>
-              <a:t>한 학급에 </a:t>
-            </a:r>
-            <a:r>
-              <a:rPr lang="ko-KR" altLang="ko-KR" sz="2000" dirty="0">
-                <a:latin typeface="맑은 고딕 Semilight" panose="020B0502040204020203" pitchFamily="50" charset="-127"/>
-                <a:ea typeface="맑은 고딕 Semilight" panose="020B0502040204020203" pitchFamily="50" charset="-127"/>
-                <a:cs typeface="맑은 고딕 Semilight" panose="020B0502040204020203" pitchFamily="50" charset="-127"/>
-              </a:rPr>
-              <a:t>100</a:t>
-            </a:r>
-            <a:r>
-              <a:rPr lang="ko-KR" altLang="en-US" sz="2000" dirty="0">
-                <a:latin typeface="맑은 고딕 Semilight" panose="020B0502040204020203" pitchFamily="50" charset="-127"/>
-                <a:ea typeface="맑은 고딕 Semilight" panose="020B0502040204020203" pitchFamily="50" charset="-127"/>
-                <a:cs typeface="맑은 고딕 Semilight" panose="020B0502040204020203" pitchFamily="50" charset="-127"/>
-              </a:rPr>
-              <a:t>명</a:t>
-            </a:r>
-            <a:r>
-              <a:rPr lang="ko-KR" altLang="ko-KR" sz="2000" dirty="0">
-                <a:latin typeface="맑은 고딕 Semilight" panose="020B0502040204020203" pitchFamily="50" charset="-127"/>
-                <a:ea typeface="맑은 고딕 Semilight" panose="020B0502040204020203" pitchFamily="50" charset="-127"/>
-                <a:cs typeface="맑은 고딕 Semilight" panose="020B0502040204020203" pitchFamily="50" charset="-127"/>
-              </a:rPr>
-              <a:t>(</a:t>
-            </a:r>
-            <a:r>
-              <a:rPr lang="ko-KR" altLang="ko-KR" sz="2000" dirty="0" err="1">
+              <a:rPr lang="ko-KR" altLang="en-US" dirty="0">
+                <a:latin typeface="맑은 고딕 Semilight" panose="020B0502040204020203" pitchFamily="50" charset="-127"/>
+                <a:ea typeface="맑은 고딕 Semilight" panose="020B0502040204020203" pitchFamily="50" charset="-127"/>
+                <a:cs typeface="맑은 고딕 Semilight" panose="020B0502040204020203" pitchFamily="50" charset="-127"/>
+              </a:rPr>
+              <a:t>당신은 앞으로 인생에서 총 </a:t>
+            </a:r>
+            <a:r>
+              <a:rPr lang="en-US" altLang="ko-KR" dirty="0">
                 <a:latin typeface="맑은 고딕 Semilight" panose="020B0502040204020203" pitchFamily="50" charset="-127"/>
                 <a:ea typeface="맑은 고딕 Semilight" panose="020B0502040204020203" pitchFamily="50" charset="-127"/>
                 <a:cs typeface="맑은 고딕 Semilight" panose="020B0502040204020203" pitchFamily="50" charset="-127"/>
@@ -19471,223 +19488,234 @@
               <a:t>N</a:t>
             </a:r>
             <a:r>
-              <a:rPr lang="ko-KR" altLang="ko-KR" sz="2000" dirty="0">
-                <a:latin typeface="맑은 고딕 Semilight" panose="020B0502040204020203" pitchFamily="50" charset="-127"/>
-                <a:ea typeface="맑은 고딕 Semilight" panose="020B0502040204020203" pitchFamily="50" charset="-127"/>
-                <a:cs typeface="맑은 고딕 Semilight" panose="020B0502040204020203" pitchFamily="50" charset="-127"/>
-              </a:rPr>
-              <a:t>=100)</a:t>
-            </a:r>
-            <a:r>
-              <a:rPr lang="ko-KR" altLang="en-US" sz="2000" dirty="0">
-                <a:latin typeface="맑은 고딕 Semilight" panose="020B0502040204020203" pitchFamily="50" charset="-127"/>
-                <a:ea typeface="맑은 고딕 Semilight" panose="020B0502040204020203" pitchFamily="50" charset="-127"/>
-                <a:cs typeface="맑은 고딕 Semilight" panose="020B0502040204020203" pitchFamily="50" charset="-127"/>
-              </a:rPr>
-              <a:t>이 있는 반을 </a:t>
-            </a:r>
-            <a:r>
-              <a:rPr lang="ko-KR" altLang="ko-KR" sz="2000" dirty="0">
-                <a:latin typeface="맑은 고딕 Semilight" panose="020B0502040204020203" pitchFamily="50" charset="-127"/>
-                <a:ea typeface="맑은 고딕 Semilight" panose="020B0502040204020203" pitchFamily="50" charset="-127"/>
-                <a:cs typeface="맑은 고딕 Semilight" panose="020B0502040204020203" pitchFamily="50" charset="-127"/>
-              </a:rPr>
-              <a:t>상상해 보세요. </a:t>
-            </a:r>
-            <a:r>
-              <a:rPr lang="ko-KR" altLang="en-US" sz="2000" dirty="0">
-                <a:latin typeface="맑은 고딕 Semilight" panose="020B0502040204020203" pitchFamily="50" charset="-127"/>
-                <a:ea typeface="맑은 고딕 Semilight" panose="020B0502040204020203" pitchFamily="50" charset="-127"/>
-                <a:cs typeface="맑은 고딕 Semilight" panose="020B0502040204020203" pitchFamily="50" charset="-127"/>
-              </a:rPr>
-              <a:t>선생님이 무작위로 </a:t>
-            </a:r>
-            <a:r>
-              <a:rPr lang="en-US" altLang="ko-KR" sz="2000" dirty="0">
-                <a:latin typeface="맑은 고딕 Semilight" panose="020B0502040204020203" pitchFamily="50" charset="-127"/>
-                <a:ea typeface="맑은 고딕 Semilight" panose="020B0502040204020203" pitchFamily="50" charset="-127"/>
-                <a:cs typeface="맑은 고딕 Semilight" panose="020B0502040204020203" pitchFamily="50" charset="-127"/>
-              </a:rPr>
-              <a:t>1 </a:t>
-            </a:r>
-            <a:r>
-              <a:rPr lang="ko-KR" altLang="en-US" sz="2000" dirty="0">
-                <a:latin typeface="맑은 고딕 Semilight" panose="020B0502040204020203" pitchFamily="50" charset="-127"/>
-                <a:ea typeface="맑은 고딕 Semilight" panose="020B0502040204020203" pitchFamily="50" charset="-127"/>
-                <a:cs typeface="맑은 고딕 Semilight" panose="020B0502040204020203" pitchFamily="50" charset="-127"/>
-              </a:rPr>
-              <a:t>명을 </a:t>
-            </a:r>
-            <a:r>
-              <a:rPr lang="ko-KR" altLang="ko-KR" sz="2000" dirty="0">
-                <a:latin typeface="맑은 고딕 Semilight" panose="020B0502040204020203" pitchFamily="50" charset="-127"/>
-                <a:ea typeface="맑은 고딕 Semilight" panose="020B0502040204020203" pitchFamily="50" charset="-127"/>
-                <a:cs typeface="맑은 고딕 Semilight" panose="020B0502040204020203" pitchFamily="50" charset="-127"/>
-              </a:rPr>
-              <a:t>뽑고</a:t>
-            </a:r>
-            <a:r>
-              <a:rPr lang="en-US" altLang="ko-KR" sz="2000" dirty="0">
-                <a:latin typeface="맑은 고딕 Semilight" panose="020B0502040204020203" pitchFamily="50" charset="-127"/>
-                <a:ea typeface="맑은 고딕 Semilight" panose="020B0502040204020203" pitchFamily="50" charset="-127"/>
-                <a:cs typeface="맑은 고딕 Semilight" panose="020B0502040204020203" pitchFamily="50" charset="-127"/>
-              </a:rPr>
-              <a:t> </a:t>
-            </a:r>
-            <a:r>
-              <a:rPr lang="ko-KR" altLang="en-US" sz="2000" dirty="0">
-                <a:latin typeface="맑은 고딕 Semilight" panose="020B0502040204020203" pitchFamily="50" charset="-127"/>
-                <a:ea typeface="맑은 고딕 Semilight" panose="020B0502040204020203" pitchFamily="50" charset="-127"/>
-                <a:cs typeface="맑은 고딕 Semilight" panose="020B0502040204020203" pitchFamily="50" charset="-127"/>
-              </a:rPr>
-              <a:t>선물을 주고</a:t>
-            </a:r>
-            <a:r>
-              <a:rPr lang="ko-KR" altLang="ko-KR" sz="2000" dirty="0">
-                <a:latin typeface="맑은 고딕 Semilight" panose="020B0502040204020203" pitchFamily="50" charset="-127"/>
-                <a:ea typeface="맑은 고딕 Semilight" panose="020B0502040204020203" pitchFamily="50" charset="-127"/>
-                <a:cs typeface="맑은 고딕 Semilight" panose="020B0502040204020203" pitchFamily="50" charset="-127"/>
-              </a:rPr>
-              <a:t>, </a:t>
-            </a:r>
-            <a:r>
-              <a:rPr lang="ko-KR" altLang="en-US" sz="2000" dirty="0">
-                <a:latin typeface="맑은 고딕 Semilight" panose="020B0502040204020203" pitchFamily="50" charset="-127"/>
-                <a:ea typeface="맑은 고딕 Semilight" panose="020B0502040204020203" pitchFamily="50" charset="-127"/>
-                <a:cs typeface="맑은 고딕 Semilight" panose="020B0502040204020203" pitchFamily="50" charset="-127"/>
-              </a:rPr>
-              <a:t>다시 전체 </a:t>
-            </a:r>
-            <a:r>
-              <a:rPr lang="en-US" altLang="ko-KR" sz="2000" dirty="0">
-                <a:latin typeface="맑은 고딕 Semilight" panose="020B0502040204020203" pitchFamily="50" charset="-127"/>
-                <a:ea typeface="맑은 고딕 Semilight" panose="020B0502040204020203" pitchFamily="50" charset="-127"/>
-                <a:cs typeface="맑은 고딕 Semilight" panose="020B0502040204020203" pitchFamily="50" charset="-127"/>
-              </a:rPr>
-              <a:t>100</a:t>
-            </a:r>
-            <a:r>
-              <a:rPr lang="ko-KR" altLang="en-US" sz="2000" dirty="0">
-                <a:latin typeface="맑은 고딕 Semilight" panose="020B0502040204020203" pitchFamily="50" charset="-127"/>
-                <a:ea typeface="맑은 고딕 Semilight" panose="020B0502040204020203" pitchFamily="50" charset="-127"/>
-                <a:cs typeface="맑은 고딕 Semilight" panose="020B0502040204020203" pitchFamily="50" charset="-127"/>
-              </a:rPr>
-              <a:t>명에서 </a:t>
-            </a:r>
-            <a:r>
-              <a:rPr lang="en-US" altLang="ko-KR" sz="2000" dirty="0">
-                <a:latin typeface="맑은 고딕 Semilight" panose="020B0502040204020203" pitchFamily="50" charset="-127"/>
-                <a:ea typeface="맑은 고딕 Semilight" panose="020B0502040204020203" pitchFamily="50" charset="-127"/>
-                <a:cs typeface="맑은 고딕 Semilight" panose="020B0502040204020203" pitchFamily="50" charset="-127"/>
-              </a:rPr>
-              <a:t>1</a:t>
-            </a:r>
-            <a:r>
-              <a:rPr lang="ko-KR" altLang="en-US" sz="2000" dirty="0">
-                <a:latin typeface="맑은 고딕 Semilight" panose="020B0502040204020203" pitchFamily="50" charset="-127"/>
-                <a:ea typeface="맑은 고딕 Semilight" panose="020B0502040204020203" pitchFamily="50" charset="-127"/>
-                <a:cs typeface="맑은 고딕 Semilight" panose="020B0502040204020203" pitchFamily="50" charset="-127"/>
-              </a:rPr>
-              <a:t>명을 뽑습니다</a:t>
-            </a:r>
-            <a:r>
-              <a:rPr lang="en-US" altLang="ko-KR" sz="2000" dirty="0">
-                <a:latin typeface="맑은 고딕 Semilight" panose="020B0502040204020203" pitchFamily="50" charset="-127"/>
-                <a:ea typeface="맑은 고딕 Semilight" panose="020B0502040204020203" pitchFamily="50" charset="-127"/>
-                <a:cs typeface="맑은 고딕 Semilight" panose="020B0502040204020203" pitchFamily="50" charset="-127"/>
-              </a:rPr>
-              <a:t>. </a:t>
-            </a:r>
-            <a:r>
-              <a:rPr lang="ko-KR" altLang="ko-KR" sz="2000" dirty="0">
-                <a:latin typeface="맑은 고딕 Semilight" panose="020B0502040204020203" pitchFamily="50" charset="-127"/>
-                <a:ea typeface="맑은 고딕 Semilight" panose="020B0502040204020203" pitchFamily="50" charset="-127"/>
-                <a:cs typeface="맑은 고딕 Semilight" panose="020B0502040204020203" pitchFamily="50" charset="-127"/>
-              </a:rPr>
-              <a:t>이 짓을 똑같이 100번 반복해서 </a:t>
-            </a:r>
-            <a:r>
-              <a:rPr lang="ko-KR" altLang="en-US" sz="2000" dirty="0">
-                <a:latin typeface="맑은 고딕 Semilight" panose="020B0502040204020203" pitchFamily="50" charset="-127"/>
-                <a:ea typeface="맑은 고딕 Semilight" panose="020B0502040204020203" pitchFamily="50" charset="-127"/>
-                <a:cs typeface="맑은 고딕 Semilight" panose="020B0502040204020203" pitchFamily="50" charset="-127"/>
-              </a:rPr>
-              <a:t>선물을 주게 될 경우 내가 선물을 못박을 확률은</a:t>
-            </a:r>
-            <a:r>
-              <a:rPr lang="en-US" altLang="ko-KR" sz="2000" dirty="0">
-                <a:latin typeface="맑은 고딕 Semilight" panose="020B0502040204020203" pitchFamily="50" charset="-127"/>
-                <a:ea typeface="맑은 고딕 Semilight" panose="020B0502040204020203" pitchFamily="50" charset="-127"/>
-                <a:cs typeface="맑은 고딕 Semilight" panose="020B0502040204020203" pitchFamily="50" charset="-127"/>
-              </a:rPr>
-              <a:t>?</a:t>
-            </a:r>
+              <a:rPr lang="ko-KR" altLang="en-US" dirty="0">
+                <a:latin typeface="맑은 고딕 Semilight" panose="020B0502040204020203" pitchFamily="50" charset="-127"/>
+                <a:ea typeface="맑은 고딕 Semilight" panose="020B0502040204020203" pitchFamily="50" charset="-127"/>
+                <a:cs typeface="맑은 고딕 Semilight" panose="020B0502040204020203" pitchFamily="50" charset="-127"/>
+              </a:rPr>
+              <a:t>명의 잠재적 파트너를 만날 수 있다고 가정</a:t>
+            </a:r>
+            <a:endParaRPr lang="en-US" altLang="ko-KR" dirty="0">
+              <a:latin typeface="맑은 고딕 Semilight" panose="020B0502040204020203" pitchFamily="50" charset="-127"/>
+              <a:ea typeface="맑은 고딕 Semilight" panose="020B0502040204020203" pitchFamily="50" charset="-127"/>
+              <a:cs typeface="맑은 고딕 Semilight" panose="020B0502040204020203" pitchFamily="50" charset="-127"/>
+            </a:endParaRPr>
           </a:p>
           <a:p>
             <a:pPr marL="285750" indent="-285750">
               <a:lnSpc>
-                <a:spcPct val="200000"/>
+                <a:spcPct val="150000"/>
               </a:lnSpc>
               <a:buFont typeface="Wingdings" panose="05000000000000000000" pitchFamily="2" charset="2"/>
               <a:buChar char="v"/>
             </a:pPr>
             <a:r>
-              <a:rPr lang="en-US" altLang="ko-KR" sz="2000" dirty="0">
-                <a:latin typeface="맑은 고딕 Semilight" panose="020B0502040204020203" pitchFamily="50" charset="-127"/>
-                <a:ea typeface="맑은 고딕 Semilight" panose="020B0502040204020203" pitchFamily="50" charset="-127"/>
-                <a:cs typeface="맑은 고딕 Semilight" panose="020B0502040204020203" pitchFamily="50" charset="-127"/>
-              </a:rPr>
-              <a:t>200</a:t>
-            </a:r>
-            <a:r>
-              <a:rPr lang="ko-KR" altLang="en-US" sz="2000" dirty="0">
-                <a:latin typeface="맑은 고딕 Semilight" panose="020B0502040204020203" pitchFamily="50" charset="-127"/>
-                <a:ea typeface="맑은 고딕 Semilight" panose="020B0502040204020203" pitchFamily="50" charset="-127"/>
-                <a:cs typeface="맑은 고딕 Semilight" panose="020B0502040204020203" pitchFamily="50" charset="-127"/>
-              </a:rPr>
-              <a:t>번을 반복했는데 내가 못 받을 확률은</a:t>
-            </a:r>
-            <a:r>
-              <a:rPr lang="en-US" altLang="ko-KR" sz="2000" dirty="0">
-                <a:latin typeface="맑은 고딕 Semilight" panose="020B0502040204020203" pitchFamily="50" charset="-127"/>
-                <a:ea typeface="맑은 고딕 Semilight" panose="020B0502040204020203" pitchFamily="50" charset="-127"/>
-                <a:cs typeface="맑은 고딕 Semilight" panose="020B0502040204020203" pitchFamily="50" charset="-127"/>
-              </a:rPr>
-              <a:t>?</a:t>
-            </a:r>
-          </a:p>
-          <a:p>
-            <a:pPr marL="285750" indent="-285750">
+              <a:rPr lang="ko-KR" altLang="en-US" dirty="0">
+                <a:latin typeface="맑은 고딕 Semilight" panose="020B0502040204020203" pitchFamily="50" charset="-127"/>
+                <a:ea typeface="맑은 고딕 Semilight" panose="020B0502040204020203" pitchFamily="50" charset="-127"/>
+                <a:cs typeface="맑은 고딕 Semilight" panose="020B0502040204020203" pitchFamily="50" charset="-127"/>
+              </a:rPr>
+              <a:t>당신의 목표는 그중 가장 뛰어난 사람</a:t>
+            </a:r>
+            <a:r>
+              <a:rPr lang="en-US" altLang="ko-KR" dirty="0">
+                <a:latin typeface="맑은 고딕 Semilight" panose="020B0502040204020203" pitchFamily="50" charset="-127"/>
+                <a:ea typeface="맑은 고딕 Semilight" panose="020B0502040204020203" pitchFamily="50" charset="-127"/>
+                <a:cs typeface="맑은 고딕 Semilight" panose="020B0502040204020203" pitchFamily="50" charset="-127"/>
+              </a:rPr>
+              <a:t>(X)</a:t>
+            </a:r>
+            <a:r>
+              <a:rPr lang="ko-KR" altLang="en-US" dirty="0">
+                <a:latin typeface="맑은 고딕 Semilight" panose="020B0502040204020203" pitchFamily="50" charset="-127"/>
+                <a:ea typeface="맑은 고딕 Semilight" panose="020B0502040204020203" pitchFamily="50" charset="-127"/>
+                <a:cs typeface="맑은 고딕 Semilight" panose="020B0502040204020203" pitchFamily="50" charset="-127"/>
+              </a:rPr>
+              <a:t>과 매칭되는 것이며</a:t>
+            </a:r>
+            <a:r>
+              <a:rPr lang="en-US" altLang="ko-KR" dirty="0">
+                <a:latin typeface="맑은 고딕 Semilight" panose="020B0502040204020203" pitchFamily="50" charset="-127"/>
+                <a:ea typeface="맑은 고딕 Semilight" panose="020B0502040204020203" pitchFamily="50" charset="-127"/>
+                <a:cs typeface="맑은 고딕 Semilight" panose="020B0502040204020203" pitchFamily="50" charset="-127"/>
+              </a:rPr>
+              <a:t> </a:t>
+            </a:r>
+            <a:r>
+              <a:rPr lang="ko-KR" altLang="en-US" dirty="0">
+                <a:latin typeface="맑은 고딕 Semilight" panose="020B0502040204020203" pitchFamily="50" charset="-127"/>
+                <a:ea typeface="맑은 고딕 Semilight" panose="020B0502040204020203" pitchFamily="50" charset="-127"/>
+                <a:cs typeface="맑은 고딕 Semilight" panose="020B0502040204020203" pitchFamily="50" charset="-127"/>
+              </a:rPr>
+              <a:t>단</a:t>
+            </a:r>
+            <a:r>
+              <a:rPr lang="en-US" altLang="ko-KR" dirty="0">
+                <a:latin typeface="맑은 고딕 Semilight" panose="020B0502040204020203" pitchFamily="50" charset="-127"/>
+                <a:ea typeface="맑은 고딕 Semilight" panose="020B0502040204020203" pitchFamily="50" charset="-127"/>
+                <a:cs typeface="맑은 고딕 Semilight" panose="020B0502040204020203" pitchFamily="50" charset="-127"/>
+              </a:rPr>
+              <a:t>, </a:t>
+            </a:r>
+            <a:r>
+              <a:rPr lang="ko-KR" altLang="en-US" dirty="0">
+                <a:latin typeface="맑은 고딕 Semilight" panose="020B0502040204020203" pitchFamily="50" charset="-127"/>
+                <a:ea typeface="맑은 고딕 Semilight" panose="020B0502040204020203" pitchFamily="50" charset="-127"/>
+                <a:cs typeface="맑은 고딕 Semilight" panose="020B0502040204020203" pitchFamily="50" charset="-127"/>
+              </a:rPr>
+              <a:t>아래의 조건</a:t>
+            </a:r>
+            <a:endParaRPr lang="en-US" altLang="ko-KR" dirty="0">
+              <a:latin typeface="맑은 고딕 Semilight" panose="020B0502040204020203" pitchFamily="50" charset="-127"/>
+              <a:ea typeface="맑은 고딕 Semilight" panose="020B0502040204020203" pitchFamily="50" charset="-127"/>
+              <a:cs typeface="맑은 고딕 Semilight" panose="020B0502040204020203" pitchFamily="50" charset="-127"/>
+            </a:endParaRPr>
+          </a:p>
+          <a:p>
+            <a:pPr marL="742950" lvl="1" indent="-285750">
               <a:lnSpc>
-                <a:spcPct val="200000"/>
+                <a:spcPct val="150000"/>
               </a:lnSpc>
               <a:buFont typeface="Wingdings" panose="05000000000000000000" pitchFamily="2" charset="2"/>
               <a:buChar char="v"/>
             </a:pPr>
             <a:r>
-              <a:rPr lang="en-US" altLang="ko-KR" sz="2000" dirty="0">
-                <a:latin typeface="맑은 고딕 Semilight" panose="020B0502040204020203" pitchFamily="50" charset="-127"/>
-                <a:ea typeface="맑은 고딕 Semilight" panose="020B0502040204020203" pitchFamily="50" charset="-127"/>
-                <a:cs typeface="맑은 고딕 Semilight" panose="020B0502040204020203" pitchFamily="50" charset="-127"/>
-              </a:rPr>
-              <a:t>300</a:t>
-            </a:r>
-            <a:r>
-              <a:rPr lang="ko-KR" altLang="en-US" sz="2000" dirty="0">
-                <a:latin typeface="맑은 고딕 Semilight" panose="020B0502040204020203" pitchFamily="50" charset="-127"/>
-                <a:ea typeface="맑은 고딕 Semilight" panose="020B0502040204020203" pitchFamily="50" charset="-127"/>
-                <a:cs typeface="맑은 고딕 Semilight" panose="020B0502040204020203" pitchFamily="50" charset="-127"/>
-              </a:rPr>
-              <a:t>번을 반복했는데 내가 못 받을 확률은</a:t>
-            </a:r>
-            <a:r>
-              <a:rPr lang="en-US" altLang="ko-KR" sz="2000" dirty="0">
+              <a:rPr lang="ko-KR" altLang="en-US" dirty="0">
+                <a:latin typeface="맑은 고딕 Semilight" panose="020B0502040204020203" pitchFamily="50" charset="-127"/>
+                <a:ea typeface="맑은 고딕 Semilight" panose="020B0502040204020203" pitchFamily="50" charset="-127"/>
+                <a:cs typeface="맑은 고딕 Semilight" panose="020B0502040204020203" pitchFamily="50" charset="-127"/>
+              </a:rPr>
+              <a:t>한 번 거절한 사람에게는 다시 돌아갈 수 없음</a:t>
+            </a:r>
+            <a:endParaRPr lang="en-US" altLang="ko-KR" dirty="0">
+              <a:latin typeface="맑은 고딕 Semilight" panose="020B0502040204020203" pitchFamily="50" charset="-127"/>
+              <a:ea typeface="맑은 고딕 Semilight" panose="020B0502040204020203" pitchFamily="50" charset="-127"/>
+              <a:cs typeface="맑은 고딕 Semilight" panose="020B0502040204020203" pitchFamily="50" charset="-127"/>
+            </a:endParaRPr>
+          </a:p>
+          <a:p>
+            <a:pPr marL="742950" lvl="1" indent="-285750">
+              <a:lnSpc>
+                <a:spcPct val="150000"/>
+              </a:lnSpc>
+              <a:buFont typeface="Wingdings" panose="05000000000000000000" pitchFamily="2" charset="2"/>
+              <a:buChar char="v"/>
+            </a:pPr>
+            <a:r>
+              <a:rPr lang="ko-KR" altLang="en-US" dirty="0">
+                <a:latin typeface="맑은 고딕 Semilight" panose="020B0502040204020203" pitchFamily="50" charset="-127"/>
+                <a:ea typeface="맑은 고딕 Semilight" panose="020B0502040204020203" pitchFamily="50" charset="-127"/>
+                <a:cs typeface="맑은 고딕 Semilight" panose="020B0502040204020203" pitchFamily="50" charset="-127"/>
+              </a:rPr>
+              <a:t>만나는 순서는 무작위이며</a:t>
+            </a:r>
+            <a:r>
+              <a:rPr lang="en-US" altLang="ko-KR" dirty="0">
+                <a:latin typeface="맑은 고딕 Semilight" panose="020B0502040204020203" pitchFamily="50" charset="-127"/>
+                <a:ea typeface="맑은 고딕 Semilight" panose="020B0502040204020203" pitchFamily="50" charset="-127"/>
+                <a:cs typeface="맑은 고딕 Semilight" panose="020B0502040204020203" pitchFamily="50" charset="-127"/>
+              </a:rPr>
+              <a:t>, </a:t>
+            </a:r>
+            <a:r>
+              <a:rPr lang="ko-KR" altLang="en-US" dirty="0">
+                <a:latin typeface="맑은 고딕 Semilight" panose="020B0502040204020203" pitchFamily="50" charset="-127"/>
+                <a:ea typeface="맑은 고딕 Semilight" panose="020B0502040204020203" pitchFamily="50" charset="-127"/>
+                <a:cs typeface="맑은 고딕 Semilight" panose="020B0502040204020203" pitchFamily="50" charset="-127"/>
+              </a:rPr>
+              <a:t>당신은 상대를 만날 때마다 점수를 매길 수 있음</a:t>
+            </a:r>
+            <a:endParaRPr lang="en-US" altLang="ko-KR" dirty="0">
+              <a:latin typeface="맑은 고딕 Semilight" panose="020B0502040204020203" pitchFamily="50" charset="-127"/>
+              <a:ea typeface="맑은 고딕 Semilight" panose="020B0502040204020203" pitchFamily="50" charset="-127"/>
+              <a:cs typeface="맑은 고딕 Semilight" panose="020B0502040204020203" pitchFamily="50" charset="-127"/>
+            </a:endParaRPr>
+          </a:p>
+          <a:p>
+            <a:pPr marL="285750" indent="-285750">
+              <a:lnSpc>
+                <a:spcPct val="150000"/>
+              </a:lnSpc>
+              <a:buFont typeface="Wingdings" panose="05000000000000000000" pitchFamily="2" charset="2"/>
+              <a:buChar char="v"/>
+            </a:pPr>
+            <a:r>
+              <a:rPr lang="ko-KR" altLang="en-US" dirty="0">
+                <a:latin typeface="맑은 고딕 Semilight" panose="020B0502040204020203" pitchFamily="50" charset="-127"/>
+                <a:ea typeface="맑은 고딕 Semilight" panose="020B0502040204020203" pitchFamily="50" charset="-127"/>
+                <a:cs typeface="맑은 고딕 Semilight" panose="020B0502040204020203" pitchFamily="50" charset="-127"/>
+              </a:rPr>
+              <a:t>가장 좋은 사람</a:t>
+            </a:r>
+            <a:r>
+              <a:rPr lang="en-US" altLang="ko-KR" dirty="0">
+                <a:latin typeface="맑은 고딕 Semilight" panose="020B0502040204020203" pitchFamily="50" charset="-127"/>
+                <a:ea typeface="맑은 고딕 Semilight" panose="020B0502040204020203" pitchFamily="50" charset="-127"/>
+                <a:cs typeface="맑은 고딕 Semilight" panose="020B0502040204020203" pitchFamily="50" charset="-127"/>
+              </a:rPr>
+              <a:t>(X)</a:t>
+            </a:r>
+            <a:r>
+              <a:rPr lang="ko-KR" altLang="en-US" dirty="0">
+                <a:latin typeface="맑은 고딕 Semilight" panose="020B0502040204020203" pitchFamily="50" charset="-127"/>
+                <a:ea typeface="맑은 고딕 Semilight" panose="020B0502040204020203" pitchFamily="50" charset="-127"/>
+                <a:cs typeface="맑은 고딕 Semilight" panose="020B0502040204020203" pitchFamily="50" charset="-127"/>
+              </a:rPr>
+              <a:t>을 선택할 확률을 최대화하려면</a:t>
+            </a:r>
+            <a:r>
+              <a:rPr lang="en-US" altLang="ko-KR" dirty="0">
+                <a:latin typeface="맑은 고딕 Semilight" panose="020B0502040204020203" pitchFamily="50" charset="-127"/>
+                <a:ea typeface="맑은 고딕 Semilight" panose="020B0502040204020203" pitchFamily="50" charset="-127"/>
+                <a:cs typeface="맑은 고딕 Semilight" panose="020B0502040204020203" pitchFamily="50" charset="-127"/>
+              </a:rPr>
+              <a:t>, </a:t>
+            </a:r>
+            <a:r>
+              <a:rPr lang="ko-KR" altLang="en-US" dirty="0">
+                <a:latin typeface="맑은 고딕 Semilight" panose="020B0502040204020203" pitchFamily="50" charset="-127"/>
+                <a:ea typeface="맑은 고딕 Semilight" panose="020B0502040204020203" pitchFamily="50" charset="-127"/>
+                <a:cs typeface="맑은 고딕 Semilight" panose="020B0502040204020203" pitchFamily="50" charset="-127"/>
+              </a:rPr>
+              <a:t>몇 번째 사람을 선책해야 하나요</a:t>
+            </a:r>
+            <a:r>
+              <a:rPr lang="en-US" altLang="ko-KR" dirty="0">
                 <a:latin typeface="맑은 고딕 Semilight" panose="020B0502040204020203" pitchFamily="50" charset="-127"/>
                 <a:ea typeface="맑은 고딕 Semilight" panose="020B0502040204020203" pitchFamily="50" charset="-127"/>
                 <a:cs typeface="맑은 고딕 Semilight" panose="020B0502040204020203" pitchFamily="50" charset="-127"/>
               </a:rPr>
               <a:t>?</a:t>
             </a:r>
+          </a:p>
+          <a:p>
+            <a:pPr marL="742950" lvl="1" indent="-285750">
+              <a:lnSpc>
+                <a:spcPct val="150000"/>
+              </a:lnSpc>
+              <a:buFont typeface="Wingdings" panose="05000000000000000000" pitchFamily="2" charset="2"/>
+              <a:buChar char="v"/>
+            </a:pPr>
+            <a:r>
+              <a:rPr lang="en-US" altLang="ko-KR" dirty="0">
+                <a:latin typeface="맑은 고딕 Semilight" panose="020B0502040204020203" pitchFamily="50" charset="-127"/>
+                <a:ea typeface="맑은 고딕 Semilight" panose="020B0502040204020203" pitchFamily="50" charset="-127"/>
+                <a:cs typeface="맑은 고딕 Semilight" panose="020B0502040204020203" pitchFamily="50" charset="-127"/>
+                <a:hlinkClick r:id="rId3">
+                  <a:extLst>
+                    <a:ext uri="{A12FA001-AC4F-418D-AE19-62706E023703}">
+                      <ahyp:hlinkClr xmlns:ahyp="http://schemas.microsoft.com/office/drawing/2018/hyperlinkcolor" val="tx"/>
+                    </a:ext>
+                  </a:extLst>
+                </a:hlinkClick>
+              </a:rPr>
+              <a:t>mathematical-dating</a:t>
+            </a:r>
+            <a:endParaRPr lang="en-US" altLang="ko-KR" dirty="0">
+              <a:latin typeface="맑은 고딕 Semilight" panose="020B0502040204020203" pitchFamily="50" charset="-127"/>
+              <a:ea typeface="맑은 고딕 Semilight" panose="020B0502040204020203" pitchFamily="50" charset="-127"/>
+              <a:cs typeface="맑은 고딕 Semilight" panose="020B0502040204020203" pitchFamily="50" charset="-127"/>
+            </a:endParaRPr>
           </a:p>
         </p:txBody>
       </p:sp>
@@ -19696,7 +19724,7 @@
           <p:cNvPr id="9" name="TextBox 8">
             <a:extLst>
               <a:ext uri="{FF2B5EF4-FFF2-40B4-BE49-F238E27FC236}">
-                <a16:creationId xmlns:a16="http://schemas.microsoft.com/office/drawing/2014/main" id="{1A89527C-5F15-5354-51AE-303E2EF56CBE}"/>
+                <a16:creationId xmlns:a16="http://schemas.microsoft.com/office/drawing/2014/main" id="{185BE9C9-E7C6-D55A-BC46-CD975C33457A}"/>
               </a:ext>
             </a:extLst>
           </p:cNvPr>
@@ -19732,10 +19760,40 @@
       </p:sp>
       <p:pic>
         <p:nvPicPr>
+          <p:cNvPr id="6" name="그림 5">
+            <a:extLst>
+              <a:ext uri="{FF2B5EF4-FFF2-40B4-BE49-F238E27FC236}">
+                <a16:creationId xmlns:a16="http://schemas.microsoft.com/office/drawing/2014/main" id="{BE0093E0-2B37-39B8-6DB9-925B18522DF0}"/>
+              </a:ext>
+            </a:extLst>
+          </p:cNvPr>
+          <p:cNvPicPr>
+            <a:picLocks noChangeAspect="1"/>
+          </p:cNvPicPr>
+          <p:nvPr/>
+        </p:nvPicPr>
+        <p:blipFill>
+          <a:blip r:embed="rId4"/>
+          <a:stretch>
+            <a:fillRect/>
+          </a:stretch>
+        </p:blipFill>
+        <p:spPr>
+          <a:xfrm>
+            <a:off x="4033275" y="3861558"/>
+            <a:ext cx="3334215" cy="1994109"/>
+          </a:xfrm>
+          <a:prstGeom prst="rect">
+            <a:avLst/>
+          </a:prstGeom>
+        </p:spPr>
+      </p:pic>
+      <p:pic>
+        <p:nvPicPr>
           <p:cNvPr id="3" name="Picture 2" descr="한 여자가 노트북 컴퓨터에 타이핑을 하고 있다">
             <a:extLst>
               <a:ext uri="{FF2B5EF4-FFF2-40B4-BE49-F238E27FC236}">
-                <a16:creationId xmlns:a16="http://schemas.microsoft.com/office/drawing/2014/main" id="{E2A31D04-E1AA-540F-6088-A42EB03184E0}"/>
+                <a16:creationId xmlns:a16="http://schemas.microsoft.com/office/drawing/2014/main" id="{9D41C8BB-9143-9759-5675-5DDCD0405FE7}"/>
               </a:ext>
             </a:extLst>
           </p:cNvPr>
@@ -19745,7 +19803,7 @@
           <p:nvPr/>
         </p:nvPicPr>
         <p:blipFill>
-          <a:blip r:embed="rId3" cstate="print">
+          <a:blip r:embed="rId5" cstate="print">
             <a:extLst>
               <a:ext uri="{28A0092B-C50C-407E-A947-70E740481C1C}">
                 <a14:useLocalDpi xmlns:a14="http://schemas.microsoft.com/office/drawing/2010/main" val="0"/>
@@ -19780,7 +19838,7 @@
     </p:spTree>
     <p:extLst>
       <p:ext uri="{BB962C8B-B14F-4D97-AF65-F5344CB8AC3E}">
-        <p14:creationId xmlns:p14="http://schemas.microsoft.com/office/powerpoint/2010/main" val="1127705894"/>
+        <p14:creationId xmlns:p14="http://schemas.microsoft.com/office/powerpoint/2010/main" val="2538778517"/>
       </p:ext>
     </p:extLst>
   </p:cSld>
@@ -19810,7 +19868,7 @@
         <p:cNvPr id="1" name="">
           <a:extLst>
             <a:ext uri="{FF2B5EF4-FFF2-40B4-BE49-F238E27FC236}">
-              <a16:creationId xmlns:a16="http://schemas.microsoft.com/office/drawing/2014/main" id="{D82F35E0-A8BA-9E25-DCE5-002AF8EF7215}"/>
+              <a16:creationId xmlns:a16="http://schemas.microsoft.com/office/drawing/2014/main" id="{DA1C777C-D922-8895-688C-C5D8CB36E7A9}"/>
             </a:ext>
           </a:extLst>
         </p:cNvPr>
@@ -19830,7 +19888,7 @@
           <p:cNvPr id="2" name="슬라이드 번호 개체 틀 1">
             <a:extLst>
               <a:ext uri="{FF2B5EF4-FFF2-40B4-BE49-F238E27FC236}">
-                <a16:creationId xmlns:a16="http://schemas.microsoft.com/office/drawing/2014/main" id="{CA6F4F7E-6F61-4FB4-D872-D19D234DDFD9}"/>
+                <a16:creationId xmlns:a16="http://schemas.microsoft.com/office/drawing/2014/main" id="{AEB2C61B-EEC0-7491-DD5B-4008A55D9FCA}"/>
               </a:ext>
             </a:extLst>
           </p:cNvPr>
@@ -19860,7 +19918,7 @@
           <p:cNvPr id="4" name="TextBox 3">
             <a:extLst>
               <a:ext uri="{FF2B5EF4-FFF2-40B4-BE49-F238E27FC236}">
-                <a16:creationId xmlns:a16="http://schemas.microsoft.com/office/drawing/2014/main" id="{0FFED543-95FD-70FD-6206-68419637947A}"/>
+                <a16:creationId xmlns:a16="http://schemas.microsoft.com/office/drawing/2014/main" id="{B46F664B-D509-3189-2815-157CC6374EF1}"/>
               </a:ext>
             </a:extLst>
           </p:cNvPr>
@@ -19869,8 +19927,8 @@
         </p:nvSpPr>
         <p:spPr>
           <a:xfrm>
-            <a:off x="767408" y="1196753"/>
-            <a:ext cx="8925232" cy="1285288"/>
+            <a:off x="767408" y="1196752"/>
+            <a:ext cx="8813472" cy="3072123"/>
           </a:xfrm>
           <a:prstGeom prst="rect">
             <a:avLst/>
@@ -19889,45 +19947,109 @@
           <a:p>
             <a:pPr marL="285750" indent="-285750">
               <a:lnSpc>
-                <a:spcPct val="150000"/>
+                <a:spcPct val="200000"/>
               </a:lnSpc>
               <a:buFont typeface="Wingdings" panose="05000000000000000000" pitchFamily="2" charset="2"/>
               <a:buChar char="v"/>
             </a:pPr>
             <a:r>
-              <a:rPr lang="ko-KR" altLang="en-US" dirty="0">
-                <a:latin typeface="맑은 고딕 Semilight" panose="020B0502040204020203" pitchFamily="50" charset="-127"/>
-                <a:ea typeface="맑은 고딕 Semilight" panose="020B0502040204020203" pitchFamily="50" charset="-127"/>
-                <a:cs typeface="맑은 고딕 Semilight" panose="020B0502040204020203" pitchFamily="50" charset="-127"/>
-              </a:rPr>
-              <a:t>모집단의 회귀식의 </a:t>
-            </a:r>
-            <a:r>
-              <a:rPr lang="en-US" altLang="ko-KR" dirty="0">
-                <a:latin typeface="맑은 고딕 Semilight" panose="020B0502040204020203" pitchFamily="50" charset="-127"/>
-                <a:ea typeface="맑은 고딕 Semilight" panose="020B0502040204020203" pitchFamily="50" charset="-127"/>
-                <a:cs typeface="맑은 고딕 Semilight" panose="020B0502040204020203" pitchFamily="50" charset="-127"/>
-              </a:rPr>
-              <a:t>gradient(</a:t>
-            </a:r>
-            <a:r>
-              <a:rPr lang="ko-KR" altLang="en-US" dirty="0">
-                <a:latin typeface="맑은 고딕 Semilight" panose="020B0502040204020203" pitchFamily="50" charset="-127"/>
-                <a:ea typeface="맑은 고딕 Semilight" panose="020B0502040204020203" pitchFamily="50" charset="-127"/>
-                <a:cs typeface="맑은 고딕 Semilight" panose="020B0502040204020203" pitchFamily="50" charset="-127"/>
-              </a:rPr>
-              <a:t>기울기</a:t>
-            </a:r>
-            <a:r>
-              <a:rPr lang="en-US" altLang="ko-KR" dirty="0">
-                <a:latin typeface="맑은 고딕 Semilight" panose="020B0502040204020203" pitchFamily="50" charset="-127"/>
-                <a:ea typeface="맑은 고딕 Semilight" panose="020B0502040204020203" pitchFamily="50" charset="-127"/>
-                <a:cs typeface="맑은 고딕 Semilight" panose="020B0502040204020203" pitchFamily="50" charset="-127"/>
-              </a:rPr>
-              <a:t>)</a:t>
-            </a:r>
-            <a:r>
-              <a:rPr lang="ko-KR" altLang="en-US" dirty="0">
+              <a:rPr lang="ko-KR" altLang="en-US" sz="2000" dirty="0">
+                <a:latin typeface="맑은 고딕 Semilight" panose="020B0502040204020203" pitchFamily="50" charset="-127"/>
+                <a:ea typeface="맑은 고딕 Semilight" panose="020B0502040204020203" pitchFamily="50" charset="-127"/>
+                <a:cs typeface="맑은 고딕 Semilight" panose="020B0502040204020203" pitchFamily="50" charset="-127"/>
+              </a:rPr>
+              <a:t>한 학급에 </a:t>
+            </a:r>
+            <a:r>
+              <a:rPr lang="ko-KR" altLang="ko-KR" sz="2000" dirty="0">
+                <a:latin typeface="맑은 고딕 Semilight" panose="020B0502040204020203" pitchFamily="50" charset="-127"/>
+                <a:ea typeface="맑은 고딕 Semilight" panose="020B0502040204020203" pitchFamily="50" charset="-127"/>
+                <a:cs typeface="맑은 고딕 Semilight" panose="020B0502040204020203" pitchFamily="50" charset="-127"/>
+              </a:rPr>
+              <a:t>100</a:t>
+            </a:r>
+            <a:r>
+              <a:rPr lang="ko-KR" altLang="en-US" sz="2000" dirty="0">
+                <a:latin typeface="맑은 고딕 Semilight" panose="020B0502040204020203" pitchFamily="50" charset="-127"/>
+                <a:ea typeface="맑은 고딕 Semilight" panose="020B0502040204020203" pitchFamily="50" charset="-127"/>
+                <a:cs typeface="맑은 고딕 Semilight" panose="020B0502040204020203" pitchFamily="50" charset="-127"/>
+              </a:rPr>
+              <a:t>명</a:t>
+            </a:r>
+            <a:r>
+              <a:rPr lang="ko-KR" altLang="ko-KR" sz="2000" dirty="0">
+                <a:latin typeface="맑은 고딕 Semilight" panose="020B0502040204020203" pitchFamily="50" charset="-127"/>
+                <a:ea typeface="맑은 고딕 Semilight" panose="020B0502040204020203" pitchFamily="50" charset="-127"/>
+                <a:cs typeface="맑은 고딕 Semilight" panose="020B0502040204020203" pitchFamily="50" charset="-127"/>
+              </a:rPr>
+              <a:t>(</a:t>
+            </a:r>
+            <a:r>
+              <a:rPr lang="ko-KR" altLang="ko-KR" sz="2000" dirty="0" err="1">
+                <a:latin typeface="맑은 고딕 Semilight" panose="020B0502040204020203" pitchFamily="50" charset="-127"/>
+                <a:ea typeface="맑은 고딕 Semilight" panose="020B0502040204020203" pitchFamily="50" charset="-127"/>
+                <a:cs typeface="맑은 고딕 Semilight" panose="020B0502040204020203" pitchFamily="50" charset="-127"/>
+              </a:rPr>
+              <a:t>N</a:t>
+            </a:r>
+            <a:r>
+              <a:rPr lang="ko-KR" altLang="ko-KR" sz="2000" dirty="0">
+                <a:latin typeface="맑은 고딕 Semilight" panose="020B0502040204020203" pitchFamily="50" charset="-127"/>
+                <a:ea typeface="맑은 고딕 Semilight" panose="020B0502040204020203" pitchFamily="50" charset="-127"/>
+                <a:cs typeface="맑은 고딕 Semilight" panose="020B0502040204020203" pitchFamily="50" charset="-127"/>
+              </a:rPr>
+              <a:t>=100)</a:t>
+            </a:r>
+            <a:r>
+              <a:rPr lang="ko-KR" altLang="en-US" sz="2000" dirty="0">
+                <a:latin typeface="맑은 고딕 Semilight" panose="020B0502040204020203" pitchFamily="50" charset="-127"/>
+                <a:ea typeface="맑은 고딕 Semilight" panose="020B0502040204020203" pitchFamily="50" charset="-127"/>
+                <a:cs typeface="맑은 고딕 Semilight" panose="020B0502040204020203" pitchFamily="50" charset="-127"/>
+              </a:rPr>
+              <a:t>이 있는 반을 </a:t>
+            </a:r>
+            <a:r>
+              <a:rPr lang="ko-KR" altLang="ko-KR" sz="2000" dirty="0">
+                <a:latin typeface="맑은 고딕 Semilight" panose="020B0502040204020203" pitchFamily="50" charset="-127"/>
+                <a:ea typeface="맑은 고딕 Semilight" panose="020B0502040204020203" pitchFamily="50" charset="-127"/>
+                <a:cs typeface="맑은 고딕 Semilight" panose="020B0502040204020203" pitchFamily="50" charset="-127"/>
+              </a:rPr>
+              <a:t>상상해 보세요. </a:t>
+            </a:r>
+            <a:r>
+              <a:rPr lang="ko-KR" altLang="en-US" sz="2000" dirty="0">
+                <a:latin typeface="맑은 고딕 Semilight" panose="020B0502040204020203" pitchFamily="50" charset="-127"/>
+                <a:ea typeface="맑은 고딕 Semilight" panose="020B0502040204020203" pitchFamily="50" charset="-127"/>
+                <a:cs typeface="맑은 고딕 Semilight" panose="020B0502040204020203" pitchFamily="50" charset="-127"/>
+              </a:rPr>
+              <a:t>선생님이 무작위로 </a:t>
+            </a:r>
+            <a:r>
+              <a:rPr lang="en-US" altLang="ko-KR" sz="2000" dirty="0">
+                <a:latin typeface="맑은 고딕 Semilight" panose="020B0502040204020203" pitchFamily="50" charset="-127"/>
+                <a:ea typeface="맑은 고딕 Semilight" panose="020B0502040204020203" pitchFamily="50" charset="-127"/>
+                <a:cs typeface="맑은 고딕 Semilight" panose="020B0502040204020203" pitchFamily="50" charset="-127"/>
+              </a:rPr>
+              <a:t>1 </a:t>
+            </a:r>
+            <a:r>
+              <a:rPr lang="ko-KR" altLang="en-US" sz="2000" dirty="0">
+                <a:latin typeface="맑은 고딕 Semilight" panose="020B0502040204020203" pitchFamily="50" charset="-127"/>
+                <a:ea typeface="맑은 고딕 Semilight" panose="020B0502040204020203" pitchFamily="50" charset="-127"/>
+                <a:cs typeface="맑은 고딕 Semilight" panose="020B0502040204020203" pitchFamily="50" charset="-127"/>
+              </a:rPr>
+              <a:t>명을 </a:t>
+            </a:r>
+            <a:r>
+              <a:rPr lang="ko-KR" altLang="ko-KR" sz="2000" dirty="0">
+                <a:latin typeface="맑은 고딕 Semilight" panose="020B0502040204020203" pitchFamily="50" charset="-127"/>
+                <a:ea typeface="맑은 고딕 Semilight" panose="020B0502040204020203" pitchFamily="50" charset="-127"/>
+                <a:cs typeface="맑은 고딕 Semilight" panose="020B0502040204020203" pitchFamily="50" charset="-127"/>
+              </a:rPr>
+              <a:t>뽑고</a:t>
+            </a:r>
+            <a:r>
+              <a:rPr lang="en-US" altLang="ko-KR" sz="2000" dirty="0">
                 <a:latin typeface="맑은 고딕 Semilight" panose="020B0502040204020203" pitchFamily="50" charset="-127"/>
                 <a:ea typeface="맑은 고딕 Semilight" panose="020B0502040204020203" pitchFamily="50" charset="-127"/>
                 <a:cs typeface="맑은 고딕 Semilight" panose="020B0502040204020203" pitchFamily="50" charset="-127"/>
@@ -19935,122 +20057,159 @@
               <a:t> </a:t>
             </a:r>
             <a:r>
-              <a:rPr lang="en-US" altLang="ko-KR" dirty="0">
-                <a:latin typeface="맑은 고딕 Semilight" panose="020B0502040204020203" pitchFamily="50" charset="-127"/>
-                <a:ea typeface="맑은 고딕 Semilight" panose="020B0502040204020203" pitchFamily="50" charset="-127"/>
-                <a:cs typeface="맑은 고딕 Semilight" panose="020B0502040204020203" pitchFamily="50" charset="-127"/>
-              </a:rPr>
-              <a:t>2</a:t>
-            </a:r>
-            <a:r>
-              <a:rPr lang="ko-KR" altLang="en-US" dirty="0">
-                <a:latin typeface="맑은 고딕 Semilight" panose="020B0502040204020203" pitchFamily="50" charset="-127"/>
-                <a:ea typeface="맑은 고딕 Semilight" panose="020B0502040204020203" pitchFamily="50" charset="-127"/>
-                <a:cs typeface="맑은 고딕 Semilight" panose="020B0502040204020203" pitchFamily="50" charset="-127"/>
-              </a:rPr>
-              <a:t>인 데이터를 생성하고 표본크기를 </a:t>
-            </a:r>
-            <a:r>
-              <a:rPr lang="en-US" altLang="ko-KR" dirty="0">
-                <a:latin typeface="맑은 고딕 Semilight" panose="020B0502040204020203" pitchFamily="50" charset="-127"/>
-                <a:ea typeface="맑은 고딕 Semilight" panose="020B0502040204020203" pitchFamily="50" charset="-127"/>
-                <a:cs typeface="맑은 고딕 Semilight" panose="020B0502040204020203" pitchFamily="50" charset="-127"/>
-              </a:rPr>
-              <a:t>5, 30, 100 </a:t>
-            </a:r>
-            <a:r>
-              <a:rPr lang="ko-KR" altLang="en-US" dirty="0">
-                <a:latin typeface="맑은 고딕 Semilight" panose="020B0502040204020203" pitchFamily="50" charset="-127"/>
-                <a:ea typeface="맑은 고딕 Semilight" panose="020B0502040204020203" pitchFamily="50" charset="-127"/>
-                <a:cs typeface="맑은 고딕 Semilight" panose="020B0502040204020203" pitchFamily="50" charset="-127"/>
-              </a:rPr>
-              <a:t>으로 각각 </a:t>
-            </a:r>
-            <a:r>
-              <a:rPr lang="en-US" altLang="ko-KR" dirty="0">
-                <a:latin typeface="맑은 고딕 Semilight" panose="020B0502040204020203" pitchFamily="50" charset="-127"/>
-                <a:ea typeface="맑은 고딕 Semilight" panose="020B0502040204020203" pitchFamily="50" charset="-127"/>
-                <a:cs typeface="맑은 고딕 Semilight" panose="020B0502040204020203" pitchFamily="50" charset="-127"/>
-              </a:rPr>
-              <a:t>1000</a:t>
-            </a:r>
-            <a:r>
-              <a:rPr lang="ko-KR" altLang="en-US" dirty="0">
-                <a:latin typeface="맑은 고딕 Semilight" panose="020B0502040204020203" pitchFamily="50" charset="-127"/>
-                <a:ea typeface="맑은 고딕 Semilight" panose="020B0502040204020203" pitchFamily="50" charset="-127"/>
-                <a:cs typeface="맑은 고딕 Semilight" panose="020B0502040204020203" pitchFamily="50" charset="-127"/>
-              </a:rPr>
-              <a:t>개 표본의 기울기와 </a:t>
-            </a:r>
-            <a:r>
-              <a:rPr lang="en-US" altLang="ko-KR" dirty="0">
-                <a:latin typeface="맑은 고딕 Semilight" panose="020B0502040204020203" pitchFamily="50" charset="-127"/>
-                <a:ea typeface="맑은 고딕 Semilight" panose="020B0502040204020203" pitchFamily="50" charset="-127"/>
-                <a:cs typeface="맑은 고딕 Semilight" panose="020B0502040204020203" pitchFamily="50" charset="-127"/>
-              </a:rPr>
-              <a:t>MSE(Mean</a:t>
-            </a:r>
-            <a:r>
-              <a:rPr lang="ko-KR" altLang="en-US" dirty="0">
-                <a:latin typeface="맑은 고딕 Semilight" panose="020B0502040204020203" pitchFamily="50" charset="-127"/>
-                <a:ea typeface="맑은 고딕 Semilight" panose="020B0502040204020203" pitchFamily="50" charset="-127"/>
-                <a:cs typeface="맑은 고딕 Semilight" panose="020B0502040204020203" pitchFamily="50" charset="-127"/>
-              </a:rPr>
-              <a:t> </a:t>
-            </a:r>
-            <a:r>
-              <a:rPr lang="en-US" altLang="ko-KR" dirty="0">
-                <a:latin typeface="맑은 고딕 Semilight" panose="020B0502040204020203" pitchFamily="50" charset="-127"/>
-                <a:ea typeface="맑은 고딕 Semilight" panose="020B0502040204020203" pitchFamily="50" charset="-127"/>
-                <a:cs typeface="맑은 고딕 Semilight" panose="020B0502040204020203" pitchFamily="50" charset="-127"/>
-              </a:rPr>
-              <a:t>Squared</a:t>
-            </a:r>
-            <a:r>
-              <a:rPr lang="ko-KR" altLang="en-US" dirty="0">
-                <a:latin typeface="맑은 고딕 Semilight" panose="020B0502040204020203" pitchFamily="50" charset="-127"/>
-                <a:ea typeface="맑은 고딕 Semilight" panose="020B0502040204020203" pitchFamily="50" charset="-127"/>
-                <a:cs typeface="맑은 고딕 Semilight" panose="020B0502040204020203" pitchFamily="50" charset="-127"/>
-              </a:rPr>
-              <a:t> </a:t>
-            </a:r>
-            <a:r>
-              <a:rPr lang="en-US" altLang="ko-KR" dirty="0">
-                <a:latin typeface="맑은 고딕 Semilight" panose="020B0502040204020203" pitchFamily="50" charset="-127"/>
-                <a:ea typeface="맑은 고딕 Semilight" panose="020B0502040204020203" pitchFamily="50" charset="-127"/>
-                <a:cs typeface="맑은 고딕 Semilight" panose="020B0502040204020203" pitchFamily="50" charset="-127"/>
-              </a:rPr>
-              <a:t>Error)</a:t>
-            </a:r>
-            <a:r>
-              <a:rPr lang="ko-KR" altLang="en-US" dirty="0">
-                <a:latin typeface="맑은 고딕 Semilight" panose="020B0502040204020203" pitchFamily="50" charset="-127"/>
-                <a:ea typeface="맑은 고딕 Semilight" panose="020B0502040204020203" pitchFamily="50" charset="-127"/>
-                <a:cs typeface="맑은 고딕 Semilight" panose="020B0502040204020203" pitchFamily="50" charset="-127"/>
-              </a:rPr>
-              <a:t>의 평균과 분산을 </a:t>
-            </a:r>
-            <a:r>
-              <a:rPr lang="ko-KR" altLang="en-US" dirty="0" err="1">
-                <a:latin typeface="맑은 고딕 Semilight" panose="020B0502040204020203" pitchFamily="50" charset="-127"/>
-                <a:ea typeface="맑은 고딕 Semilight" panose="020B0502040204020203" pitchFamily="50" charset="-127"/>
-                <a:cs typeface="맑은 고딕 Semilight" panose="020B0502040204020203" pitchFamily="50" charset="-127"/>
-              </a:rPr>
-              <a:t>시각화하라</a:t>
-            </a:r>
-            <a:r>
-              <a:rPr lang="ko-KR" altLang="en-US" dirty="0">
-                <a:latin typeface="맑은 고딕 Semilight" panose="020B0502040204020203" pitchFamily="50" charset="-127"/>
-                <a:ea typeface="맑은 고딕 Semilight" panose="020B0502040204020203" pitchFamily="50" charset="-127"/>
-                <a:cs typeface="맑은 고딕 Semilight" panose="020B0502040204020203" pitchFamily="50" charset="-127"/>
-              </a:rPr>
-              <a:t>  </a:t>
-            </a:r>
-            <a:endParaRPr lang="en-US" altLang="ko-KR" dirty="0">
-              <a:latin typeface="맑은 고딕 Semilight" panose="020B0502040204020203" pitchFamily="50" charset="-127"/>
-              <a:ea typeface="맑은 고딕 Semilight" panose="020B0502040204020203" pitchFamily="50" charset="-127"/>
-              <a:cs typeface="맑은 고딕 Semilight" panose="020B0502040204020203" pitchFamily="50" charset="-127"/>
-            </a:endParaRPr>
+              <a:rPr lang="ko-KR" altLang="en-US" sz="2000" dirty="0">
+                <a:latin typeface="맑은 고딕 Semilight" panose="020B0502040204020203" pitchFamily="50" charset="-127"/>
+                <a:ea typeface="맑은 고딕 Semilight" panose="020B0502040204020203" pitchFamily="50" charset="-127"/>
+                <a:cs typeface="맑은 고딕 Semilight" panose="020B0502040204020203" pitchFamily="50" charset="-127"/>
+              </a:rPr>
+              <a:t>선물을 주고</a:t>
+            </a:r>
+            <a:r>
+              <a:rPr lang="ko-KR" altLang="ko-KR" sz="2000" dirty="0">
+                <a:latin typeface="맑은 고딕 Semilight" panose="020B0502040204020203" pitchFamily="50" charset="-127"/>
+                <a:ea typeface="맑은 고딕 Semilight" panose="020B0502040204020203" pitchFamily="50" charset="-127"/>
+                <a:cs typeface="맑은 고딕 Semilight" panose="020B0502040204020203" pitchFamily="50" charset="-127"/>
+              </a:rPr>
+              <a:t>, </a:t>
+            </a:r>
+            <a:r>
+              <a:rPr lang="ko-KR" altLang="en-US" sz="2000" dirty="0">
+                <a:latin typeface="맑은 고딕 Semilight" panose="020B0502040204020203" pitchFamily="50" charset="-127"/>
+                <a:ea typeface="맑은 고딕 Semilight" panose="020B0502040204020203" pitchFamily="50" charset="-127"/>
+                <a:cs typeface="맑은 고딕 Semilight" panose="020B0502040204020203" pitchFamily="50" charset="-127"/>
+              </a:rPr>
+              <a:t>다시 전체 </a:t>
+            </a:r>
+            <a:r>
+              <a:rPr lang="en-US" altLang="ko-KR" sz="2000" dirty="0">
+                <a:latin typeface="맑은 고딕 Semilight" panose="020B0502040204020203" pitchFamily="50" charset="-127"/>
+                <a:ea typeface="맑은 고딕 Semilight" panose="020B0502040204020203" pitchFamily="50" charset="-127"/>
+                <a:cs typeface="맑은 고딕 Semilight" panose="020B0502040204020203" pitchFamily="50" charset="-127"/>
+              </a:rPr>
+              <a:t>100</a:t>
+            </a:r>
+            <a:r>
+              <a:rPr lang="ko-KR" altLang="en-US" sz="2000" dirty="0">
+                <a:latin typeface="맑은 고딕 Semilight" panose="020B0502040204020203" pitchFamily="50" charset="-127"/>
+                <a:ea typeface="맑은 고딕 Semilight" panose="020B0502040204020203" pitchFamily="50" charset="-127"/>
+                <a:cs typeface="맑은 고딕 Semilight" panose="020B0502040204020203" pitchFamily="50" charset="-127"/>
+              </a:rPr>
+              <a:t>명에서 </a:t>
+            </a:r>
+            <a:r>
+              <a:rPr lang="en-US" altLang="ko-KR" sz="2000" dirty="0">
+                <a:latin typeface="맑은 고딕 Semilight" panose="020B0502040204020203" pitchFamily="50" charset="-127"/>
+                <a:ea typeface="맑은 고딕 Semilight" panose="020B0502040204020203" pitchFamily="50" charset="-127"/>
+                <a:cs typeface="맑은 고딕 Semilight" panose="020B0502040204020203" pitchFamily="50" charset="-127"/>
+              </a:rPr>
+              <a:t>1</a:t>
+            </a:r>
+            <a:r>
+              <a:rPr lang="ko-KR" altLang="en-US" sz="2000" dirty="0">
+                <a:latin typeface="맑은 고딕 Semilight" panose="020B0502040204020203" pitchFamily="50" charset="-127"/>
+                <a:ea typeface="맑은 고딕 Semilight" panose="020B0502040204020203" pitchFamily="50" charset="-127"/>
+                <a:cs typeface="맑은 고딕 Semilight" panose="020B0502040204020203" pitchFamily="50" charset="-127"/>
+              </a:rPr>
+              <a:t>명을 뽑습니다</a:t>
+            </a:r>
+            <a:r>
+              <a:rPr lang="en-US" altLang="ko-KR" sz="2000" dirty="0">
+                <a:latin typeface="맑은 고딕 Semilight" panose="020B0502040204020203" pitchFamily="50" charset="-127"/>
+                <a:ea typeface="맑은 고딕 Semilight" panose="020B0502040204020203" pitchFamily="50" charset="-127"/>
+                <a:cs typeface="맑은 고딕 Semilight" panose="020B0502040204020203" pitchFamily="50" charset="-127"/>
+              </a:rPr>
+              <a:t>. </a:t>
+            </a:r>
+            <a:r>
+              <a:rPr lang="ko-KR" altLang="ko-KR" sz="2000" dirty="0">
+                <a:latin typeface="맑은 고딕 Semilight" panose="020B0502040204020203" pitchFamily="50" charset="-127"/>
+                <a:ea typeface="맑은 고딕 Semilight" panose="020B0502040204020203" pitchFamily="50" charset="-127"/>
+                <a:cs typeface="맑은 고딕 Semilight" panose="020B0502040204020203" pitchFamily="50" charset="-127"/>
+              </a:rPr>
+              <a:t>이 짓을 똑같이 100번 반복해서 </a:t>
+            </a:r>
+            <a:r>
+              <a:rPr lang="ko-KR" altLang="en-US" sz="2000" dirty="0">
+                <a:latin typeface="맑은 고딕 Semilight" panose="020B0502040204020203" pitchFamily="50" charset="-127"/>
+                <a:ea typeface="맑은 고딕 Semilight" panose="020B0502040204020203" pitchFamily="50" charset="-127"/>
+                <a:cs typeface="맑은 고딕 Semilight" panose="020B0502040204020203" pitchFamily="50" charset="-127"/>
+              </a:rPr>
+              <a:t>선물을 주게 될 경우 내가 선물을 못박을 확률은</a:t>
+            </a:r>
+            <a:r>
+              <a:rPr lang="en-US" altLang="ko-KR" sz="2000" dirty="0">
+                <a:latin typeface="맑은 고딕 Semilight" panose="020B0502040204020203" pitchFamily="50" charset="-127"/>
+                <a:ea typeface="맑은 고딕 Semilight" panose="020B0502040204020203" pitchFamily="50" charset="-127"/>
+                <a:cs typeface="맑은 고딕 Semilight" panose="020B0502040204020203" pitchFamily="50" charset="-127"/>
+              </a:rPr>
+              <a:t>?</a:t>
+            </a:r>
+          </a:p>
+          <a:p>
+            <a:pPr marL="285750" indent="-285750">
+              <a:lnSpc>
+                <a:spcPct val="200000"/>
+              </a:lnSpc>
+              <a:buFont typeface="Wingdings" panose="05000000000000000000" pitchFamily="2" charset="2"/>
+              <a:buChar char="v"/>
+            </a:pPr>
+            <a:r>
+              <a:rPr lang="en-US" altLang="ko-KR" sz="2000" dirty="0">
+                <a:latin typeface="맑은 고딕 Semilight" panose="020B0502040204020203" pitchFamily="50" charset="-127"/>
+                <a:ea typeface="맑은 고딕 Semilight" panose="020B0502040204020203" pitchFamily="50" charset="-127"/>
+                <a:cs typeface="맑은 고딕 Semilight" panose="020B0502040204020203" pitchFamily="50" charset="-127"/>
+              </a:rPr>
+              <a:t>200</a:t>
+            </a:r>
+            <a:r>
+              <a:rPr lang="ko-KR" altLang="en-US" sz="2000" dirty="0">
+                <a:latin typeface="맑은 고딕 Semilight" panose="020B0502040204020203" pitchFamily="50" charset="-127"/>
+                <a:ea typeface="맑은 고딕 Semilight" panose="020B0502040204020203" pitchFamily="50" charset="-127"/>
+                <a:cs typeface="맑은 고딕 Semilight" panose="020B0502040204020203" pitchFamily="50" charset="-127"/>
+              </a:rPr>
+              <a:t>번을 반복했는데 내가 못 받을 확률은</a:t>
+            </a:r>
+            <a:r>
+              <a:rPr lang="en-US" altLang="ko-KR" sz="2000" dirty="0">
+                <a:latin typeface="맑은 고딕 Semilight" panose="020B0502040204020203" pitchFamily="50" charset="-127"/>
+                <a:ea typeface="맑은 고딕 Semilight" panose="020B0502040204020203" pitchFamily="50" charset="-127"/>
+                <a:cs typeface="맑은 고딕 Semilight" panose="020B0502040204020203" pitchFamily="50" charset="-127"/>
+              </a:rPr>
+              <a:t>?</a:t>
+            </a:r>
+          </a:p>
+          <a:p>
+            <a:pPr marL="285750" indent="-285750">
+              <a:lnSpc>
+                <a:spcPct val="200000"/>
+              </a:lnSpc>
+              <a:buFont typeface="Wingdings" panose="05000000000000000000" pitchFamily="2" charset="2"/>
+              <a:buChar char="v"/>
+            </a:pPr>
+            <a:r>
+              <a:rPr lang="en-US" altLang="ko-KR" sz="2000" dirty="0">
+                <a:latin typeface="맑은 고딕 Semilight" panose="020B0502040204020203" pitchFamily="50" charset="-127"/>
+                <a:ea typeface="맑은 고딕 Semilight" panose="020B0502040204020203" pitchFamily="50" charset="-127"/>
+                <a:cs typeface="맑은 고딕 Semilight" panose="020B0502040204020203" pitchFamily="50" charset="-127"/>
+              </a:rPr>
+              <a:t>300</a:t>
+            </a:r>
+            <a:r>
+              <a:rPr lang="ko-KR" altLang="en-US" sz="2000" dirty="0">
+                <a:latin typeface="맑은 고딕 Semilight" panose="020B0502040204020203" pitchFamily="50" charset="-127"/>
+                <a:ea typeface="맑은 고딕 Semilight" panose="020B0502040204020203" pitchFamily="50" charset="-127"/>
+                <a:cs typeface="맑은 고딕 Semilight" panose="020B0502040204020203" pitchFamily="50" charset="-127"/>
+              </a:rPr>
+              <a:t>번을 반복했는데 내가 못 받을 확률은</a:t>
+            </a:r>
+            <a:r>
+              <a:rPr lang="en-US" altLang="ko-KR" sz="2000" dirty="0">
+                <a:latin typeface="맑은 고딕 Semilight" panose="020B0502040204020203" pitchFamily="50" charset="-127"/>
+                <a:ea typeface="맑은 고딕 Semilight" panose="020B0502040204020203" pitchFamily="50" charset="-127"/>
+                <a:cs typeface="맑은 고딕 Semilight" panose="020B0502040204020203" pitchFamily="50" charset="-127"/>
+              </a:rPr>
+              <a:t>?</a:t>
+            </a:r>
           </a:p>
         </p:txBody>
       </p:sp>
@@ -20059,7 +20218,7 @@
           <p:cNvPr id="9" name="TextBox 8">
             <a:extLst>
               <a:ext uri="{FF2B5EF4-FFF2-40B4-BE49-F238E27FC236}">
-                <a16:creationId xmlns:a16="http://schemas.microsoft.com/office/drawing/2014/main" id="{F30D0FE0-2695-7F37-8905-B8DE24E7A394}"/>
+                <a16:creationId xmlns:a16="http://schemas.microsoft.com/office/drawing/2014/main" id="{1A89527C-5F15-5354-51AE-303E2EF56CBE}"/>
               </a:ext>
             </a:extLst>
           </p:cNvPr>
@@ -20095,10 +20254,10 @@
       </p:sp>
       <p:pic>
         <p:nvPicPr>
-          <p:cNvPr id="1026" name="Picture 2">
+          <p:cNvPr id="3" name="Picture 2" descr="한 여자가 노트북 컴퓨터에 타이핑을 하고 있다">
             <a:extLst>
               <a:ext uri="{FF2B5EF4-FFF2-40B4-BE49-F238E27FC236}">
-                <a16:creationId xmlns:a16="http://schemas.microsoft.com/office/drawing/2014/main" id="{66A96551-6CD7-9DE7-087B-11A115B1C22B}"/>
+                <a16:creationId xmlns:a16="http://schemas.microsoft.com/office/drawing/2014/main" id="{E2A31D04-E1AA-540F-6088-A42EB03184E0}"/>
               </a:ext>
             </a:extLst>
           </p:cNvPr>
@@ -20108,7 +20267,7 @@
           <p:nvPr/>
         </p:nvPicPr>
         <p:blipFill>
-          <a:blip r:embed="rId3">
+          <a:blip r:embed="rId3" cstate="print">
             <a:extLst>
               <a:ext uri="{28A0092B-C50C-407E-A947-70E740481C1C}">
                 <a14:useLocalDpi xmlns:a14="http://schemas.microsoft.com/office/drawing/2010/main" val="0"/>
@@ -20122,8 +20281,8 @@
         </p:blipFill>
         <p:spPr bwMode="auto">
           <a:xfrm>
-            <a:off x="802171" y="3634206"/>
-            <a:ext cx="3721378" cy="2899706"/>
+            <a:off x="9869489" y="66676"/>
+            <a:ext cx="2152650" cy="1424329"/>
           </a:xfrm>
           <a:prstGeom prst="rect">
             <a:avLst/>
@@ -20140,261 +20299,10 @@
           </a:extLst>
         </p:spPr>
       </p:pic>
-      <p:sp>
-        <p:nvSpPr>
-          <p:cNvPr id="5" name="TextBox 4">
-            <a:extLst>
-              <a:ext uri="{FF2B5EF4-FFF2-40B4-BE49-F238E27FC236}">
-                <a16:creationId xmlns:a16="http://schemas.microsoft.com/office/drawing/2014/main" id="{92D6731E-3482-342B-4CF9-362C40D676CA}"/>
-              </a:ext>
-            </a:extLst>
-          </p:cNvPr>
-          <p:cNvSpPr txBox="1"/>
-          <p:nvPr/>
-        </p:nvSpPr>
-        <p:spPr>
-          <a:xfrm>
-            <a:off x="730163" y="2894037"/>
-            <a:ext cx="3721378" cy="718145"/>
-          </a:xfrm>
-          <a:prstGeom prst="rect">
-            <a:avLst/>
-          </a:prstGeom>
-          <a:noFill/>
-        </p:spPr>
-        <p:txBody>
-          <a:bodyPr wrap="square">
-            <a:spAutoFit/>
-          </a:bodyPr>
-          <a:lstStyle/>
-          <a:p>
-            <a:pPr>
-              <a:lnSpc>
-                <a:spcPts val="1575"/>
-              </a:lnSpc>
-            </a:pPr>
-            <a:r>
-              <a:rPr lang="en-US" altLang="ko-KR" sz="1400" dirty="0">
-                <a:latin typeface="Arial Narrow" panose="020B0606020202030204" pitchFamily="34" charset="0"/>
-              </a:rPr>
-              <a:t>X = </a:t>
-            </a:r>
-            <a:r>
-              <a:rPr lang="en-US" altLang="ko-KR" sz="1400" dirty="0" err="1">
-                <a:latin typeface="Arial Narrow" panose="020B0606020202030204" pitchFamily="34" charset="0"/>
-              </a:rPr>
-              <a:t>np.random.randn</a:t>
-            </a:r>
-            <a:r>
-              <a:rPr lang="en-US" altLang="ko-KR" sz="1400" dirty="0">
-                <a:latin typeface="Arial Narrow" panose="020B0606020202030204" pitchFamily="34" charset="0"/>
-              </a:rPr>
-              <a:t>(10000, 1)</a:t>
-            </a:r>
-          </a:p>
-          <a:p>
-            <a:pPr>
-              <a:lnSpc>
-                <a:spcPts val="1575"/>
-              </a:lnSpc>
-            </a:pPr>
-            <a:r>
-              <a:rPr lang="en-US" altLang="ko-KR" sz="1400" dirty="0" err="1">
-                <a:latin typeface="Arial Narrow" panose="020B0606020202030204" pitchFamily="34" charset="0"/>
-              </a:rPr>
-              <a:t>true_w</a:t>
-            </a:r>
-            <a:r>
-              <a:rPr lang="en-US" altLang="ko-KR" sz="1400" dirty="0">
-                <a:latin typeface="Arial Narrow" panose="020B0606020202030204" pitchFamily="34" charset="0"/>
-              </a:rPr>
-              <a:t> = 2.0</a:t>
-            </a:r>
-          </a:p>
-          <a:p>
-            <a:pPr>
-              <a:lnSpc>
-                <a:spcPts val="1575"/>
-              </a:lnSpc>
-            </a:pPr>
-            <a:r>
-              <a:rPr lang="en-US" altLang="ko-KR" sz="1400" dirty="0">
-                <a:latin typeface="Arial Narrow" panose="020B0606020202030204" pitchFamily="34" charset="0"/>
-              </a:rPr>
-              <a:t>y = </a:t>
-            </a:r>
-            <a:r>
-              <a:rPr lang="en-US" altLang="ko-KR" sz="1400" dirty="0" err="1">
-                <a:latin typeface="Arial Narrow" panose="020B0606020202030204" pitchFamily="34" charset="0"/>
-              </a:rPr>
-              <a:t>true_w</a:t>
-            </a:r>
-            <a:r>
-              <a:rPr lang="en-US" altLang="ko-KR" sz="1400" dirty="0">
-                <a:latin typeface="Arial Narrow" panose="020B0606020202030204" pitchFamily="34" charset="0"/>
-              </a:rPr>
-              <a:t> * X + </a:t>
-            </a:r>
-            <a:r>
-              <a:rPr lang="en-US" altLang="ko-KR" sz="1400" dirty="0" err="1">
-                <a:latin typeface="Arial Narrow" panose="020B0606020202030204" pitchFamily="34" charset="0"/>
-              </a:rPr>
-              <a:t>np.random.randn</a:t>
-            </a:r>
-            <a:r>
-              <a:rPr lang="en-US" altLang="ko-KR" sz="1400" dirty="0">
-                <a:latin typeface="Arial Narrow" panose="020B0606020202030204" pitchFamily="34" charset="0"/>
-              </a:rPr>
-              <a:t>(10000, 1) * 0.5</a:t>
-            </a:r>
-          </a:p>
-        </p:txBody>
-      </p:sp>
-      <p:pic>
-        <p:nvPicPr>
-          <p:cNvPr id="1030" name="Picture 6">
-            <a:extLst>
-              <a:ext uri="{FF2B5EF4-FFF2-40B4-BE49-F238E27FC236}">
-                <a16:creationId xmlns:a16="http://schemas.microsoft.com/office/drawing/2014/main" id="{604A6947-78A3-C7CA-2B50-5D00DD4F3DDD}"/>
-              </a:ext>
-            </a:extLst>
-          </p:cNvPr>
-          <p:cNvPicPr>
-            <a:picLocks noChangeAspect="1" noChangeArrowheads="1"/>
-          </p:cNvPicPr>
-          <p:nvPr/>
-        </p:nvPicPr>
-        <p:blipFill>
-          <a:blip r:embed="rId4" cstate="print">
-            <a:extLst>
-              <a:ext uri="{28A0092B-C50C-407E-A947-70E740481C1C}">
-                <a14:useLocalDpi xmlns:a14="http://schemas.microsoft.com/office/drawing/2010/main" val="0"/>
-              </a:ext>
-            </a:extLst>
-          </a:blip>
-          <a:srcRect/>
-          <a:stretch>
-            <a:fillRect/>
-          </a:stretch>
-        </p:blipFill>
-        <p:spPr bwMode="auto">
-          <a:xfrm>
-            <a:off x="5309584" y="2469173"/>
-            <a:ext cx="5832647" cy="1919654"/>
-          </a:xfrm>
-          <a:prstGeom prst="rect">
-            <a:avLst/>
-          </a:prstGeom>
-          <a:noFill/>
-          <a:extLst>
-            <a:ext uri="{909E8E84-426E-40DD-AFC4-6F175D3DCCD1}">
-              <a14:hiddenFill xmlns:a14="http://schemas.microsoft.com/office/drawing/2010/main">
-                <a:solidFill>
-                  <a:srgbClr val="FFFFFF"/>
-                </a:solidFill>
-              </a14:hiddenFill>
-            </a:ext>
-          </a:extLst>
-        </p:spPr>
-      </p:pic>
-      <p:pic>
-        <p:nvPicPr>
-          <p:cNvPr id="1032" name="Picture 8">
-            <a:extLst>
-              <a:ext uri="{FF2B5EF4-FFF2-40B4-BE49-F238E27FC236}">
-                <a16:creationId xmlns:a16="http://schemas.microsoft.com/office/drawing/2014/main" id="{0AC33CC4-6C35-C6FD-C03A-DFEEFB9013D3}"/>
-              </a:ext>
-            </a:extLst>
-          </p:cNvPr>
-          <p:cNvPicPr>
-            <a:picLocks noChangeAspect="1" noChangeArrowheads="1"/>
-          </p:cNvPicPr>
-          <p:nvPr/>
-        </p:nvPicPr>
-        <p:blipFill>
-          <a:blip r:embed="rId5" cstate="print">
-            <a:extLst>
-              <a:ext uri="{28A0092B-C50C-407E-A947-70E740481C1C}">
-                <a14:useLocalDpi xmlns:a14="http://schemas.microsoft.com/office/drawing/2010/main" val="0"/>
-              </a:ext>
-            </a:extLst>
-          </a:blip>
-          <a:srcRect/>
-          <a:stretch>
-            <a:fillRect/>
-          </a:stretch>
-        </p:blipFill>
-        <p:spPr bwMode="auto">
-          <a:xfrm>
-            <a:off x="5303913" y="4701422"/>
-            <a:ext cx="5832647" cy="1919653"/>
-          </a:xfrm>
-          <a:prstGeom prst="rect">
-            <a:avLst/>
-          </a:prstGeom>
-          <a:noFill/>
-          <a:extLst>
-            <a:ext uri="{909E8E84-426E-40DD-AFC4-6F175D3DCCD1}">
-              <a14:hiddenFill xmlns:a14="http://schemas.microsoft.com/office/drawing/2010/main">
-                <a:solidFill>
-                  <a:srgbClr val="FFFFFF"/>
-                </a:solidFill>
-              </a14:hiddenFill>
-            </a:ext>
-          </a:extLst>
-        </p:spPr>
-      </p:pic>
-      <p:pic>
-        <p:nvPicPr>
-          <p:cNvPr id="3" name="Picture 2" descr="한 여자가 노트북 컴퓨터에 타이핑을 하고 있다">
-            <a:extLst>
-              <a:ext uri="{FF2B5EF4-FFF2-40B4-BE49-F238E27FC236}">
-                <a16:creationId xmlns:a16="http://schemas.microsoft.com/office/drawing/2014/main" id="{1C0F150E-B972-291C-98C5-D1154ED29818}"/>
-              </a:ext>
-            </a:extLst>
-          </p:cNvPr>
-          <p:cNvPicPr>
-            <a:picLocks noChangeAspect="1" noChangeArrowheads="1"/>
-          </p:cNvPicPr>
-          <p:nvPr/>
-        </p:nvPicPr>
-        <p:blipFill>
-          <a:blip r:embed="rId6" cstate="print">
-            <a:extLst>
-              <a:ext uri="{28A0092B-C50C-407E-A947-70E740481C1C}">
-                <a14:useLocalDpi xmlns:a14="http://schemas.microsoft.com/office/drawing/2010/main" val="0"/>
-              </a:ext>
-            </a:extLst>
-          </a:blip>
-          <a:srcRect/>
-          <a:stretch>
-            <a:fillRect/>
-          </a:stretch>
-        </p:blipFill>
-        <p:spPr bwMode="auto">
-          <a:xfrm>
-            <a:off x="9869489" y="66676"/>
-            <a:ext cx="2152650" cy="1424329"/>
-          </a:xfrm>
-          <a:prstGeom prst="rect">
-            <a:avLst/>
-          </a:prstGeom>
-          <a:noFill/>
-          <a:extLst>
-            <a:ext uri="{909E8E84-426E-40DD-AFC4-6F175D3DCCD1}">
-              <a14:hiddenFill xmlns:a14="http://schemas.microsoft.com/office/drawing/2010/main">
-                <a:solidFill>
-                  <a:srgbClr val="FFFFFF"/>
-                </a:solidFill>
-              </a14:hiddenFill>
-            </a:ext>
-          </a:extLst>
-        </p:spPr>
-      </p:pic>
     </p:spTree>
     <p:extLst>
       <p:ext uri="{BB962C8B-B14F-4D97-AF65-F5344CB8AC3E}">
-        <p14:creationId xmlns:p14="http://schemas.microsoft.com/office/powerpoint/2010/main" val="2060882861"/>
+        <p14:creationId xmlns:p14="http://schemas.microsoft.com/office/powerpoint/2010/main" val="1127705894"/>
       </p:ext>
     </p:extLst>
   </p:cSld>
@@ -20424,7 +20332,7 @@
         <p:cNvPr id="1" name="">
           <a:extLst>
             <a:ext uri="{FF2B5EF4-FFF2-40B4-BE49-F238E27FC236}">
-              <a16:creationId xmlns:a16="http://schemas.microsoft.com/office/drawing/2014/main" id="{014016E6-4DF5-97F6-9486-23E46F5C4A36}"/>
+              <a16:creationId xmlns:a16="http://schemas.microsoft.com/office/drawing/2014/main" id="{D82F35E0-A8BA-9E25-DCE5-002AF8EF7215}"/>
             </a:ext>
           </a:extLst>
         </p:cNvPr>
@@ -20444,7 +20352,7 @@
           <p:cNvPr id="2" name="슬라이드 번호 개체 틀 1">
             <a:extLst>
               <a:ext uri="{FF2B5EF4-FFF2-40B4-BE49-F238E27FC236}">
-                <a16:creationId xmlns:a16="http://schemas.microsoft.com/office/drawing/2014/main" id="{A39D4B50-D754-79A0-CD51-823002DF348F}"/>
+                <a16:creationId xmlns:a16="http://schemas.microsoft.com/office/drawing/2014/main" id="{CA6F4F7E-6F61-4FB4-D872-D19D234DDFD9}"/>
               </a:ext>
             </a:extLst>
           </p:cNvPr>
@@ -20474,7 +20382,7 @@
           <p:cNvPr id="4" name="TextBox 3">
             <a:extLst>
               <a:ext uri="{FF2B5EF4-FFF2-40B4-BE49-F238E27FC236}">
-                <a16:creationId xmlns:a16="http://schemas.microsoft.com/office/drawing/2014/main" id="{6843735A-526C-E0D0-66F8-62A3BD4EC82F}"/>
+                <a16:creationId xmlns:a16="http://schemas.microsoft.com/office/drawing/2014/main" id="{0FFED543-95FD-70FD-6206-68419637947A}"/>
               </a:ext>
             </a:extLst>
           </p:cNvPr>
@@ -20483,8 +20391,8 @@
         </p:nvSpPr>
         <p:spPr>
           <a:xfrm>
-            <a:off x="551384" y="2916953"/>
-            <a:ext cx="11377264" cy="3184013"/>
+            <a:off x="767408" y="1196753"/>
+            <a:ext cx="8925232" cy="1285288"/>
           </a:xfrm>
           <a:prstGeom prst="rect">
             <a:avLst/>
@@ -20509,121 +20417,39 @@
               <a:buChar char="v"/>
             </a:pPr>
             <a:r>
-              <a:rPr lang="ko-KR" altLang="en-US" sz="1600" dirty="0">
-                <a:latin typeface="맑은 고딕 Semilight" panose="020B0502040204020203" pitchFamily="50" charset="-127"/>
-                <a:ea typeface="맑은 고딕 Semilight" panose="020B0502040204020203" pitchFamily="50" charset="-127"/>
-                <a:cs typeface="맑은 고딕 Semilight" panose="020B0502040204020203" pitchFamily="50" charset="-127"/>
-              </a:rPr>
-              <a:t>모델 학습의 안정성 확보”</a:t>
-            </a:r>
-            <a:endParaRPr lang="en-US" altLang="ko-KR" sz="1600" dirty="0">
-              <a:latin typeface="맑은 고딕 Semilight" panose="020B0502040204020203" pitchFamily="50" charset="-127"/>
-              <a:ea typeface="맑은 고딕 Semilight" panose="020B0502040204020203" pitchFamily="50" charset="-127"/>
-              <a:cs typeface="맑은 고딕 Semilight" panose="020B0502040204020203" pitchFamily="50" charset="-127"/>
-            </a:endParaRPr>
-          </a:p>
-          <a:p>
-            <a:pPr marL="742950" lvl="1" indent="-285750">
-              <a:lnSpc>
-                <a:spcPct val="150000"/>
-              </a:lnSpc>
-              <a:buFont typeface="Wingdings" panose="05000000000000000000" pitchFamily="2" charset="2"/>
-              <a:buChar char="v"/>
-            </a:pPr>
-            <a:r>
-              <a:rPr lang="en-US" altLang="ko-KR" sz="1400" dirty="0">
-                <a:latin typeface="맑은 고딕 Semilight" panose="020B0502040204020203" pitchFamily="50" charset="-127"/>
-                <a:ea typeface="맑은 고딕 Semilight" panose="020B0502040204020203" pitchFamily="50" charset="-127"/>
-                <a:cs typeface="맑은 고딕 Semilight" panose="020B0502040204020203" pitchFamily="50" charset="-127"/>
-              </a:rPr>
-              <a:t>MSE , Cross-Entropy, Log-loss </a:t>
-            </a:r>
-            <a:endParaRPr lang="en-US" altLang="ko-KR" sz="1600" dirty="0">
-              <a:latin typeface="맑은 고딕 Semilight" panose="020B0502040204020203" pitchFamily="50" charset="-127"/>
-              <a:ea typeface="맑은 고딕 Semilight" panose="020B0502040204020203" pitchFamily="50" charset="-127"/>
-              <a:cs typeface="맑은 고딕 Semilight" panose="020B0502040204020203" pitchFamily="50" charset="-127"/>
-            </a:endParaRPr>
-          </a:p>
-          <a:p>
-            <a:pPr marL="285750" indent="-285750">
-              <a:lnSpc>
-                <a:spcPct val="150000"/>
-              </a:lnSpc>
-              <a:buFont typeface="Wingdings" panose="05000000000000000000" pitchFamily="2" charset="2"/>
-              <a:buChar char="v"/>
-            </a:pPr>
-            <a:r>
-              <a:rPr lang="en-US" altLang="ko-KR" sz="1600" dirty="0">
-                <a:latin typeface="맑은 고딕 Semilight" panose="020B0502040204020203" pitchFamily="50" charset="-127"/>
-                <a:ea typeface="맑은 고딕 Semilight" panose="020B0502040204020203" pitchFamily="50" charset="-127"/>
-                <a:cs typeface="맑은 고딕 Semilight" panose="020B0502040204020203" pitchFamily="50" charset="-127"/>
-              </a:rPr>
-              <a:t>Mini-batch </a:t>
-            </a:r>
-            <a:r>
-              <a:rPr lang="ko-KR" altLang="en-US" sz="1600" dirty="0">
-                <a:latin typeface="맑은 고딕 Semilight" panose="020B0502040204020203" pitchFamily="50" charset="-127"/>
-                <a:ea typeface="맑은 고딕 Semilight" panose="020B0502040204020203" pitchFamily="50" charset="-127"/>
-                <a:cs typeface="맑은 고딕 Semilight" panose="020B0502040204020203" pitchFamily="50" charset="-127"/>
-              </a:rPr>
-              <a:t>학습이 가능한 이유”</a:t>
-            </a:r>
-            <a:endParaRPr lang="en-US" altLang="ko-KR" sz="1600" dirty="0">
-              <a:latin typeface="맑은 고딕 Semilight" panose="020B0502040204020203" pitchFamily="50" charset="-127"/>
-              <a:ea typeface="맑은 고딕 Semilight" panose="020B0502040204020203" pitchFamily="50" charset="-127"/>
-              <a:cs typeface="맑은 고딕 Semilight" panose="020B0502040204020203" pitchFamily="50" charset="-127"/>
-            </a:endParaRPr>
-          </a:p>
-          <a:p>
-            <a:pPr marL="742950" lvl="1" indent="-285750">
-              <a:lnSpc>
-                <a:spcPct val="150000"/>
-              </a:lnSpc>
-              <a:buFont typeface="Wingdings" panose="05000000000000000000" pitchFamily="2" charset="2"/>
-              <a:buChar char="v"/>
-            </a:pPr>
-            <a:r>
-              <a:rPr lang="en-US" altLang="ko-KR" sz="1400" dirty="0">
-                <a:latin typeface="맑은 고딕 Semilight" panose="020B0502040204020203" pitchFamily="50" charset="-127"/>
-                <a:ea typeface="맑은 고딕 Semilight" panose="020B0502040204020203" pitchFamily="50" charset="-127"/>
-                <a:cs typeface="맑은 고딕 Semilight" panose="020B0502040204020203" pitchFamily="50" charset="-127"/>
-              </a:rPr>
-              <a:t>Mini-batch = </a:t>
-            </a:r>
-            <a:r>
-              <a:rPr lang="ko-KR" altLang="en-US" sz="1400" dirty="0">
-                <a:latin typeface="맑은 고딕 Semilight" panose="020B0502040204020203" pitchFamily="50" charset="-127"/>
-                <a:ea typeface="맑은 고딕 Semilight" panose="020B0502040204020203" pitchFamily="50" charset="-127"/>
-                <a:cs typeface="맑은 고딕 Semilight" panose="020B0502040204020203" pitchFamily="50" charset="-127"/>
-              </a:rPr>
-              <a:t>작은 샘플 평균</a:t>
-            </a:r>
-            <a:r>
-              <a:rPr lang="en-US" altLang="ko-KR" sz="1400" dirty="0">
-                <a:latin typeface="맑은 고딕 Semilight" panose="020B0502040204020203" pitchFamily="50" charset="-127"/>
-                <a:ea typeface="맑은 고딕 Semilight" panose="020B0502040204020203" pitchFamily="50" charset="-127"/>
-                <a:cs typeface="맑은 고딕 Semilight" panose="020B0502040204020203" pitchFamily="50" charset="-127"/>
-              </a:rPr>
-              <a:t>, CLT</a:t>
-            </a:r>
-            <a:r>
-              <a:rPr lang="ko-KR" altLang="en-US" sz="1400" dirty="0">
-                <a:latin typeface="맑은 고딕 Semilight" panose="020B0502040204020203" pitchFamily="50" charset="-127"/>
-                <a:ea typeface="맑은 고딕 Semilight" panose="020B0502040204020203" pitchFamily="50" charset="-127"/>
-                <a:cs typeface="맑은 고딕 Semilight" panose="020B0502040204020203" pitchFamily="50" charset="-127"/>
-              </a:rPr>
-              <a:t>없이는 </a:t>
-            </a:r>
-            <a:r>
-              <a:rPr lang="en-US" altLang="ko-KR" sz="1400" dirty="0">
-                <a:latin typeface="맑은 고딕 Semilight" panose="020B0502040204020203" pitchFamily="50" charset="-127"/>
-                <a:ea typeface="맑은 고딕 Semilight" panose="020B0502040204020203" pitchFamily="50" charset="-127"/>
-                <a:cs typeface="맑은 고딕 Semilight" panose="020B0502040204020203" pitchFamily="50" charset="-127"/>
-              </a:rPr>
-              <a:t>mini</a:t>
-            </a:r>
-            <a:r>
-              <a:rPr lang="ko-KR" altLang="en-US" sz="1400" dirty="0">
+              <a:rPr lang="ko-KR" altLang="en-US" dirty="0">
+                <a:latin typeface="맑은 고딕 Semilight" panose="020B0502040204020203" pitchFamily="50" charset="-127"/>
+                <a:ea typeface="맑은 고딕 Semilight" panose="020B0502040204020203" pitchFamily="50" charset="-127"/>
+                <a:cs typeface="맑은 고딕 Semilight" panose="020B0502040204020203" pitchFamily="50" charset="-127"/>
+              </a:rPr>
+              <a:t>모집단의 회귀식의 </a:t>
+            </a:r>
+            <a:r>
+              <a:rPr lang="en-US" altLang="ko-KR" dirty="0">
+                <a:latin typeface="맑은 고딕 Semilight" panose="020B0502040204020203" pitchFamily="50" charset="-127"/>
+                <a:ea typeface="맑은 고딕 Semilight" panose="020B0502040204020203" pitchFamily="50" charset="-127"/>
+                <a:cs typeface="맑은 고딕 Semilight" panose="020B0502040204020203" pitchFamily="50" charset="-127"/>
+              </a:rPr>
+              <a:t>gradient(</a:t>
+            </a:r>
+            <a:r>
+              <a:rPr lang="ko-KR" altLang="en-US" dirty="0">
+                <a:latin typeface="맑은 고딕 Semilight" panose="020B0502040204020203" pitchFamily="50" charset="-127"/>
+                <a:ea typeface="맑은 고딕 Semilight" panose="020B0502040204020203" pitchFamily="50" charset="-127"/>
+                <a:cs typeface="맑은 고딕 Semilight" panose="020B0502040204020203" pitchFamily="50" charset="-127"/>
+              </a:rPr>
+              <a:t>기울기</a:t>
+            </a:r>
+            <a:r>
+              <a:rPr lang="en-US" altLang="ko-KR" dirty="0">
+                <a:latin typeface="맑은 고딕 Semilight" panose="020B0502040204020203" pitchFamily="50" charset="-127"/>
+                <a:ea typeface="맑은 고딕 Semilight" panose="020B0502040204020203" pitchFamily="50" charset="-127"/>
+                <a:cs typeface="맑은 고딕 Semilight" panose="020B0502040204020203" pitchFamily="50" charset="-127"/>
+              </a:rPr>
+              <a:t>)</a:t>
+            </a:r>
+            <a:r>
+              <a:rPr lang="ko-KR" altLang="en-US" dirty="0">
                 <a:latin typeface="맑은 고딕 Semilight" panose="020B0502040204020203" pitchFamily="50" charset="-127"/>
                 <a:ea typeface="맑은 고딕 Semilight" panose="020B0502040204020203" pitchFamily="50" charset="-127"/>
                 <a:cs typeface="맑은 고딕 Semilight" panose="020B0502040204020203" pitchFamily="50" charset="-127"/>
@@ -20631,99 +20457,63 @@
               <a:t> </a:t>
             </a:r>
             <a:r>
-              <a:rPr lang="en-US" altLang="ko-KR" sz="1400" dirty="0">
-                <a:latin typeface="맑은 고딕 Semilight" panose="020B0502040204020203" pitchFamily="50" charset="-127"/>
-                <a:ea typeface="맑은 고딕 Semilight" panose="020B0502040204020203" pitchFamily="50" charset="-127"/>
-                <a:cs typeface="맑은 고딕 Semilight" panose="020B0502040204020203" pitchFamily="50" charset="-127"/>
-              </a:rPr>
-              <a:t>batch </a:t>
-            </a:r>
-            <a:r>
-              <a:rPr lang="ko-KR" altLang="en-US" sz="1400" dirty="0">
-                <a:latin typeface="맑은 고딕 Semilight" panose="020B0502040204020203" pitchFamily="50" charset="-127"/>
-                <a:ea typeface="맑은 고딕 Semilight" panose="020B0502040204020203" pitchFamily="50" charset="-127"/>
-                <a:cs typeface="맑은 고딕 Semilight" panose="020B0502040204020203" pitchFamily="50" charset="-127"/>
-              </a:rPr>
-              <a:t>도 없음</a:t>
-            </a:r>
-            <a:endParaRPr lang="en-US" altLang="ko-KR" sz="1600" dirty="0">
-              <a:latin typeface="맑은 고딕 Semilight" panose="020B0502040204020203" pitchFamily="50" charset="-127"/>
-              <a:ea typeface="맑은 고딕 Semilight" panose="020B0502040204020203" pitchFamily="50" charset="-127"/>
-              <a:cs typeface="맑은 고딕 Semilight" panose="020B0502040204020203" pitchFamily="50" charset="-127"/>
-            </a:endParaRPr>
-          </a:p>
-          <a:p>
-            <a:pPr marL="285750" indent="-285750">
-              <a:lnSpc>
-                <a:spcPct val="150000"/>
-              </a:lnSpc>
-              <a:buFont typeface="Wingdings" panose="05000000000000000000" pitchFamily="2" charset="2"/>
-              <a:buChar char="v"/>
-            </a:pPr>
-            <a:r>
-              <a:rPr lang="ko-KR" altLang="en-US" sz="1600" dirty="0">
-                <a:latin typeface="맑은 고딕 Semilight" panose="020B0502040204020203" pitchFamily="50" charset="-127"/>
-                <a:ea typeface="맑은 고딕 Semilight" panose="020B0502040204020203" pitchFamily="50" charset="-127"/>
-                <a:cs typeface="맑은 고딕 Semilight" panose="020B0502040204020203" pitchFamily="50" charset="-127"/>
-              </a:rPr>
-              <a:t>교차검증을 통한 모델의 평가</a:t>
-            </a:r>
-            <a:endParaRPr lang="en-US" altLang="ko-KR" sz="1600" dirty="0">
-              <a:latin typeface="맑은 고딕 Semilight" panose="020B0502040204020203" pitchFamily="50" charset="-127"/>
-              <a:ea typeface="맑은 고딕 Semilight" panose="020B0502040204020203" pitchFamily="50" charset="-127"/>
-              <a:cs typeface="맑은 고딕 Semilight" panose="020B0502040204020203" pitchFamily="50" charset="-127"/>
-            </a:endParaRPr>
-          </a:p>
-          <a:p>
-            <a:pPr marL="742950" lvl="1" indent="-285750">
-              <a:lnSpc>
-                <a:spcPct val="150000"/>
-              </a:lnSpc>
-              <a:buFont typeface="Wingdings" panose="05000000000000000000" pitchFamily="2" charset="2"/>
-              <a:buChar char="v"/>
-            </a:pPr>
-            <a:r>
-              <a:rPr lang="ko-KR" altLang="en-US" sz="1400" dirty="0">
-                <a:latin typeface="맑은 고딕 Semilight" panose="020B0502040204020203" pitchFamily="50" charset="-127"/>
-                <a:ea typeface="맑은 고딕 Semilight" panose="020B0502040204020203" pitchFamily="50" charset="-127"/>
-                <a:cs typeface="맑은 고딕 Semilight" panose="020B0502040204020203" pitchFamily="50" charset="-127"/>
-              </a:rPr>
-              <a:t>평균 </a:t>
-            </a:r>
-            <a:r>
-              <a:rPr lang="en-US" altLang="ko-KR" sz="1400" dirty="0">
-                <a:latin typeface="맑은 고딕 Semilight" panose="020B0502040204020203" pitchFamily="50" charset="-127"/>
-                <a:ea typeface="맑은 고딕 Semilight" panose="020B0502040204020203" pitchFamily="50" charset="-127"/>
-                <a:cs typeface="맑은 고딕 Semilight" panose="020B0502040204020203" pitchFamily="50" charset="-127"/>
-              </a:rPr>
-              <a:t>accuracy/loss, </a:t>
-            </a:r>
-            <a:r>
-              <a:rPr lang="ko-KR" altLang="en-US" sz="1400" dirty="0">
-                <a:latin typeface="맑은 고딕 Semilight" panose="020B0502040204020203" pitchFamily="50" charset="-127"/>
-                <a:ea typeface="맑은 고딕 Semilight" panose="020B0502040204020203" pitchFamily="50" charset="-127"/>
-                <a:cs typeface="맑은 고딕 Semilight" panose="020B0502040204020203" pitchFamily="50" charset="-127"/>
-              </a:rPr>
-              <a:t>교차검증 평균 등 </a:t>
-            </a:r>
-            <a:r>
-              <a:rPr lang="en-US" altLang="ko-KR" sz="1400" dirty="0">
-                <a:latin typeface="맑은 고딕 Semilight" panose="020B0502040204020203" pitchFamily="50" charset="-127"/>
-                <a:ea typeface="맑은 고딕 Semilight" panose="020B0502040204020203" pitchFamily="50" charset="-127"/>
-                <a:cs typeface="맑은 고딕 Semilight" panose="020B0502040204020203" pitchFamily="50" charset="-127"/>
-              </a:rPr>
-              <a:t>CLT </a:t>
-            </a:r>
-            <a:r>
-              <a:rPr lang="ko-KR" altLang="en-US" sz="1400" dirty="0">
-                <a:latin typeface="맑은 고딕 Semilight" panose="020B0502040204020203" pitchFamily="50" charset="-127"/>
-                <a:ea typeface="맑은 고딕 Semilight" panose="020B0502040204020203" pitchFamily="50" charset="-127"/>
-                <a:cs typeface="맑은 고딕 Semilight" panose="020B0502040204020203" pitchFamily="50" charset="-127"/>
-              </a:rPr>
-              <a:t>적용으로 이  평균들은 → 정규분포 근사</a:t>
-            </a:r>
-            <a:r>
-              <a:rPr lang="en-US" altLang="ko-KR" sz="1400" dirty="0">
+              <a:rPr lang="en-US" altLang="ko-KR" dirty="0">
+                <a:latin typeface="맑은 고딕 Semilight" panose="020B0502040204020203" pitchFamily="50" charset="-127"/>
+                <a:ea typeface="맑은 고딕 Semilight" panose="020B0502040204020203" pitchFamily="50" charset="-127"/>
+                <a:cs typeface="맑은 고딕 Semilight" panose="020B0502040204020203" pitchFamily="50" charset="-127"/>
+              </a:rPr>
+              <a:t>2</a:t>
+            </a:r>
+            <a:r>
+              <a:rPr lang="ko-KR" altLang="en-US" dirty="0">
+                <a:latin typeface="맑은 고딕 Semilight" panose="020B0502040204020203" pitchFamily="50" charset="-127"/>
+                <a:ea typeface="맑은 고딕 Semilight" panose="020B0502040204020203" pitchFamily="50" charset="-127"/>
+                <a:cs typeface="맑은 고딕 Semilight" panose="020B0502040204020203" pitchFamily="50" charset="-127"/>
+              </a:rPr>
+              <a:t>인 데이터를 생성하고 표본크기를 </a:t>
+            </a:r>
+            <a:r>
+              <a:rPr lang="en-US" altLang="ko-KR" dirty="0">
+                <a:latin typeface="맑은 고딕 Semilight" panose="020B0502040204020203" pitchFamily="50" charset="-127"/>
+                <a:ea typeface="맑은 고딕 Semilight" panose="020B0502040204020203" pitchFamily="50" charset="-127"/>
+                <a:cs typeface="맑은 고딕 Semilight" panose="020B0502040204020203" pitchFamily="50" charset="-127"/>
+              </a:rPr>
+              <a:t>5, 30, 100 </a:t>
+            </a:r>
+            <a:r>
+              <a:rPr lang="ko-KR" altLang="en-US" dirty="0">
+                <a:latin typeface="맑은 고딕 Semilight" panose="020B0502040204020203" pitchFamily="50" charset="-127"/>
+                <a:ea typeface="맑은 고딕 Semilight" panose="020B0502040204020203" pitchFamily="50" charset="-127"/>
+                <a:cs typeface="맑은 고딕 Semilight" panose="020B0502040204020203" pitchFamily="50" charset="-127"/>
+              </a:rPr>
+              <a:t>으로 각각 </a:t>
+            </a:r>
+            <a:r>
+              <a:rPr lang="en-US" altLang="ko-KR" dirty="0">
+                <a:latin typeface="맑은 고딕 Semilight" panose="020B0502040204020203" pitchFamily="50" charset="-127"/>
+                <a:ea typeface="맑은 고딕 Semilight" panose="020B0502040204020203" pitchFamily="50" charset="-127"/>
+                <a:cs typeface="맑은 고딕 Semilight" panose="020B0502040204020203" pitchFamily="50" charset="-127"/>
+              </a:rPr>
+              <a:t>1000</a:t>
+            </a:r>
+            <a:r>
+              <a:rPr lang="ko-KR" altLang="en-US" dirty="0">
+                <a:latin typeface="맑은 고딕 Semilight" panose="020B0502040204020203" pitchFamily="50" charset="-127"/>
+                <a:ea typeface="맑은 고딕 Semilight" panose="020B0502040204020203" pitchFamily="50" charset="-127"/>
+                <a:cs typeface="맑은 고딕 Semilight" panose="020B0502040204020203" pitchFamily="50" charset="-127"/>
+              </a:rPr>
+              <a:t>개 표본의 기울기와 </a:t>
+            </a:r>
+            <a:r>
+              <a:rPr lang="en-US" altLang="ko-KR" dirty="0">
+                <a:latin typeface="맑은 고딕 Semilight" panose="020B0502040204020203" pitchFamily="50" charset="-127"/>
+                <a:ea typeface="맑은 고딕 Semilight" panose="020B0502040204020203" pitchFamily="50" charset="-127"/>
+                <a:cs typeface="맑은 고딕 Semilight" panose="020B0502040204020203" pitchFamily="50" charset="-127"/>
+              </a:rPr>
+              <a:t>MSE(Mean</a:t>
+            </a:r>
+            <a:r>
+              <a:rPr lang="ko-KR" altLang="en-US" dirty="0">
                 <a:latin typeface="맑은 고딕 Semilight" panose="020B0502040204020203" pitchFamily="50" charset="-127"/>
                 <a:ea typeface="맑은 고딕 Semilight" panose="020B0502040204020203" pitchFamily="50" charset="-127"/>
                 <a:cs typeface="맑은 고딕 Semilight" panose="020B0502040204020203" pitchFamily="50" charset="-127"/>
@@ -20731,15 +20521,15 @@
               <a:t> </a:t>
             </a:r>
             <a:r>
-              <a:rPr lang="ko-KR" altLang="en-US" sz="1400" dirty="0">
-                <a:latin typeface="맑은 고딕 Semilight" panose="020B0502040204020203" pitchFamily="50" charset="-127"/>
-                <a:ea typeface="맑은 고딕 Semilight" panose="020B0502040204020203" pitchFamily="50" charset="-127"/>
-                <a:cs typeface="맑은 고딕 Semilight" panose="020B0502040204020203" pitchFamily="50" charset="-127"/>
-              </a:rPr>
-              <a:t>→ 신뢰구간</a:t>
-            </a:r>
-            <a:r>
-              <a:rPr lang="en-US" altLang="ko-KR" sz="1400" dirty="0">
+              <a:rPr lang="en-US" altLang="ko-KR" dirty="0">
+                <a:latin typeface="맑은 고딕 Semilight" panose="020B0502040204020203" pitchFamily="50" charset="-127"/>
+                <a:ea typeface="맑은 고딕 Semilight" panose="020B0502040204020203" pitchFamily="50" charset="-127"/>
+                <a:cs typeface="맑은 고딕 Semilight" panose="020B0502040204020203" pitchFamily="50" charset="-127"/>
+              </a:rPr>
+              <a:t>Squared</a:t>
+            </a:r>
+            <a:r>
+              <a:rPr lang="ko-KR" altLang="en-US" dirty="0">
                 <a:latin typeface="맑은 고딕 Semilight" panose="020B0502040204020203" pitchFamily="50" charset="-127"/>
                 <a:ea typeface="맑은 고딕 Semilight" panose="020B0502040204020203" pitchFamily="50" charset="-127"/>
                 <a:cs typeface="맑은 고딕 Semilight" panose="020B0502040204020203" pitchFamily="50" charset="-127"/>
@@ -20747,168 +20537,36 @@
               <a:t> </a:t>
             </a:r>
             <a:r>
-              <a:rPr lang="ko-KR" altLang="en-US" sz="1400" dirty="0">
-                <a:latin typeface="맑은 고딕 Semilight" panose="020B0502040204020203" pitchFamily="50" charset="-127"/>
-                <a:ea typeface="맑은 고딕 Semilight" panose="020B0502040204020203" pitchFamily="50" charset="-127"/>
-                <a:cs typeface="맑은 고딕 Semilight" panose="020B0502040204020203" pitchFamily="50" charset="-127"/>
-              </a:rPr>
-              <a:t>→</a:t>
-            </a:r>
-            <a:r>
-              <a:rPr lang="en-US" altLang="ko-KR" sz="1400" dirty="0">
-                <a:latin typeface="맑은 고딕 Semilight" panose="020B0502040204020203" pitchFamily="50" charset="-127"/>
-                <a:ea typeface="맑은 고딕 Semilight" panose="020B0502040204020203" pitchFamily="50" charset="-127"/>
-                <a:cs typeface="맑은 고딕 Semilight" panose="020B0502040204020203" pitchFamily="50" charset="-127"/>
-              </a:rPr>
-              <a:t> </a:t>
-            </a:r>
-            <a:r>
-              <a:rPr lang="ko-KR" altLang="en-US" sz="1400" dirty="0">
-                <a:latin typeface="맑은 고딕 Semilight" panose="020B0502040204020203" pitchFamily="50" charset="-127"/>
-                <a:ea typeface="맑은 고딕 Semilight" panose="020B0502040204020203" pitchFamily="50" charset="-127"/>
-                <a:cs typeface="맑은 고딕 Semilight" panose="020B0502040204020203" pitchFamily="50" charset="-127"/>
-              </a:rPr>
-              <a:t>통계적 비교 가능</a:t>
-            </a:r>
-            <a:endParaRPr lang="en-US" altLang="ko-KR" sz="1600" dirty="0">
-              <a:latin typeface="맑은 고딕 Semilight" panose="020B0502040204020203" pitchFamily="50" charset="-127"/>
-              <a:ea typeface="맑은 고딕 Semilight" panose="020B0502040204020203" pitchFamily="50" charset="-127"/>
-              <a:cs typeface="맑은 고딕 Semilight" panose="020B0502040204020203" pitchFamily="50" charset="-127"/>
-            </a:endParaRPr>
-          </a:p>
-          <a:p>
-            <a:pPr marL="285750" indent="-285750">
-              <a:lnSpc>
-                <a:spcPct val="150000"/>
-              </a:lnSpc>
-              <a:buFont typeface="Wingdings" panose="05000000000000000000" pitchFamily="2" charset="2"/>
-              <a:buChar char="v"/>
-            </a:pPr>
-            <a:r>
-              <a:rPr lang="en-US" altLang="ko-KR" sz="1600" dirty="0">
-                <a:latin typeface="맑은 고딕 Semilight" panose="020B0502040204020203" pitchFamily="50" charset="-127"/>
-                <a:ea typeface="맑은 고딕 Semilight" panose="020B0502040204020203" pitchFamily="50" charset="-127"/>
-                <a:cs typeface="맑은 고딕 Semilight" panose="020B0502040204020203" pitchFamily="50" charset="-127"/>
-              </a:rPr>
-              <a:t>A/B </a:t>
-            </a:r>
-            <a:r>
-              <a:rPr lang="ko-KR" altLang="en-US" sz="1600" dirty="0">
-                <a:latin typeface="맑은 고딕 Semilight" panose="020B0502040204020203" pitchFamily="50" charset="-127"/>
-                <a:ea typeface="맑은 고딕 Semilight" panose="020B0502040204020203" pitchFamily="50" charset="-127"/>
-                <a:cs typeface="맑은 고딕 Semilight" panose="020B0502040204020203" pitchFamily="50" charset="-127"/>
-              </a:rPr>
-              <a:t>테스트와 실험 설계의 핵심</a:t>
-            </a:r>
-            <a:endParaRPr lang="en-US" altLang="ko-KR" sz="1600" dirty="0">
-              <a:latin typeface="맑은 고딕 Semilight" panose="020B0502040204020203" pitchFamily="50" charset="-127"/>
-              <a:ea typeface="맑은 고딕 Semilight" panose="020B0502040204020203" pitchFamily="50" charset="-127"/>
-              <a:cs typeface="맑은 고딕 Semilight" panose="020B0502040204020203" pitchFamily="50" charset="-127"/>
-            </a:endParaRPr>
-          </a:p>
-          <a:p>
-            <a:pPr marL="742950" lvl="1" indent="-285750">
-              <a:lnSpc>
-                <a:spcPct val="150000"/>
-              </a:lnSpc>
-              <a:buFont typeface="Wingdings" panose="05000000000000000000" pitchFamily="2" charset="2"/>
-              <a:buChar char="v"/>
-            </a:pPr>
-            <a:r>
-              <a:rPr lang="ko-KR" altLang="en-US" sz="1400" dirty="0">
-                <a:latin typeface="맑은 고딕 Semilight" panose="020B0502040204020203" pitchFamily="50" charset="-127"/>
-                <a:ea typeface="맑은 고딕 Semilight" panose="020B0502040204020203" pitchFamily="50" charset="-127"/>
-                <a:cs typeface="맑은 고딕 Semilight" panose="020B0502040204020203" pitchFamily="50" charset="-127"/>
-              </a:rPr>
-              <a:t>광고 효과 비교</a:t>
-            </a:r>
-            <a:r>
-              <a:rPr lang="en-US" altLang="ko-KR" sz="1400" dirty="0">
-                <a:latin typeface="맑은 고딕 Semilight" panose="020B0502040204020203" pitchFamily="50" charset="-127"/>
-                <a:ea typeface="맑은 고딕 Semilight" panose="020B0502040204020203" pitchFamily="50" charset="-127"/>
-                <a:cs typeface="맑은 고딕 Semilight" panose="020B0502040204020203" pitchFamily="50" charset="-127"/>
-              </a:rPr>
-              <a:t>, </a:t>
-            </a:r>
-            <a:r>
-              <a:rPr lang="ko-KR" altLang="en-US" sz="1400" dirty="0">
-                <a:latin typeface="맑은 고딕 Semilight" panose="020B0502040204020203" pitchFamily="50" charset="-127"/>
-                <a:ea typeface="맑은 고딕 Semilight" panose="020B0502040204020203" pitchFamily="50" charset="-127"/>
-                <a:cs typeface="맑은 고딕 Semilight" panose="020B0502040204020203" pitchFamily="50" charset="-127"/>
-              </a:rPr>
-              <a:t>추천 알고리즘 비교</a:t>
-            </a:r>
-            <a:r>
-              <a:rPr lang="en-US" altLang="ko-KR" sz="1400" dirty="0">
-                <a:latin typeface="맑은 고딕 Semilight" panose="020B0502040204020203" pitchFamily="50" charset="-127"/>
-                <a:ea typeface="맑은 고딕 Semilight" panose="020B0502040204020203" pitchFamily="50" charset="-127"/>
-                <a:cs typeface="맑은 고딕 Semilight" panose="020B0502040204020203" pitchFamily="50" charset="-127"/>
-              </a:rPr>
-              <a:t>, UI </a:t>
-            </a:r>
-            <a:r>
-              <a:rPr lang="ko-KR" altLang="en-US" sz="1400" dirty="0">
-                <a:latin typeface="맑은 고딕 Semilight" panose="020B0502040204020203" pitchFamily="50" charset="-127"/>
-                <a:ea typeface="맑은 고딕 Semilight" panose="020B0502040204020203" pitchFamily="50" charset="-127"/>
-                <a:cs typeface="맑은 고딕 Semilight" panose="020B0502040204020203" pitchFamily="50" charset="-127"/>
-              </a:rPr>
-              <a:t>개선 효과 측정  등 전부 평균 비교 문제로 </a:t>
-            </a:r>
-            <a:r>
-              <a:rPr lang="en-US" altLang="ko-KR" sz="1400" dirty="0">
-                <a:latin typeface="맑은 고딕 Semilight" panose="020B0502040204020203" pitchFamily="50" charset="-127"/>
-                <a:ea typeface="맑은 고딕 Semilight" panose="020B0502040204020203" pitchFamily="50" charset="-127"/>
-                <a:cs typeface="맑은 고딕 Semilight" panose="020B0502040204020203" pitchFamily="50" charset="-127"/>
-              </a:rPr>
-              <a:t>CLT </a:t>
-            </a:r>
-            <a:r>
-              <a:rPr lang="ko-KR" altLang="en-US" sz="1400" dirty="0">
-                <a:latin typeface="맑은 고딕 Semilight" panose="020B0502040204020203" pitchFamily="50" charset="-127"/>
-                <a:ea typeface="맑은 고딕 Semilight" panose="020B0502040204020203" pitchFamily="50" charset="-127"/>
-                <a:cs typeface="맑은 고딕 Semilight" panose="020B0502040204020203" pitchFamily="50" charset="-127"/>
-              </a:rPr>
-              <a:t>덕분에</a:t>
-            </a:r>
-            <a:r>
-              <a:rPr lang="en-US" altLang="ko-KR" sz="1400" dirty="0">
-                <a:latin typeface="맑은 고딕 Semilight" panose="020B0502040204020203" pitchFamily="50" charset="-127"/>
-                <a:ea typeface="맑은 고딕 Semilight" panose="020B0502040204020203" pitchFamily="50" charset="-127"/>
-                <a:cs typeface="맑은 고딕 Semilight" panose="020B0502040204020203" pitchFamily="50" charset="-127"/>
-              </a:rPr>
-              <a:t> </a:t>
-            </a:r>
-            <a:r>
-              <a:rPr lang="ko-KR" altLang="en-US" sz="1400" dirty="0">
-                <a:latin typeface="맑은 고딕 Semilight" panose="020B0502040204020203" pitchFamily="50" charset="-127"/>
-                <a:ea typeface="맑은 고딕 Semilight" panose="020B0502040204020203" pitchFamily="50" charset="-127"/>
-                <a:cs typeface="맑은 고딕 Semilight" panose="020B0502040204020203" pitchFamily="50" charset="-127"/>
-              </a:rPr>
-              <a:t>두 평균 차이 → 정규분포 근사 → </a:t>
-            </a:r>
-            <a:r>
-              <a:rPr lang="en-US" altLang="ko-KR" sz="1400" dirty="0">
-                <a:latin typeface="맑은 고딕 Semilight" panose="020B0502040204020203" pitchFamily="50" charset="-127"/>
-                <a:ea typeface="맑은 고딕 Semilight" panose="020B0502040204020203" pitchFamily="50" charset="-127"/>
-                <a:cs typeface="맑은 고딕 Semilight" panose="020B0502040204020203" pitchFamily="50" charset="-127"/>
-              </a:rPr>
-              <a:t>p-value </a:t>
-            </a:r>
-            <a:r>
-              <a:rPr lang="ko-KR" altLang="en-US" sz="1400" dirty="0">
-                <a:latin typeface="맑은 고딕 Semilight" panose="020B0502040204020203" pitchFamily="50" charset="-127"/>
-                <a:ea typeface="맑은 고딕 Semilight" panose="020B0502040204020203" pitchFamily="50" charset="-127"/>
-                <a:cs typeface="맑은 고딕 Semilight" panose="020B0502040204020203" pitchFamily="50" charset="-127"/>
-              </a:rPr>
-              <a:t>계산 가능</a:t>
-            </a:r>
-            <a:r>
-              <a:rPr lang="ko-KR" altLang="en-US" sz="1600" dirty="0">
-                <a:latin typeface="맑은 고딕 Semilight" panose="020B0502040204020203" pitchFamily="50" charset="-127"/>
-                <a:ea typeface="맑은 고딕 Semilight" panose="020B0502040204020203" pitchFamily="50" charset="-127"/>
-                <a:cs typeface="맑은 고딕 Semilight" panose="020B0502040204020203" pitchFamily="50" charset="-127"/>
-              </a:rPr>
-              <a:t> </a:t>
+              <a:rPr lang="en-US" altLang="ko-KR" dirty="0">
+                <a:latin typeface="맑은 고딕 Semilight" panose="020B0502040204020203" pitchFamily="50" charset="-127"/>
+                <a:ea typeface="맑은 고딕 Semilight" panose="020B0502040204020203" pitchFamily="50" charset="-127"/>
+                <a:cs typeface="맑은 고딕 Semilight" panose="020B0502040204020203" pitchFamily="50" charset="-127"/>
+              </a:rPr>
+              <a:t>Error)</a:t>
+            </a:r>
+            <a:r>
+              <a:rPr lang="ko-KR" altLang="en-US" dirty="0">
+                <a:latin typeface="맑은 고딕 Semilight" panose="020B0502040204020203" pitchFamily="50" charset="-127"/>
+                <a:ea typeface="맑은 고딕 Semilight" panose="020B0502040204020203" pitchFamily="50" charset="-127"/>
+                <a:cs typeface="맑은 고딕 Semilight" panose="020B0502040204020203" pitchFamily="50" charset="-127"/>
+              </a:rPr>
+              <a:t>의 평균과 분산을 </a:t>
+            </a:r>
+            <a:r>
+              <a:rPr lang="ko-KR" altLang="en-US" dirty="0" err="1">
+                <a:latin typeface="맑은 고딕 Semilight" panose="020B0502040204020203" pitchFamily="50" charset="-127"/>
+                <a:ea typeface="맑은 고딕 Semilight" panose="020B0502040204020203" pitchFamily="50" charset="-127"/>
+                <a:cs typeface="맑은 고딕 Semilight" panose="020B0502040204020203" pitchFamily="50" charset="-127"/>
+              </a:rPr>
+              <a:t>시각화하라</a:t>
+            </a:r>
+            <a:r>
+              <a:rPr lang="ko-KR" altLang="en-US" dirty="0">
+                <a:latin typeface="맑은 고딕 Semilight" panose="020B0502040204020203" pitchFamily="50" charset="-127"/>
+                <a:ea typeface="맑은 고딕 Semilight" panose="020B0502040204020203" pitchFamily="50" charset="-127"/>
+                <a:cs typeface="맑은 고딕 Semilight" panose="020B0502040204020203" pitchFamily="50" charset="-127"/>
+              </a:rPr>
+              <a:t>  </a:t>
             </a:r>
             <a:endParaRPr lang="en-US" altLang="ko-KR" dirty="0">
               <a:latin typeface="맑은 고딕 Semilight" panose="020B0502040204020203" pitchFamily="50" charset="-127"/>
@@ -20923,7 +20581,7 @@
           <p:cNvPr id="9" name="TextBox 8">
             <a:extLst>
               <a:ext uri="{FF2B5EF4-FFF2-40B4-BE49-F238E27FC236}">
-                <a16:creationId xmlns:a16="http://schemas.microsoft.com/office/drawing/2014/main" id="{185A9784-515E-A3E4-8F67-F24BA80B28DC}"/>
+                <a16:creationId xmlns:a16="http://schemas.microsoft.com/office/drawing/2014/main" id="{F30D0FE0-2695-7F37-8905-B8DE24E7A394}"/>
               </a:ext>
             </a:extLst>
           </p:cNvPr>
@@ -20933,7 +20591,7 @@
         <p:spPr>
           <a:xfrm>
             <a:off x="119336" y="260649"/>
-            <a:ext cx="3650024" cy="584775"/>
+            <a:ext cx="2592288" cy="584775"/>
           </a:xfrm>
           <a:prstGeom prst="rect">
             <a:avLst/>
@@ -20954,163 +20612,15 @@
               </a:rPr>
               <a:t>문제 풀이</a:t>
             </a:r>
-            <a:r>
-              <a:rPr lang="en-US" altLang="ko-KR" sz="3200" b="1" dirty="0">
-                <a:latin typeface="맑은 고딕 Semilight" panose="020B0502040204020203" pitchFamily="50" charset="-127"/>
-                <a:ea typeface="맑은 고딕 Semilight" panose="020B0502040204020203" pitchFamily="50" charset="-127"/>
-                <a:cs typeface="맑은 고딕 Semilight" panose="020B0502040204020203" pitchFamily="50" charset="-127"/>
-              </a:rPr>
-              <a:t>(</a:t>
-            </a:r>
-            <a:r>
-              <a:rPr lang="ko-KR" altLang="en-US" sz="3200" b="1" dirty="0">
-                <a:latin typeface="맑은 고딕 Semilight" panose="020B0502040204020203" pitchFamily="50" charset="-127"/>
-                <a:ea typeface="맑은 고딕 Semilight" panose="020B0502040204020203" pitchFamily="50" charset="-127"/>
-                <a:cs typeface="맑은 고딕 Semilight" panose="020B0502040204020203" pitchFamily="50" charset="-127"/>
-              </a:rPr>
-              <a:t>고급</a:t>
-            </a:r>
-            <a:r>
-              <a:rPr lang="en-US" altLang="ko-KR" sz="3200" b="1" dirty="0">
-                <a:latin typeface="맑은 고딕 Semilight" panose="020B0502040204020203" pitchFamily="50" charset="-127"/>
-                <a:ea typeface="맑은 고딕 Semilight" panose="020B0502040204020203" pitchFamily="50" charset="-127"/>
-                <a:cs typeface="맑은 고딕 Semilight" panose="020B0502040204020203" pitchFamily="50" charset="-127"/>
-              </a:rPr>
-              <a:t>)</a:t>
-            </a:r>
-            <a:endParaRPr lang="ko-KR" altLang="en-US" sz="3200" b="1" dirty="0">
-              <a:latin typeface="맑은 고딕 Semilight" panose="020B0502040204020203" pitchFamily="50" charset="-127"/>
-              <a:ea typeface="맑은 고딕 Semilight" panose="020B0502040204020203" pitchFamily="50" charset="-127"/>
-              <a:cs typeface="맑은 고딕 Semilight" panose="020B0502040204020203" pitchFamily="50" charset="-127"/>
-            </a:endParaRPr>
-          </a:p>
-        </p:txBody>
-      </p:sp>
-      <p:sp>
-        <p:nvSpPr>
-          <p:cNvPr id="5" name="TextBox 4">
-            <a:extLst>
-              <a:ext uri="{FF2B5EF4-FFF2-40B4-BE49-F238E27FC236}">
-                <a16:creationId xmlns:a16="http://schemas.microsoft.com/office/drawing/2014/main" id="{52039815-B66C-C01C-F725-1707E5711FCB}"/>
-              </a:ext>
-            </a:extLst>
-          </p:cNvPr>
-          <p:cNvSpPr txBox="1"/>
-          <p:nvPr/>
-        </p:nvSpPr>
-        <p:spPr>
-          <a:xfrm>
-            <a:off x="551384" y="1656979"/>
-            <a:ext cx="11377264" cy="869790"/>
-          </a:xfrm>
-          <a:prstGeom prst="rect">
-            <a:avLst/>
-          </a:prstGeom>
-          <a:solidFill>
-            <a:schemeClr val="bg1">
-              <a:lumMod val="95000"/>
-            </a:schemeClr>
-          </a:solidFill>
-        </p:spPr>
-        <p:txBody>
-          <a:bodyPr wrap="square">
-            <a:spAutoFit/>
-          </a:bodyPr>
-          <a:lstStyle/>
-          <a:p>
-            <a:pPr marL="285750" indent="-285750">
-              <a:lnSpc>
-                <a:spcPct val="150000"/>
-              </a:lnSpc>
-              <a:buFont typeface="Wingdings" panose="05000000000000000000" pitchFamily="2" charset="2"/>
-              <a:buChar char="v"/>
-            </a:pPr>
-            <a:r>
-              <a:rPr lang="ko-KR" altLang="en-US" dirty="0">
-                <a:latin typeface="맑은 고딕 Semilight" panose="020B0502040204020203" pitchFamily="50" charset="-127"/>
-                <a:ea typeface="맑은 고딕 Semilight" panose="020B0502040204020203" pitchFamily="50" charset="-127"/>
-                <a:cs typeface="맑은 고딕 Semilight" panose="020B0502040204020203" pitchFamily="50" charset="-127"/>
-              </a:rPr>
-              <a:t>중심극한정리</a:t>
-            </a:r>
-            <a:r>
-              <a:rPr lang="en-US" altLang="ko-KR" dirty="0">
-                <a:latin typeface="맑은 고딕 Semilight" panose="020B0502040204020203" pitchFamily="50" charset="-127"/>
-                <a:ea typeface="맑은 고딕 Semilight" panose="020B0502040204020203" pitchFamily="50" charset="-127"/>
-                <a:cs typeface="맑은 고딕 Semilight" panose="020B0502040204020203" pitchFamily="50" charset="-127"/>
-              </a:rPr>
-              <a:t>(</a:t>
-            </a:r>
-            <a:r>
-              <a:rPr lang="ko-KR" altLang="en-US" dirty="0">
-                <a:latin typeface="맑은 고딕 Semilight" panose="020B0502040204020203" pitchFamily="50" charset="-127"/>
-                <a:ea typeface="맑은 고딕 Semilight" panose="020B0502040204020203" pitchFamily="50" charset="-127"/>
-                <a:cs typeface="맑은 고딕 Semilight" panose="020B0502040204020203" pitchFamily="50" charset="-127"/>
-              </a:rPr>
-              <a:t>데이터는 불규칙하지만</a:t>
-            </a:r>
-            <a:r>
-              <a:rPr lang="en-US" altLang="ko-KR" dirty="0">
-                <a:latin typeface="맑은 고딕 Semilight" panose="020B0502040204020203" pitchFamily="50" charset="-127"/>
-                <a:ea typeface="맑은 고딕 Semilight" panose="020B0502040204020203" pitchFamily="50" charset="-127"/>
-                <a:cs typeface="맑은 고딕 Semilight" panose="020B0502040204020203" pitchFamily="50" charset="-127"/>
-              </a:rPr>
-              <a:t>, </a:t>
-            </a:r>
-            <a:r>
-              <a:rPr lang="ko-KR" altLang="en-US" dirty="0">
-                <a:latin typeface="맑은 고딕 Semilight" panose="020B0502040204020203" pitchFamily="50" charset="-127"/>
-                <a:ea typeface="맑은 고딕 Semilight" panose="020B0502040204020203" pitchFamily="50" charset="-127"/>
-                <a:cs typeface="맑은 고딕 Semilight" panose="020B0502040204020203" pitchFamily="50" charset="-127"/>
-              </a:rPr>
-              <a:t>평균은 예측 가능하다 → 그래서 학습이 가능하다</a:t>
-            </a:r>
-            <a:r>
-              <a:rPr lang="en-US" altLang="ko-KR" dirty="0">
-                <a:latin typeface="맑은 고딕 Semilight" panose="020B0502040204020203" pitchFamily="50" charset="-127"/>
-                <a:ea typeface="맑은 고딕 Semilight" panose="020B0502040204020203" pitchFamily="50" charset="-127"/>
-                <a:cs typeface="맑은 고딕 Semilight" panose="020B0502040204020203" pitchFamily="50" charset="-127"/>
-              </a:rPr>
-              <a:t>)</a:t>
-            </a:r>
-            <a:r>
-              <a:rPr lang="ko-KR" altLang="en-US" dirty="0">
-                <a:latin typeface="맑은 고딕 Semilight" panose="020B0502040204020203" pitchFamily="50" charset="-127"/>
-                <a:ea typeface="맑은 고딕 Semilight" panose="020B0502040204020203" pitchFamily="50" charset="-127"/>
-                <a:cs typeface="맑은 고딕 Semilight" panose="020B0502040204020203" pitchFamily="50" charset="-127"/>
-              </a:rPr>
-              <a:t>가 </a:t>
-            </a:r>
-            <a:r>
-              <a:rPr lang="ko-KR" altLang="en-US" dirty="0" err="1">
-                <a:latin typeface="맑은 고딕 Semilight" panose="020B0502040204020203" pitchFamily="50" charset="-127"/>
-                <a:ea typeface="맑은 고딕 Semilight" panose="020B0502040204020203" pitchFamily="50" charset="-127"/>
-                <a:cs typeface="맑은 고딕 Semilight" panose="020B0502040204020203" pitchFamily="50" charset="-127"/>
-              </a:rPr>
-              <a:t>머신러닝에</a:t>
-            </a:r>
-            <a:r>
-              <a:rPr lang="ko-KR" altLang="en-US" dirty="0">
-                <a:latin typeface="맑은 고딕 Semilight" panose="020B0502040204020203" pitchFamily="50" charset="-127"/>
-                <a:ea typeface="맑은 고딕 Semilight" panose="020B0502040204020203" pitchFamily="50" charset="-127"/>
-                <a:cs typeface="맑은 고딕 Semilight" panose="020B0502040204020203" pitchFamily="50" charset="-127"/>
-              </a:rPr>
-              <a:t> 접목하는 내용을 모의실험으로 파이썬 코드로 제시하라</a:t>
-            </a:r>
-            <a:endParaRPr lang="en-US" altLang="ko-KR" dirty="0">
-              <a:latin typeface="맑은 고딕 Semilight" panose="020B0502040204020203" pitchFamily="50" charset="-127"/>
-              <a:ea typeface="맑은 고딕 Semilight" panose="020B0502040204020203" pitchFamily="50" charset="-127"/>
-              <a:cs typeface="맑은 고딕 Semilight" panose="020B0502040204020203" pitchFamily="50" charset="-127"/>
-            </a:endParaRPr>
           </a:p>
         </p:txBody>
       </p:sp>
       <p:pic>
         <p:nvPicPr>
-          <p:cNvPr id="3" name="Picture 2" descr="한 여자가 노트북 컴퓨터에 타이핑을 하고 있다">
+          <p:cNvPr id="1026" name="Picture 2">
             <a:extLst>
               <a:ext uri="{FF2B5EF4-FFF2-40B4-BE49-F238E27FC236}">
-                <a16:creationId xmlns:a16="http://schemas.microsoft.com/office/drawing/2014/main" id="{B4F85ED7-5D0C-B6EA-688D-04551BD9D5C9}"/>
+                <a16:creationId xmlns:a16="http://schemas.microsoft.com/office/drawing/2014/main" id="{66A96551-6CD7-9DE7-087B-11A115B1C22B}"/>
               </a:ext>
             </a:extLst>
           </p:cNvPr>
@@ -21120,7 +20630,7 @@
           <p:nvPr/>
         </p:nvPicPr>
         <p:blipFill>
-          <a:blip r:embed="rId3" cstate="print">
+          <a:blip r:embed="rId3">
             <a:extLst>
               <a:ext uri="{28A0092B-C50C-407E-A947-70E740481C1C}">
                 <a14:useLocalDpi xmlns:a14="http://schemas.microsoft.com/office/drawing/2010/main" val="0"/>
@@ -21134,8 +20644,8 @@
         </p:blipFill>
         <p:spPr bwMode="auto">
           <a:xfrm>
-            <a:off x="9869489" y="66676"/>
-            <a:ext cx="2152650" cy="1424329"/>
+            <a:off x="802171" y="3634206"/>
+            <a:ext cx="3721378" cy="2899706"/>
           </a:xfrm>
           <a:prstGeom prst="rect">
             <a:avLst/>
@@ -21152,10 +20662,261 @@
           </a:extLst>
         </p:spPr>
       </p:pic>
+      <p:sp>
+        <p:nvSpPr>
+          <p:cNvPr id="5" name="TextBox 4">
+            <a:extLst>
+              <a:ext uri="{FF2B5EF4-FFF2-40B4-BE49-F238E27FC236}">
+                <a16:creationId xmlns:a16="http://schemas.microsoft.com/office/drawing/2014/main" id="{92D6731E-3482-342B-4CF9-362C40D676CA}"/>
+              </a:ext>
+            </a:extLst>
+          </p:cNvPr>
+          <p:cNvSpPr txBox="1"/>
+          <p:nvPr/>
+        </p:nvSpPr>
+        <p:spPr>
+          <a:xfrm>
+            <a:off x="730163" y="2894037"/>
+            <a:ext cx="3721378" cy="718145"/>
+          </a:xfrm>
+          <a:prstGeom prst="rect">
+            <a:avLst/>
+          </a:prstGeom>
+          <a:noFill/>
+        </p:spPr>
+        <p:txBody>
+          <a:bodyPr wrap="square">
+            <a:spAutoFit/>
+          </a:bodyPr>
+          <a:lstStyle/>
+          <a:p>
+            <a:pPr>
+              <a:lnSpc>
+                <a:spcPts val="1575"/>
+              </a:lnSpc>
+            </a:pPr>
+            <a:r>
+              <a:rPr lang="en-US" altLang="ko-KR" sz="1400" dirty="0">
+                <a:latin typeface="Arial Narrow" panose="020B0606020202030204" pitchFamily="34" charset="0"/>
+              </a:rPr>
+              <a:t>X = </a:t>
+            </a:r>
+            <a:r>
+              <a:rPr lang="en-US" altLang="ko-KR" sz="1400" dirty="0" err="1">
+                <a:latin typeface="Arial Narrow" panose="020B0606020202030204" pitchFamily="34" charset="0"/>
+              </a:rPr>
+              <a:t>np.random.randn</a:t>
+            </a:r>
+            <a:r>
+              <a:rPr lang="en-US" altLang="ko-KR" sz="1400" dirty="0">
+                <a:latin typeface="Arial Narrow" panose="020B0606020202030204" pitchFamily="34" charset="0"/>
+              </a:rPr>
+              <a:t>(10000, 1)</a:t>
+            </a:r>
+          </a:p>
+          <a:p>
+            <a:pPr>
+              <a:lnSpc>
+                <a:spcPts val="1575"/>
+              </a:lnSpc>
+            </a:pPr>
+            <a:r>
+              <a:rPr lang="en-US" altLang="ko-KR" sz="1400" dirty="0" err="1">
+                <a:latin typeface="Arial Narrow" panose="020B0606020202030204" pitchFamily="34" charset="0"/>
+              </a:rPr>
+              <a:t>true_w</a:t>
+            </a:r>
+            <a:r>
+              <a:rPr lang="en-US" altLang="ko-KR" sz="1400" dirty="0">
+                <a:latin typeface="Arial Narrow" panose="020B0606020202030204" pitchFamily="34" charset="0"/>
+              </a:rPr>
+              <a:t> = 2.0</a:t>
+            </a:r>
+          </a:p>
+          <a:p>
+            <a:pPr>
+              <a:lnSpc>
+                <a:spcPts val="1575"/>
+              </a:lnSpc>
+            </a:pPr>
+            <a:r>
+              <a:rPr lang="en-US" altLang="ko-KR" sz="1400" dirty="0">
+                <a:latin typeface="Arial Narrow" panose="020B0606020202030204" pitchFamily="34" charset="0"/>
+              </a:rPr>
+              <a:t>y = </a:t>
+            </a:r>
+            <a:r>
+              <a:rPr lang="en-US" altLang="ko-KR" sz="1400" dirty="0" err="1">
+                <a:latin typeface="Arial Narrow" panose="020B0606020202030204" pitchFamily="34" charset="0"/>
+              </a:rPr>
+              <a:t>true_w</a:t>
+            </a:r>
+            <a:r>
+              <a:rPr lang="en-US" altLang="ko-KR" sz="1400" dirty="0">
+                <a:latin typeface="Arial Narrow" panose="020B0606020202030204" pitchFamily="34" charset="0"/>
+              </a:rPr>
+              <a:t> * X + </a:t>
+            </a:r>
+            <a:r>
+              <a:rPr lang="en-US" altLang="ko-KR" sz="1400" dirty="0" err="1">
+                <a:latin typeface="Arial Narrow" panose="020B0606020202030204" pitchFamily="34" charset="0"/>
+              </a:rPr>
+              <a:t>np.random.randn</a:t>
+            </a:r>
+            <a:r>
+              <a:rPr lang="en-US" altLang="ko-KR" sz="1400" dirty="0">
+                <a:latin typeface="Arial Narrow" panose="020B0606020202030204" pitchFamily="34" charset="0"/>
+              </a:rPr>
+              <a:t>(10000, 1) * 0.5</a:t>
+            </a:r>
+          </a:p>
+        </p:txBody>
+      </p:sp>
+      <p:pic>
+        <p:nvPicPr>
+          <p:cNvPr id="1030" name="Picture 6">
+            <a:extLst>
+              <a:ext uri="{FF2B5EF4-FFF2-40B4-BE49-F238E27FC236}">
+                <a16:creationId xmlns:a16="http://schemas.microsoft.com/office/drawing/2014/main" id="{604A6947-78A3-C7CA-2B50-5D00DD4F3DDD}"/>
+              </a:ext>
+            </a:extLst>
+          </p:cNvPr>
+          <p:cNvPicPr>
+            <a:picLocks noChangeAspect="1" noChangeArrowheads="1"/>
+          </p:cNvPicPr>
+          <p:nvPr/>
+        </p:nvPicPr>
+        <p:blipFill>
+          <a:blip r:embed="rId4" cstate="print">
+            <a:extLst>
+              <a:ext uri="{28A0092B-C50C-407E-A947-70E740481C1C}">
+                <a14:useLocalDpi xmlns:a14="http://schemas.microsoft.com/office/drawing/2010/main" val="0"/>
+              </a:ext>
+            </a:extLst>
+          </a:blip>
+          <a:srcRect/>
+          <a:stretch>
+            <a:fillRect/>
+          </a:stretch>
+        </p:blipFill>
+        <p:spPr bwMode="auto">
+          <a:xfrm>
+            <a:off x="5309584" y="2469173"/>
+            <a:ext cx="5832647" cy="1919654"/>
+          </a:xfrm>
+          <a:prstGeom prst="rect">
+            <a:avLst/>
+          </a:prstGeom>
+          <a:noFill/>
+          <a:extLst>
+            <a:ext uri="{909E8E84-426E-40DD-AFC4-6F175D3DCCD1}">
+              <a14:hiddenFill xmlns:a14="http://schemas.microsoft.com/office/drawing/2010/main">
+                <a:solidFill>
+                  <a:srgbClr val="FFFFFF"/>
+                </a:solidFill>
+              </a14:hiddenFill>
+            </a:ext>
+          </a:extLst>
+        </p:spPr>
+      </p:pic>
+      <p:pic>
+        <p:nvPicPr>
+          <p:cNvPr id="1032" name="Picture 8">
+            <a:extLst>
+              <a:ext uri="{FF2B5EF4-FFF2-40B4-BE49-F238E27FC236}">
+                <a16:creationId xmlns:a16="http://schemas.microsoft.com/office/drawing/2014/main" id="{0AC33CC4-6C35-C6FD-C03A-DFEEFB9013D3}"/>
+              </a:ext>
+            </a:extLst>
+          </p:cNvPr>
+          <p:cNvPicPr>
+            <a:picLocks noChangeAspect="1" noChangeArrowheads="1"/>
+          </p:cNvPicPr>
+          <p:nvPr/>
+        </p:nvPicPr>
+        <p:blipFill>
+          <a:blip r:embed="rId5" cstate="print">
+            <a:extLst>
+              <a:ext uri="{28A0092B-C50C-407E-A947-70E740481C1C}">
+                <a14:useLocalDpi xmlns:a14="http://schemas.microsoft.com/office/drawing/2010/main" val="0"/>
+              </a:ext>
+            </a:extLst>
+          </a:blip>
+          <a:srcRect/>
+          <a:stretch>
+            <a:fillRect/>
+          </a:stretch>
+        </p:blipFill>
+        <p:spPr bwMode="auto">
+          <a:xfrm>
+            <a:off x="5303913" y="4701422"/>
+            <a:ext cx="5832647" cy="1919653"/>
+          </a:xfrm>
+          <a:prstGeom prst="rect">
+            <a:avLst/>
+          </a:prstGeom>
+          <a:noFill/>
+          <a:extLst>
+            <a:ext uri="{909E8E84-426E-40DD-AFC4-6F175D3DCCD1}">
+              <a14:hiddenFill xmlns:a14="http://schemas.microsoft.com/office/drawing/2010/main">
+                <a:solidFill>
+                  <a:srgbClr val="FFFFFF"/>
+                </a:solidFill>
+              </a14:hiddenFill>
+            </a:ext>
+          </a:extLst>
+        </p:spPr>
+      </p:pic>
+      <p:pic>
+        <p:nvPicPr>
+          <p:cNvPr id="3" name="Picture 2" descr="한 여자가 노트북 컴퓨터에 타이핑을 하고 있다">
+            <a:extLst>
+              <a:ext uri="{FF2B5EF4-FFF2-40B4-BE49-F238E27FC236}">
+                <a16:creationId xmlns:a16="http://schemas.microsoft.com/office/drawing/2014/main" id="{1C0F150E-B972-291C-98C5-D1154ED29818}"/>
+              </a:ext>
+            </a:extLst>
+          </p:cNvPr>
+          <p:cNvPicPr>
+            <a:picLocks noChangeAspect="1" noChangeArrowheads="1"/>
+          </p:cNvPicPr>
+          <p:nvPr/>
+        </p:nvPicPr>
+        <p:blipFill>
+          <a:blip r:embed="rId6" cstate="print">
+            <a:extLst>
+              <a:ext uri="{28A0092B-C50C-407E-A947-70E740481C1C}">
+                <a14:useLocalDpi xmlns:a14="http://schemas.microsoft.com/office/drawing/2010/main" val="0"/>
+              </a:ext>
+            </a:extLst>
+          </a:blip>
+          <a:srcRect/>
+          <a:stretch>
+            <a:fillRect/>
+          </a:stretch>
+        </p:blipFill>
+        <p:spPr bwMode="auto">
+          <a:xfrm>
+            <a:off x="9869489" y="66676"/>
+            <a:ext cx="2152650" cy="1424329"/>
+          </a:xfrm>
+          <a:prstGeom prst="rect">
+            <a:avLst/>
+          </a:prstGeom>
+          <a:noFill/>
+          <a:extLst>
+            <a:ext uri="{909E8E84-426E-40DD-AFC4-6F175D3DCCD1}">
+              <a14:hiddenFill xmlns:a14="http://schemas.microsoft.com/office/drawing/2010/main">
+                <a:solidFill>
+                  <a:srgbClr val="FFFFFF"/>
+                </a:solidFill>
+              </a14:hiddenFill>
+            </a:ext>
+          </a:extLst>
+        </p:spPr>
+      </p:pic>
     </p:spTree>
     <p:extLst>
       <p:ext uri="{BB962C8B-B14F-4D97-AF65-F5344CB8AC3E}">
-        <p14:creationId xmlns:p14="http://schemas.microsoft.com/office/powerpoint/2010/main" val="2559646205"/>
+        <p14:creationId xmlns:p14="http://schemas.microsoft.com/office/powerpoint/2010/main" val="2060882861"/>
       </p:ext>
     </p:extLst>
   </p:cSld>
@@ -21678,6 +21439,767 @@
         <p:cNvPr id="1" name="">
           <a:extLst>
             <a:ext uri="{FF2B5EF4-FFF2-40B4-BE49-F238E27FC236}">
+              <a16:creationId xmlns:a16="http://schemas.microsoft.com/office/drawing/2014/main" id="{014016E6-4DF5-97F6-9486-23E46F5C4A36}"/>
+            </a:ext>
+          </a:extLst>
+        </p:cNvPr>
+        <p:cNvGrpSpPr/>
+        <p:nvPr/>
+      </p:nvGrpSpPr>
+      <p:grpSpPr>
+        <a:xfrm>
+          <a:off x="0" y="0"/>
+          <a:ext cx="0" cy="0"/>
+          <a:chOff x="0" y="0"/>
+          <a:chExt cx="0" cy="0"/>
+        </a:xfrm>
+      </p:grpSpPr>
+      <p:sp>
+        <p:nvSpPr>
+          <p:cNvPr id="2" name="슬라이드 번호 개체 틀 1">
+            <a:extLst>
+              <a:ext uri="{FF2B5EF4-FFF2-40B4-BE49-F238E27FC236}">
+                <a16:creationId xmlns:a16="http://schemas.microsoft.com/office/drawing/2014/main" id="{A39D4B50-D754-79A0-CD51-823002DF348F}"/>
+              </a:ext>
+            </a:extLst>
+          </p:cNvPr>
+          <p:cNvSpPr>
+            <a:spLocks noGrp="1"/>
+          </p:cNvSpPr>
+          <p:nvPr>
+            <p:ph type="sldNum" sz="quarter" idx="12"/>
+          </p:nvPr>
+        </p:nvSpPr>
+        <p:spPr/>
+        <p:txBody>
+          <a:bodyPr/>
+          <a:lstStyle/>
+          <a:p>
+            <a:pPr rtl="0"/>
+            <a:fld id="{A3F31473-23EB-4724-8B59-FE6D21D89FA4}" type="slidenum">
+              <a:rPr lang="en-US" altLang="ko-KR" noProof="0" smtClean="0"/>
+              <a:t>30</a:t>
+            </a:fld>
+            <a:endParaRPr lang="en-US" altLang="ko-KR" noProof="0" dirty="0"/>
+          </a:p>
+        </p:txBody>
+      </p:sp>
+      <p:sp>
+        <p:nvSpPr>
+          <p:cNvPr id="4" name="TextBox 3">
+            <a:extLst>
+              <a:ext uri="{FF2B5EF4-FFF2-40B4-BE49-F238E27FC236}">
+                <a16:creationId xmlns:a16="http://schemas.microsoft.com/office/drawing/2014/main" id="{6843735A-526C-E0D0-66F8-62A3BD4EC82F}"/>
+              </a:ext>
+            </a:extLst>
+          </p:cNvPr>
+          <p:cNvSpPr txBox="1"/>
+          <p:nvPr/>
+        </p:nvSpPr>
+        <p:spPr>
+          <a:xfrm>
+            <a:off x="551384" y="2916953"/>
+            <a:ext cx="11377264" cy="3184013"/>
+          </a:xfrm>
+          <a:prstGeom prst="rect">
+            <a:avLst/>
+          </a:prstGeom>
+          <a:solidFill>
+            <a:schemeClr val="bg1">
+              <a:lumMod val="95000"/>
+            </a:schemeClr>
+          </a:solidFill>
+        </p:spPr>
+        <p:txBody>
+          <a:bodyPr wrap="square" rtlCol="0">
+            <a:spAutoFit/>
+          </a:bodyPr>
+          <a:lstStyle/>
+          <a:p>
+            <a:pPr marL="285750" indent="-285750">
+              <a:lnSpc>
+                <a:spcPct val="150000"/>
+              </a:lnSpc>
+              <a:buFont typeface="Wingdings" panose="05000000000000000000" pitchFamily="2" charset="2"/>
+              <a:buChar char="v"/>
+            </a:pPr>
+            <a:r>
+              <a:rPr lang="ko-KR" altLang="en-US" sz="1600" dirty="0">
+                <a:latin typeface="맑은 고딕 Semilight" panose="020B0502040204020203" pitchFamily="50" charset="-127"/>
+                <a:ea typeface="맑은 고딕 Semilight" panose="020B0502040204020203" pitchFamily="50" charset="-127"/>
+                <a:cs typeface="맑은 고딕 Semilight" panose="020B0502040204020203" pitchFamily="50" charset="-127"/>
+              </a:rPr>
+              <a:t>모델 학습의 안정성 확보”</a:t>
+            </a:r>
+            <a:endParaRPr lang="en-US" altLang="ko-KR" sz="1600" dirty="0">
+              <a:latin typeface="맑은 고딕 Semilight" panose="020B0502040204020203" pitchFamily="50" charset="-127"/>
+              <a:ea typeface="맑은 고딕 Semilight" panose="020B0502040204020203" pitchFamily="50" charset="-127"/>
+              <a:cs typeface="맑은 고딕 Semilight" panose="020B0502040204020203" pitchFamily="50" charset="-127"/>
+            </a:endParaRPr>
+          </a:p>
+          <a:p>
+            <a:pPr marL="742950" lvl="1" indent="-285750">
+              <a:lnSpc>
+                <a:spcPct val="150000"/>
+              </a:lnSpc>
+              <a:buFont typeface="Wingdings" panose="05000000000000000000" pitchFamily="2" charset="2"/>
+              <a:buChar char="v"/>
+            </a:pPr>
+            <a:r>
+              <a:rPr lang="en-US" altLang="ko-KR" sz="1400" dirty="0">
+                <a:latin typeface="맑은 고딕 Semilight" panose="020B0502040204020203" pitchFamily="50" charset="-127"/>
+                <a:ea typeface="맑은 고딕 Semilight" panose="020B0502040204020203" pitchFamily="50" charset="-127"/>
+                <a:cs typeface="맑은 고딕 Semilight" panose="020B0502040204020203" pitchFamily="50" charset="-127"/>
+              </a:rPr>
+              <a:t>MSE , Cross-Entropy, Log-loss </a:t>
+            </a:r>
+            <a:endParaRPr lang="en-US" altLang="ko-KR" sz="1600" dirty="0">
+              <a:latin typeface="맑은 고딕 Semilight" panose="020B0502040204020203" pitchFamily="50" charset="-127"/>
+              <a:ea typeface="맑은 고딕 Semilight" panose="020B0502040204020203" pitchFamily="50" charset="-127"/>
+              <a:cs typeface="맑은 고딕 Semilight" panose="020B0502040204020203" pitchFamily="50" charset="-127"/>
+            </a:endParaRPr>
+          </a:p>
+          <a:p>
+            <a:pPr marL="285750" indent="-285750">
+              <a:lnSpc>
+                <a:spcPct val="150000"/>
+              </a:lnSpc>
+              <a:buFont typeface="Wingdings" panose="05000000000000000000" pitchFamily="2" charset="2"/>
+              <a:buChar char="v"/>
+            </a:pPr>
+            <a:r>
+              <a:rPr lang="en-US" altLang="ko-KR" sz="1600" dirty="0">
+                <a:latin typeface="맑은 고딕 Semilight" panose="020B0502040204020203" pitchFamily="50" charset="-127"/>
+                <a:ea typeface="맑은 고딕 Semilight" panose="020B0502040204020203" pitchFamily="50" charset="-127"/>
+                <a:cs typeface="맑은 고딕 Semilight" panose="020B0502040204020203" pitchFamily="50" charset="-127"/>
+              </a:rPr>
+              <a:t>Mini-batch </a:t>
+            </a:r>
+            <a:r>
+              <a:rPr lang="ko-KR" altLang="en-US" sz="1600" dirty="0">
+                <a:latin typeface="맑은 고딕 Semilight" panose="020B0502040204020203" pitchFamily="50" charset="-127"/>
+                <a:ea typeface="맑은 고딕 Semilight" panose="020B0502040204020203" pitchFamily="50" charset="-127"/>
+                <a:cs typeface="맑은 고딕 Semilight" panose="020B0502040204020203" pitchFamily="50" charset="-127"/>
+              </a:rPr>
+              <a:t>학습이 가능한 이유”</a:t>
+            </a:r>
+            <a:endParaRPr lang="en-US" altLang="ko-KR" sz="1600" dirty="0">
+              <a:latin typeface="맑은 고딕 Semilight" panose="020B0502040204020203" pitchFamily="50" charset="-127"/>
+              <a:ea typeface="맑은 고딕 Semilight" panose="020B0502040204020203" pitchFamily="50" charset="-127"/>
+              <a:cs typeface="맑은 고딕 Semilight" panose="020B0502040204020203" pitchFamily="50" charset="-127"/>
+            </a:endParaRPr>
+          </a:p>
+          <a:p>
+            <a:pPr marL="742950" lvl="1" indent="-285750">
+              <a:lnSpc>
+                <a:spcPct val="150000"/>
+              </a:lnSpc>
+              <a:buFont typeface="Wingdings" panose="05000000000000000000" pitchFamily="2" charset="2"/>
+              <a:buChar char="v"/>
+            </a:pPr>
+            <a:r>
+              <a:rPr lang="en-US" altLang="ko-KR" sz="1400" dirty="0">
+                <a:latin typeface="맑은 고딕 Semilight" panose="020B0502040204020203" pitchFamily="50" charset="-127"/>
+                <a:ea typeface="맑은 고딕 Semilight" panose="020B0502040204020203" pitchFamily="50" charset="-127"/>
+                <a:cs typeface="맑은 고딕 Semilight" panose="020B0502040204020203" pitchFamily="50" charset="-127"/>
+              </a:rPr>
+              <a:t>Mini-batch = </a:t>
+            </a:r>
+            <a:r>
+              <a:rPr lang="ko-KR" altLang="en-US" sz="1400" dirty="0">
+                <a:latin typeface="맑은 고딕 Semilight" panose="020B0502040204020203" pitchFamily="50" charset="-127"/>
+                <a:ea typeface="맑은 고딕 Semilight" panose="020B0502040204020203" pitchFamily="50" charset="-127"/>
+                <a:cs typeface="맑은 고딕 Semilight" panose="020B0502040204020203" pitchFamily="50" charset="-127"/>
+              </a:rPr>
+              <a:t>작은 샘플 평균</a:t>
+            </a:r>
+            <a:r>
+              <a:rPr lang="en-US" altLang="ko-KR" sz="1400" dirty="0">
+                <a:latin typeface="맑은 고딕 Semilight" panose="020B0502040204020203" pitchFamily="50" charset="-127"/>
+                <a:ea typeface="맑은 고딕 Semilight" panose="020B0502040204020203" pitchFamily="50" charset="-127"/>
+                <a:cs typeface="맑은 고딕 Semilight" panose="020B0502040204020203" pitchFamily="50" charset="-127"/>
+              </a:rPr>
+              <a:t>, CLT</a:t>
+            </a:r>
+            <a:r>
+              <a:rPr lang="ko-KR" altLang="en-US" sz="1400" dirty="0">
+                <a:latin typeface="맑은 고딕 Semilight" panose="020B0502040204020203" pitchFamily="50" charset="-127"/>
+                <a:ea typeface="맑은 고딕 Semilight" panose="020B0502040204020203" pitchFamily="50" charset="-127"/>
+                <a:cs typeface="맑은 고딕 Semilight" panose="020B0502040204020203" pitchFamily="50" charset="-127"/>
+              </a:rPr>
+              <a:t>없이는 </a:t>
+            </a:r>
+            <a:r>
+              <a:rPr lang="en-US" altLang="ko-KR" sz="1400" dirty="0">
+                <a:latin typeface="맑은 고딕 Semilight" panose="020B0502040204020203" pitchFamily="50" charset="-127"/>
+                <a:ea typeface="맑은 고딕 Semilight" panose="020B0502040204020203" pitchFamily="50" charset="-127"/>
+                <a:cs typeface="맑은 고딕 Semilight" panose="020B0502040204020203" pitchFamily="50" charset="-127"/>
+              </a:rPr>
+              <a:t>mini</a:t>
+            </a:r>
+            <a:r>
+              <a:rPr lang="ko-KR" altLang="en-US" sz="1400" dirty="0">
+                <a:latin typeface="맑은 고딕 Semilight" panose="020B0502040204020203" pitchFamily="50" charset="-127"/>
+                <a:ea typeface="맑은 고딕 Semilight" panose="020B0502040204020203" pitchFamily="50" charset="-127"/>
+                <a:cs typeface="맑은 고딕 Semilight" panose="020B0502040204020203" pitchFamily="50" charset="-127"/>
+              </a:rPr>
+              <a:t> </a:t>
+            </a:r>
+            <a:r>
+              <a:rPr lang="en-US" altLang="ko-KR" sz="1400" dirty="0">
+                <a:latin typeface="맑은 고딕 Semilight" panose="020B0502040204020203" pitchFamily="50" charset="-127"/>
+                <a:ea typeface="맑은 고딕 Semilight" panose="020B0502040204020203" pitchFamily="50" charset="-127"/>
+                <a:cs typeface="맑은 고딕 Semilight" panose="020B0502040204020203" pitchFamily="50" charset="-127"/>
+              </a:rPr>
+              <a:t>batch </a:t>
+            </a:r>
+            <a:r>
+              <a:rPr lang="ko-KR" altLang="en-US" sz="1400" dirty="0">
+                <a:latin typeface="맑은 고딕 Semilight" panose="020B0502040204020203" pitchFamily="50" charset="-127"/>
+                <a:ea typeface="맑은 고딕 Semilight" panose="020B0502040204020203" pitchFamily="50" charset="-127"/>
+                <a:cs typeface="맑은 고딕 Semilight" panose="020B0502040204020203" pitchFamily="50" charset="-127"/>
+              </a:rPr>
+              <a:t>도 없음</a:t>
+            </a:r>
+            <a:endParaRPr lang="en-US" altLang="ko-KR" sz="1600" dirty="0">
+              <a:latin typeface="맑은 고딕 Semilight" panose="020B0502040204020203" pitchFamily="50" charset="-127"/>
+              <a:ea typeface="맑은 고딕 Semilight" panose="020B0502040204020203" pitchFamily="50" charset="-127"/>
+              <a:cs typeface="맑은 고딕 Semilight" panose="020B0502040204020203" pitchFamily="50" charset="-127"/>
+            </a:endParaRPr>
+          </a:p>
+          <a:p>
+            <a:pPr marL="285750" indent="-285750">
+              <a:lnSpc>
+                <a:spcPct val="150000"/>
+              </a:lnSpc>
+              <a:buFont typeface="Wingdings" panose="05000000000000000000" pitchFamily="2" charset="2"/>
+              <a:buChar char="v"/>
+            </a:pPr>
+            <a:r>
+              <a:rPr lang="ko-KR" altLang="en-US" sz="1600" dirty="0">
+                <a:latin typeface="맑은 고딕 Semilight" panose="020B0502040204020203" pitchFamily="50" charset="-127"/>
+                <a:ea typeface="맑은 고딕 Semilight" panose="020B0502040204020203" pitchFamily="50" charset="-127"/>
+                <a:cs typeface="맑은 고딕 Semilight" panose="020B0502040204020203" pitchFamily="50" charset="-127"/>
+              </a:rPr>
+              <a:t>교차검증을 통한 모델의 평가</a:t>
+            </a:r>
+            <a:endParaRPr lang="en-US" altLang="ko-KR" sz="1600" dirty="0">
+              <a:latin typeface="맑은 고딕 Semilight" panose="020B0502040204020203" pitchFamily="50" charset="-127"/>
+              <a:ea typeface="맑은 고딕 Semilight" panose="020B0502040204020203" pitchFamily="50" charset="-127"/>
+              <a:cs typeface="맑은 고딕 Semilight" panose="020B0502040204020203" pitchFamily="50" charset="-127"/>
+            </a:endParaRPr>
+          </a:p>
+          <a:p>
+            <a:pPr marL="742950" lvl="1" indent="-285750">
+              <a:lnSpc>
+                <a:spcPct val="150000"/>
+              </a:lnSpc>
+              <a:buFont typeface="Wingdings" panose="05000000000000000000" pitchFamily="2" charset="2"/>
+              <a:buChar char="v"/>
+            </a:pPr>
+            <a:r>
+              <a:rPr lang="ko-KR" altLang="en-US" sz="1400" dirty="0">
+                <a:latin typeface="맑은 고딕 Semilight" panose="020B0502040204020203" pitchFamily="50" charset="-127"/>
+                <a:ea typeface="맑은 고딕 Semilight" panose="020B0502040204020203" pitchFamily="50" charset="-127"/>
+                <a:cs typeface="맑은 고딕 Semilight" panose="020B0502040204020203" pitchFamily="50" charset="-127"/>
+              </a:rPr>
+              <a:t>평균 </a:t>
+            </a:r>
+            <a:r>
+              <a:rPr lang="en-US" altLang="ko-KR" sz="1400" dirty="0">
+                <a:latin typeface="맑은 고딕 Semilight" panose="020B0502040204020203" pitchFamily="50" charset="-127"/>
+                <a:ea typeface="맑은 고딕 Semilight" panose="020B0502040204020203" pitchFamily="50" charset="-127"/>
+                <a:cs typeface="맑은 고딕 Semilight" panose="020B0502040204020203" pitchFamily="50" charset="-127"/>
+              </a:rPr>
+              <a:t>accuracy/loss, </a:t>
+            </a:r>
+            <a:r>
+              <a:rPr lang="ko-KR" altLang="en-US" sz="1400" dirty="0">
+                <a:latin typeface="맑은 고딕 Semilight" panose="020B0502040204020203" pitchFamily="50" charset="-127"/>
+                <a:ea typeface="맑은 고딕 Semilight" panose="020B0502040204020203" pitchFamily="50" charset="-127"/>
+                <a:cs typeface="맑은 고딕 Semilight" panose="020B0502040204020203" pitchFamily="50" charset="-127"/>
+              </a:rPr>
+              <a:t>교차검증 평균 등 </a:t>
+            </a:r>
+            <a:r>
+              <a:rPr lang="en-US" altLang="ko-KR" sz="1400" dirty="0">
+                <a:latin typeface="맑은 고딕 Semilight" panose="020B0502040204020203" pitchFamily="50" charset="-127"/>
+                <a:ea typeface="맑은 고딕 Semilight" panose="020B0502040204020203" pitchFamily="50" charset="-127"/>
+                <a:cs typeface="맑은 고딕 Semilight" panose="020B0502040204020203" pitchFamily="50" charset="-127"/>
+              </a:rPr>
+              <a:t>CLT </a:t>
+            </a:r>
+            <a:r>
+              <a:rPr lang="ko-KR" altLang="en-US" sz="1400" dirty="0">
+                <a:latin typeface="맑은 고딕 Semilight" panose="020B0502040204020203" pitchFamily="50" charset="-127"/>
+                <a:ea typeface="맑은 고딕 Semilight" panose="020B0502040204020203" pitchFamily="50" charset="-127"/>
+                <a:cs typeface="맑은 고딕 Semilight" panose="020B0502040204020203" pitchFamily="50" charset="-127"/>
+              </a:rPr>
+              <a:t>적용으로 이  평균들은 → 정규분포 근사</a:t>
+            </a:r>
+            <a:r>
+              <a:rPr lang="en-US" altLang="ko-KR" sz="1400" dirty="0">
+                <a:latin typeface="맑은 고딕 Semilight" panose="020B0502040204020203" pitchFamily="50" charset="-127"/>
+                <a:ea typeface="맑은 고딕 Semilight" panose="020B0502040204020203" pitchFamily="50" charset="-127"/>
+                <a:cs typeface="맑은 고딕 Semilight" panose="020B0502040204020203" pitchFamily="50" charset="-127"/>
+              </a:rPr>
+              <a:t> </a:t>
+            </a:r>
+            <a:r>
+              <a:rPr lang="ko-KR" altLang="en-US" sz="1400" dirty="0">
+                <a:latin typeface="맑은 고딕 Semilight" panose="020B0502040204020203" pitchFamily="50" charset="-127"/>
+                <a:ea typeface="맑은 고딕 Semilight" panose="020B0502040204020203" pitchFamily="50" charset="-127"/>
+                <a:cs typeface="맑은 고딕 Semilight" panose="020B0502040204020203" pitchFamily="50" charset="-127"/>
+              </a:rPr>
+              <a:t>→ 신뢰구간</a:t>
+            </a:r>
+            <a:r>
+              <a:rPr lang="en-US" altLang="ko-KR" sz="1400" dirty="0">
+                <a:latin typeface="맑은 고딕 Semilight" panose="020B0502040204020203" pitchFamily="50" charset="-127"/>
+                <a:ea typeface="맑은 고딕 Semilight" panose="020B0502040204020203" pitchFamily="50" charset="-127"/>
+                <a:cs typeface="맑은 고딕 Semilight" panose="020B0502040204020203" pitchFamily="50" charset="-127"/>
+              </a:rPr>
+              <a:t> </a:t>
+            </a:r>
+            <a:r>
+              <a:rPr lang="ko-KR" altLang="en-US" sz="1400" dirty="0">
+                <a:latin typeface="맑은 고딕 Semilight" panose="020B0502040204020203" pitchFamily="50" charset="-127"/>
+                <a:ea typeface="맑은 고딕 Semilight" panose="020B0502040204020203" pitchFamily="50" charset="-127"/>
+                <a:cs typeface="맑은 고딕 Semilight" panose="020B0502040204020203" pitchFamily="50" charset="-127"/>
+              </a:rPr>
+              <a:t>→</a:t>
+            </a:r>
+            <a:r>
+              <a:rPr lang="en-US" altLang="ko-KR" sz="1400" dirty="0">
+                <a:latin typeface="맑은 고딕 Semilight" panose="020B0502040204020203" pitchFamily="50" charset="-127"/>
+                <a:ea typeface="맑은 고딕 Semilight" panose="020B0502040204020203" pitchFamily="50" charset="-127"/>
+                <a:cs typeface="맑은 고딕 Semilight" panose="020B0502040204020203" pitchFamily="50" charset="-127"/>
+              </a:rPr>
+              <a:t> </a:t>
+            </a:r>
+            <a:r>
+              <a:rPr lang="ko-KR" altLang="en-US" sz="1400" dirty="0">
+                <a:latin typeface="맑은 고딕 Semilight" panose="020B0502040204020203" pitchFamily="50" charset="-127"/>
+                <a:ea typeface="맑은 고딕 Semilight" panose="020B0502040204020203" pitchFamily="50" charset="-127"/>
+                <a:cs typeface="맑은 고딕 Semilight" panose="020B0502040204020203" pitchFamily="50" charset="-127"/>
+              </a:rPr>
+              <a:t>통계적 비교 가능</a:t>
+            </a:r>
+            <a:endParaRPr lang="en-US" altLang="ko-KR" sz="1600" dirty="0">
+              <a:latin typeface="맑은 고딕 Semilight" panose="020B0502040204020203" pitchFamily="50" charset="-127"/>
+              <a:ea typeface="맑은 고딕 Semilight" panose="020B0502040204020203" pitchFamily="50" charset="-127"/>
+              <a:cs typeface="맑은 고딕 Semilight" panose="020B0502040204020203" pitchFamily="50" charset="-127"/>
+            </a:endParaRPr>
+          </a:p>
+          <a:p>
+            <a:pPr marL="285750" indent="-285750">
+              <a:lnSpc>
+                <a:spcPct val="150000"/>
+              </a:lnSpc>
+              <a:buFont typeface="Wingdings" panose="05000000000000000000" pitchFamily="2" charset="2"/>
+              <a:buChar char="v"/>
+            </a:pPr>
+            <a:r>
+              <a:rPr lang="en-US" altLang="ko-KR" sz="1600" dirty="0">
+                <a:latin typeface="맑은 고딕 Semilight" panose="020B0502040204020203" pitchFamily="50" charset="-127"/>
+                <a:ea typeface="맑은 고딕 Semilight" panose="020B0502040204020203" pitchFamily="50" charset="-127"/>
+                <a:cs typeface="맑은 고딕 Semilight" panose="020B0502040204020203" pitchFamily="50" charset="-127"/>
+              </a:rPr>
+              <a:t>A/B </a:t>
+            </a:r>
+            <a:r>
+              <a:rPr lang="ko-KR" altLang="en-US" sz="1600" dirty="0">
+                <a:latin typeface="맑은 고딕 Semilight" panose="020B0502040204020203" pitchFamily="50" charset="-127"/>
+                <a:ea typeface="맑은 고딕 Semilight" panose="020B0502040204020203" pitchFamily="50" charset="-127"/>
+                <a:cs typeface="맑은 고딕 Semilight" panose="020B0502040204020203" pitchFamily="50" charset="-127"/>
+              </a:rPr>
+              <a:t>테스트와 실험 설계의 핵심</a:t>
+            </a:r>
+            <a:endParaRPr lang="en-US" altLang="ko-KR" sz="1600" dirty="0">
+              <a:latin typeface="맑은 고딕 Semilight" panose="020B0502040204020203" pitchFamily="50" charset="-127"/>
+              <a:ea typeface="맑은 고딕 Semilight" panose="020B0502040204020203" pitchFamily="50" charset="-127"/>
+              <a:cs typeface="맑은 고딕 Semilight" panose="020B0502040204020203" pitchFamily="50" charset="-127"/>
+            </a:endParaRPr>
+          </a:p>
+          <a:p>
+            <a:pPr marL="742950" lvl="1" indent="-285750">
+              <a:lnSpc>
+                <a:spcPct val="150000"/>
+              </a:lnSpc>
+              <a:buFont typeface="Wingdings" panose="05000000000000000000" pitchFamily="2" charset="2"/>
+              <a:buChar char="v"/>
+            </a:pPr>
+            <a:r>
+              <a:rPr lang="ko-KR" altLang="en-US" sz="1400" dirty="0">
+                <a:latin typeface="맑은 고딕 Semilight" panose="020B0502040204020203" pitchFamily="50" charset="-127"/>
+                <a:ea typeface="맑은 고딕 Semilight" panose="020B0502040204020203" pitchFamily="50" charset="-127"/>
+                <a:cs typeface="맑은 고딕 Semilight" panose="020B0502040204020203" pitchFamily="50" charset="-127"/>
+              </a:rPr>
+              <a:t>광고 효과 비교</a:t>
+            </a:r>
+            <a:r>
+              <a:rPr lang="en-US" altLang="ko-KR" sz="1400" dirty="0">
+                <a:latin typeface="맑은 고딕 Semilight" panose="020B0502040204020203" pitchFamily="50" charset="-127"/>
+                <a:ea typeface="맑은 고딕 Semilight" panose="020B0502040204020203" pitchFamily="50" charset="-127"/>
+                <a:cs typeface="맑은 고딕 Semilight" panose="020B0502040204020203" pitchFamily="50" charset="-127"/>
+              </a:rPr>
+              <a:t>, </a:t>
+            </a:r>
+            <a:r>
+              <a:rPr lang="ko-KR" altLang="en-US" sz="1400" dirty="0">
+                <a:latin typeface="맑은 고딕 Semilight" panose="020B0502040204020203" pitchFamily="50" charset="-127"/>
+                <a:ea typeface="맑은 고딕 Semilight" panose="020B0502040204020203" pitchFamily="50" charset="-127"/>
+                <a:cs typeface="맑은 고딕 Semilight" panose="020B0502040204020203" pitchFamily="50" charset="-127"/>
+              </a:rPr>
+              <a:t>추천 알고리즘 비교</a:t>
+            </a:r>
+            <a:r>
+              <a:rPr lang="en-US" altLang="ko-KR" sz="1400" dirty="0">
+                <a:latin typeface="맑은 고딕 Semilight" panose="020B0502040204020203" pitchFamily="50" charset="-127"/>
+                <a:ea typeface="맑은 고딕 Semilight" panose="020B0502040204020203" pitchFamily="50" charset="-127"/>
+                <a:cs typeface="맑은 고딕 Semilight" panose="020B0502040204020203" pitchFamily="50" charset="-127"/>
+              </a:rPr>
+              <a:t>, UI </a:t>
+            </a:r>
+            <a:r>
+              <a:rPr lang="ko-KR" altLang="en-US" sz="1400" dirty="0">
+                <a:latin typeface="맑은 고딕 Semilight" panose="020B0502040204020203" pitchFamily="50" charset="-127"/>
+                <a:ea typeface="맑은 고딕 Semilight" panose="020B0502040204020203" pitchFamily="50" charset="-127"/>
+                <a:cs typeface="맑은 고딕 Semilight" panose="020B0502040204020203" pitchFamily="50" charset="-127"/>
+              </a:rPr>
+              <a:t>개선 효과 측정  등 전부 평균 비교 문제로 </a:t>
+            </a:r>
+            <a:r>
+              <a:rPr lang="en-US" altLang="ko-KR" sz="1400" dirty="0">
+                <a:latin typeface="맑은 고딕 Semilight" panose="020B0502040204020203" pitchFamily="50" charset="-127"/>
+                <a:ea typeface="맑은 고딕 Semilight" panose="020B0502040204020203" pitchFamily="50" charset="-127"/>
+                <a:cs typeface="맑은 고딕 Semilight" panose="020B0502040204020203" pitchFamily="50" charset="-127"/>
+              </a:rPr>
+              <a:t>CLT </a:t>
+            </a:r>
+            <a:r>
+              <a:rPr lang="ko-KR" altLang="en-US" sz="1400" dirty="0">
+                <a:latin typeface="맑은 고딕 Semilight" panose="020B0502040204020203" pitchFamily="50" charset="-127"/>
+                <a:ea typeface="맑은 고딕 Semilight" panose="020B0502040204020203" pitchFamily="50" charset="-127"/>
+                <a:cs typeface="맑은 고딕 Semilight" panose="020B0502040204020203" pitchFamily="50" charset="-127"/>
+              </a:rPr>
+              <a:t>덕분에</a:t>
+            </a:r>
+            <a:r>
+              <a:rPr lang="en-US" altLang="ko-KR" sz="1400" dirty="0">
+                <a:latin typeface="맑은 고딕 Semilight" panose="020B0502040204020203" pitchFamily="50" charset="-127"/>
+                <a:ea typeface="맑은 고딕 Semilight" panose="020B0502040204020203" pitchFamily="50" charset="-127"/>
+                <a:cs typeface="맑은 고딕 Semilight" panose="020B0502040204020203" pitchFamily="50" charset="-127"/>
+              </a:rPr>
+              <a:t> </a:t>
+            </a:r>
+            <a:r>
+              <a:rPr lang="ko-KR" altLang="en-US" sz="1400" dirty="0">
+                <a:latin typeface="맑은 고딕 Semilight" panose="020B0502040204020203" pitchFamily="50" charset="-127"/>
+                <a:ea typeface="맑은 고딕 Semilight" panose="020B0502040204020203" pitchFamily="50" charset="-127"/>
+                <a:cs typeface="맑은 고딕 Semilight" panose="020B0502040204020203" pitchFamily="50" charset="-127"/>
+              </a:rPr>
+              <a:t>두 평균 차이 → 정규분포 근사 → </a:t>
+            </a:r>
+            <a:r>
+              <a:rPr lang="en-US" altLang="ko-KR" sz="1400" dirty="0">
+                <a:latin typeface="맑은 고딕 Semilight" panose="020B0502040204020203" pitchFamily="50" charset="-127"/>
+                <a:ea typeface="맑은 고딕 Semilight" panose="020B0502040204020203" pitchFamily="50" charset="-127"/>
+                <a:cs typeface="맑은 고딕 Semilight" panose="020B0502040204020203" pitchFamily="50" charset="-127"/>
+              </a:rPr>
+              <a:t>p-value </a:t>
+            </a:r>
+            <a:r>
+              <a:rPr lang="ko-KR" altLang="en-US" sz="1400" dirty="0">
+                <a:latin typeface="맑은 고딕 Semilight" panose="020B0502040204020203" pitchFamily="50" charset="-127"/>
+                <a:ea typeface="맑은 고딕 Semilight" panose="020B0502040204020203" pitchFamily="50" charset="-127"/>
+                <a:cs typeface="맑은 고딕 Semilight" panose="020B0502040204020203" pitchFamily="50" charset="-127"/>
+              </a:rPr>
+              <a:t>계산 가능</a:t>
+            </a:r>
+            <a:r>
+              <a:rPr lang="ko-KR" altLang="en-US" sz="1600" dirty="0">
+                <a:latin typeface="맑은 고딕 Semilight" panose="020B0502040204020203" pitchFamily="50" charset="-127"/>
+                <a:ea typeface="맑은 고딕 Semilight" panose="020B0502040204020203" pitchFamily="50" charset="-127"/>
+                <a:cs typeface="맑은 고딕 Semilight" panose="020B0502040204020203" pitchFamily="50" charset="-127"/>
+              </a:rPr>
+              <a:t> </a:t>
+            </a:r>
+            <a:endParaRPr lang="en-US" altLang="ko-KR" dirty="0">
+              <a:latin typeface="맑은 고딕 Semilight" panose="020B0502040204020203" pitchFamily="50" charset="-127"/>
+              <a:ea typeface="맑은 고딕 Semilight" panose="020B0502040204020203" pitchFamily="50" charset="-127"/>
+              <a:cs typeface="맑은 고딕 Semilight" panose="020B0502040204020203" pitchFamily="50" charset="-127"/>
+            </a:endParaRPr>
+          </a:p>
+        </p:txBody>
+      </p:sp>
+      <p:sp>
+        <p:nvSpPr>
+          <p:cNvPr id="9" name="TextBox 8">
+            <a:extLst>
+              <a:ext uri="{FF2B5EF4-FFF2-40B4-BE49-F238E27FC236}">
+                <a16:creationId xmlns:a16="http://schemas.microsoft.com/office/drawing/2014/main" id="{185A9784-515E-A3E4-8F67-F24BA80B28DC}"/>
+              </a:ext>
+            </a:extLst>
+          </p:cNvPr>
+          <p:cNvSpPr txBox="1"/>
+          <p:nvPr/>
+        </p:nvSpPr>
+        <p:spPr>
+          <a:xfrm>
+            <a:off x="119336" y="260649"/>
+            <a:ext cx="3650024" cy="584775"/>
+          </a:xfrm>
+          <a:prstGeom prst="rect">
+            <a:avLst/>
+          </a:prstGeom>
+          <a:noFill/>
+        </p:spPr>
+        <p:txBody>
+          <a:bodyPr wrap="square" rtlCol="0">
+            <a:spAutoFit/>
+          </a:bodyPr>
+          <a:lstStyle/>
+          <a:p>
+            <a:r>
+              <a:rPr lang="ko-KR" altLang="en-US" sz="3200" b="1" dirty="0">
+                <a:latin typeface="맑은 고딕 Semilight" panose="020B0502040204020203" pitchFamily="50" charset="-127"/>
+                <a:ea typeface="맑은 고딕 Semilight" panose="020B0502040204020203" pitchFamily="50" charset="-127"/>
+                <a:cs typeface="맑은 고딕 Semilight" panose="020B0502040204020203" pitchFamily="50" charset="-127"/>
+              </a:rPr>
+              <a:t>문제 풀이</a:t>
+            </a:r>
+            <a:r>
+              <a:rPr lang="en-US" altLang="ko-KR" sz="3200" b="1" dirty="0">
+                <a:latin typeface="맑은 고딕 Semilight" panose="020B0502040204020203" pitchFamily="50" charset="-127"/>
+                <a:ea typeface="맑은 고딕 Semilight" panose="020B0502040204020203" pitchFamily="50" charset="-127"/>
+                <a:cs typeface="맑은 고딕 Semilight" panose="020B0502040204020203" pitchFamily="50" charset="-127"/>
+              </a:rPr>
+              <a:t>(</a:t>
+            </a:r>
+            <a:r>
+              <a:rPr lang="ko-KR" altLang="en-US" sz="3200" b="1" dirty="0">
+                <a:latin typeface="맑은 고딕 Semilight" panose="020B0502040204020203" pitchFamily="50" charset="-127"/>
+                <a:ea typeface="맑은 고딕 Semilight" panose="020B0502040204020203" pitchFamily="50" charset="-127"/>
+                <a:cs typeface="맑은 고딕 Semilight" panose="020B0502040204020203" pitchFamily="50" charset="-127"/>
+              </a:rPr>
+              <a:t>고급</a:t>
+            </a:r>
+            <a:r>
+              <a:rPr lang="en-US" altLang="ko-KR" sz="3200" b="1" dirty="0">
+                <a:latin typeface="맑은 고딕 Semilight" panose="020B0502040204020203" pitchFamily="50" charset="-127"/>
+                <a:ea typeface="맑은 고딕 Semilight" panose="020B0502040204020203" pitchFamily="50" charset="-127"/>
+                <a:cs typeface="맑은 고딕 Semilight" panose="020B0502040204020203" pitchFamily="50" charset="-127"/>
+              </a:rPr>
+              <a:t>)</a:t>
+            </a:r>
+            <a:endParaRPr lang="ko-KR" altLang="en-US" sz="3200" b="1" dirty="0">
+              <a:latin typeface="맑은 고딕 Semilight" panose="020B0502040204020203" pitchFamily="50" charset="-127"/>
+              <a:ea typeface="맑은 고딕 Semilight" panose="020B0502040204020203" pitchFamily="50" charset="-127"/>
+              <a:cs typeface="맑은 고딕 Semilight" panose="020B0502040204020203" pitchFamily="50" charset="-127"/>
+            </a:endParaRPr>
+          </a:p>
+        </p:txBody>
+      </p:sp>
+      <p:sp>
+        <p:nvSpPr>
+          <p:cNvPr id="5" name="TextBox 4">
+            <a:extLst>
+              <a:ext uri="{FF2B5EF4-FFF2-40B4-BE49-F238E27FC236}">
+                <a16:creationId xmlns:a16="http://schemas.microsoft.com/office/drawing/2014/main" id="{52039815-B66C-C01C-F725-1707E5711FCB}"/>
+              </a:ext>
+            </a:extLst>
+          </p:cNvPr>
+          <p:cNvSpPr txBox="1"/>
+          <p:nvPr/>
+        </p:nvSpPr>
+        <p:spPr>
+          <a:xfrm>
+            <a:off x="551384" y="1656979"/>
+            <a:ext cx="11377264" cy="869790"/>
+          </a:xfrm>
+          <a:prstGeom prst="rect">
+            <a:avLst/>
+          </a:prstGeom>
+          <a:solidFill>
+            <a:schemeClr val="bg1">
+              <a:lumMod val="95000"/>
+            </a:schemeClr>
+          </a:solidFill>
+        </p:spPr>
+        <p:txBody>
+          <a:bodyPr wrap="square">
+            <a:spAutoFit/>
+          </a:bodyPr>
+          <a:lstStyle/>
+          <a:p>
+            <a:pPr marL="285750" indent="-285750">
+              <a:lnSpc>
+                <a:spcPct val="150000"/>
+              </a:lnSpc>
+              <a:buFont typeface="Wingdings" panose="05000000000000000000" pitchFamily="2" charset="2"/>
+              <a:buChar char="v"/>
+            </a:pPr>
+            <a:r>
+              <a:rPr lang="ko-KR" altLang="en-US" dirty="0">
+                <a:latin typeface="맑은 고딕 Semilight" panose="020B0502040204020203" pitchFamily="50" charset="-127"/>
+                <a:ea typeface="맑은 고딕 Semilight" panose="020B0502040204020203" pitchFamily="50" charset="-127"/>
+                <a:cs typeface="맑은 고딕 Semilight" panose="020B0502040204020203" pitchFamily="50" charset="-127"/>
+              </a:rPr>
+              <a:t>중심극한정리</a:t>
+            </a:r>
+            <a:r>
+              <a:rPr lang="en-US" altLang="ko-KR" dirty="0">
+                <a:latin typeface="맑은 고딕 Semilight" panose="020B0502040204020203" pitchFamily="50" charset="-127"/>
+                <a:ea typeface="맑은 고딕 Semilight" panose="020B0502040204020203" pitchFamily="50" charset="-127"/>
+                <a:cs typeface="맑은 고딕 Semilight" panose="020B0502040204020203" pitchFamily="50" charset="-127"/>
+              </a:rPr>
+              <a:t>(</a:t>
+            </a:r>
+            <a:r>
+              <a:rPr lang="ko-KR" altLang="en-US" dirty="0">
+                <a:latin typeface="맑은 고딕 Semilight" panose="020B0502040204020203" pitchFamily="50" charset="-127"/>
+                <a:ea typeface="맑은 고딕 Semilight" panose="020B0502040204020203" pitchFamily="50" charset="-127"/>
+                <a:cs typeface="맑은 고딕 Semilight" panose="020B0502040204020203" pitchFamily="50" charset="-127"/>
+              </a:rPr>
+              <a:t>데이터는 불규칙하지만</a:t>
+            </a:r>
+            <a:r>
+              <a:rPr lang="en-US" altLang="ko-KR" dirty="0">
+                <a:latin typeface="맑은 고딕 Semilight" panose="020B0502040204020203" pitchFamily="50" charset="-127"/>
+                <a:ea typeface="맑은 고딕 Semilight" panose="020B0502040204020203" pitchFamily="50" charset="-127"/>
+                <a:cs typeface="맑은 고딕 Semilight" panose="020B0502040204020203" pitchFamily="50" charset="-127"/>
+              </a:rPr>
+              <a:t>, </a:t>
+            </a:r>
+            <a:r>
+              <a:rPr lang="ko-KR" altLang="en-US" dirty="0">
+                <a:latin typeface="맑은 고딕 Semilight" panose="020B0502040204020203" pitchFamily="50" charset="-127"/>
+                <a:ea typeface="맑은 고딕 Semilight" panose="020B0502040204020203" pitchFamily="50" charset="-127"/>
+                <a:cs typeface="맑은 고딕 Semilight" panose="020B0502040204020203" pitchFamily="50" charset="-127"/>
+              </a:rPr>
+              <a:t>평균은 예측 가능하다 → 그래서 학습이 가능하다</a:t>
+            </a:r>
+            <a:r>
+              <a:rPr lang="en-US" altLang="ko-KR" dirty="0">
+                <a:latin typeface="맑은 고딕 Semilight" panose="020B0502040204020203" pitchFamily="50" charset="-127"/>
+                <a:ea typeface="맑은 고딕 Semilight" panose="020B0502040204020203" pitchFamily="50" charset="-127"/>
+                <a:cs typeface="맑은 고딕 Semilight" panose="020B0502040204020203" pitchFamily="50" charset="-127"/>
+              </a:rPr>
+              <a:t>)</a:t>
+            </a:r>
+            <a:r>
+              <a:rPr lang="ko-KR" altLang="en-US" dirty="0">
+                <a:latin typeface="맑은 고딕 Semilight" panose="020B0502040204020203" pitchFamily="50" charset="-127"/>
+                <a:ea typeface="맑은 고딕 Semilight" panose="020B0502040204020203" pitchFamily="50" charset="-127"/>
+                <a:cs typeface="맑은 고딕 Semilight" panose="020B0502040204020203" pitchFamily="50" charset="-127"/>
+              </a:rPr>
+              <a:t>가 </a:t>
+            </a:r>
+            <a:r>
+              <a:rPr lang="ko-KR" altLang="en-US" dirty="0" err="1">
+                <a:latin typeface="맑은 고딕 Semilight" panose="020B0502040204020203" pitchFamily="50" charset="-127"/>
+                <a:ea typeface="맑은 고딕 Semilight" panose="020B0502040204020203" pitchFamily="50" charset="-127"/>
+                <a:cs typeface="맑은 고딕 Semilight" panose="020B0502040204020203" pitchFamily="50" charset="-127"/>
+              </a:rPr>
+              <a:t>머신러닝에</a:t>
+            </a:r>
+            <a:r>
+              <a:rPr lang="ko-KR" altLang="en-US" dirty="0">
+                <a:latin typeface="맑은 고딕 Semilight" panose="020B0502040204020203" pitchFamily="50" charset="-127"/>
+                <a:ea typeface="맑은 고딕 Semilight" panose="020B0502040204020203" pitchFamily="50" charset="-127"/>
+                <a:cs typeface="맑은 고딕 Semilight" panose="020B0502040204020203" pitchFamily="50" charset="-127"/>
+              </a:rPr>
+              <a:t> 접목하는 내용을 모의실험으로 파이썬 코드로 제시하라</a:t>
+            </a:r>
+            <a:endParaRPr lang="en-US" altLang="ko-KR" dirty="0">
+              <a:latin typeface="맑은 고딕 Semilight" panose="020B0502040204020203" pitchFamily="50" charset="-127"/>
+              <a:ea typeface="맑은 고딕 Semilight" panose="020B0502040204020203" pitchFamily="50" charset="-127"/>
+              <a:cs typeface="맑은 고딕 Semilight" panose="020B0502040204020203" pitchFamily="50" charset="-127"/>
+            </a:endParaRPr>
+          </a:p>
+        </p:txBody>
+      </p:sp>
+      <p:pic>
+        <p:nvPicPr>
+          <p:cNvPr id="3" name="Picture 2" descr="한 여자가 노트북 컴퓨터에 타이핑을 하고 있다">
+            <a:extLst>
+              <a:ext uri="{FF2B5EF4-FFF2-40B4-BE49-F238E27FC236}">
+                <a16:creationId xmlns:a16="http://schemas.microsoft.com/office/drawing/2014/main" id="{B4F85ED7-5D0C-B6EA-688D-04551BD9D5C9}"/>
+              </a:ext>
+            </a:extLst>
+          </p:cNvPr>
+          <p:cNvPicPr>
+            <a:picLocks noChangeAspect="1" noChangeArrowheads="1"/>
+          </p:cNvPicPr>
+          <p:nvPr/>
+        </p:nvPicPr>
+        <p:blipFill>
+          <a:blip r:embed="rId3" cstate="print">
+            <a:extLst>
+              <a:ext uri="{28A0092B-C50C-407E-A947-70E740481C1C}">
+                <a14:useLocalDpi xmlns:a14="http://schemas.microsoft.com/office/drawing/2010/main" val="0"/>
+              </a:ext>
+            </a:extLst>
+          </a:blip>
+          <a:srcRect/>
+          <a:stretch>
+            <a:fillRect/>
+          </a:stretch>
+        </p:blipFill>
+        <p:spPr bwMode="auto">
+          <a:xfrm>
+            <a:off x="9869489" y="66676"/>
+            <a:ext cx="2152650" cy="1424329"/>
+          </a:xfrm>
+          <a:prstGeom prst="rect">
+            <a:avLst/>
+          </a:prstGeom>
+          <a:noFill/>
+          <a:extLst>
+            <a:ext uri="{909E8E84-426E-40DD-AFC4-6F175D3DCCD1}">
+              <a14:hiddenFill xmlns:a14="http://schemas.microsoft.com/office/drawing/2010/main">
+                <a:solidFill>
+                  <a:srgbClr val="FFFFFF"/>
+                </a:solidFill>
+              </a14:hiddenFill>
+            </a:ext>
+          </a:extLst>
+        </p:spPr>
+      </p:pic>
+    </p:spTree>
+    <p:extLst>
+      <p:ext uri="{BB962C8B-B14F-4D97-AF65-F5344CB8AC3E}">
+        <p14:creationId xmlns:p14="http://schemas.microsoft.com/office/powerpoint/2010/main" val="2559646205"/>
+      </p:ext>
+    </p:extLst>
+  </p:cSld>
+  <p:clrMapOvr>
+    <a:masterClrMapping/>
+  </p:clrMapOvr>
+  <mc:AlternateContent xmlns:mc="http://schemas.openxmlformats.org/markup-compatibility/2006" xmlns:p14="http://schemas.microsoft.com/office/powerpoint/2010/main">
+    <mc:Choice Requires="p14">
+      <p:transition spd="med" p14:dur="700">
+        <p:fade/>
+      </p:transition>
+    </mc:Choice>
+    <mc:Fallback xmlns="">
+      <p:transition spd="med">
+        <p:fade/>
+      </p:transition>
+    </mc:Fallback>
+  </mc:AlternateContent>
+</p:sld>
+</file>
+
+<file path=ppt/slides/slide31.xml><?xml version="1.0" encoding="utf-8"?>
+<p:sld xmlns:a="http://schemas.openxmlformats.org/drawingml/2006/main" xmlns:r="http://schemas.openxmlformats.org/officeDocument/2006/relationships" xmlns:p="http://schemas.openxmlformats.org/presentationml/2006/main">
+  <p:cSld>
+    <p:spTree>
+      <p:nvGrpSpPr>
+        <p:cNvPr id="1" name="">
+          <a:extLst>
+            <a:ext uri="{FF2B5EF4-FFF2-40B4-BE49-F238E27FC236}">
               <a16:creationId xmlns:a16="http://schemas.microsoft.com/office/drawing/2014/main" id="{9BBFE75F-6515-E02E-0A0F-4F2429757FE5}"/>
             </a:ext>
           </a:extLst>
@@ -21717,7 +22239,7 @@
             <a:pPr rtl="0"/>
             <a:fld id="{A3F31473-23EB-4724-8B59-FE6D21D89FA4}" type="slidenum">
               <a:rPr lang="en-US" altLang="ko-KR" noProof="0" smtClean="0"/>
-              <a:t>30</a:t>
+              <a:t>31</a:t>
             </a:fld>
             <a:endParaRPr lang="en-US" altLang="ko-KR" noProof="0" dirty="0"/>
           </a:p>
@@ -22789,7 +23311,7 @@
 </p:sld>
 </file>
 
-<file path=ppt/slides/slide31.xml><?xml version="1.0" encoding="utf-8"?>
+<file path=ppt/slides/slide32.xml><?xml version="1.0" encoding="utf-8"?>
 <p:sld xmlns:a="http://schemas.openxmlformats.org/drawingml/2006/main" xmlns:r="http://schemas.openxmlformats.org/officeDocument/2006/relationships" xmlns:p="http://schemas.openxmlformats.org/presentationml/2006/main">
   <p:cSld>
     <p:spTree>
@@ -23133,8 +23655,8 @@
           </a:p>
         </p:txBody>
       </p:sp>
-      <mc:AlternateContent xmlns:mc="http://schemas.openxmlformats.org/markup-compatibility/2006">
-        <mc:Choice xmlns:a14="http://schemas.microsoft.com/office/drawing/2010/main" Requires="a14">
+      <mc:AlternateContent xmlns:mc="http://schemas.openxmlformats.org/markup-compatibility/2006" xmlns:a14="http://schemas.microsoft.com/office/drawing/2010/main">
+        <mc:Choice Requires="a14">
           <p:sp>
             <p:nvSpPr>
               <p:cNvPr id="10" name="내용 개체 틀 2">
@@ -24116,7 +24638,7 @@
             </p:txBody>
           </p:sp>
         </mc:Choice>
-        <mc:Fallback>
+        <mc:Fallback xmlns="">
           <p:sp>
             <p:nvSpPr>
               <p:cNvPr id="10" name="내용 개체 틀 2">
